--- a/docs/formasaun/RbR_Sesaun_Python_SIBAR-RbR.pptx
+++ b/docs/formasaun/RbR_Sesaun_Python_SIBAR-RbR.pptx
@@ -39,9 +39,16 @@
     <p:sldId id="287" r:id="rId33"/>
     <p:sldId id="288" r:id="rId34"/>
     <p:sldId id="289" r:id="rId35"/>
+    <p:sldId id="290" r:id="rId36"/>
+    <p:sldId id="291" r:id="rId37"/>
+    <p:sldId id="292" r:id="rId38"/>
+    <p:sldId id="293" r:id="rId39"/>
+    <p:sldId id="294" r:id="rId40"/>
+    <p:sldId id="295" r:id="rId41"/>
+    <p:sldId id="296" r:id="rId42"/>
   </p:sldIdLst>
   <p:notesMasterIdLst>
-    <p:notesMasterId r:id="rId36"/>
+    <p:notesMasterId r:id="rId43"/>
   </p:notesMasterIdLst>
   <p:sldSz cx="12192000" cy="6858000"/>
   <p:notesSz cx="6858000" cy="12192000"/>
@@ -140,7 +147,7 @@
   <p:extLst>
     <p:ext uri="{521415D9-36F7-43E2-AB2F-B90AF26B5E84}">
       <p14:sectionLst xmlns:p14="http://schemas.microsoft.com/office/powerpoint/2010/main">
-        <p14:section name="Introdusaun" id="{2e23be61-b790-0e61-b313-ba343f06433b}">
+        <p14:section name="Introdusaun" id="{6fc481f0-b05a-5677-be1e-60426ed65bc5}">
           <p14:sldIdLst>
             <p14:sldId id="256"/>
             <p14:sldId id="257"/>
@@ -148,7 +155,7 @@
             <p14:sldId id="259"/>
           </p14:sldIdLst>
         </p14:section>
-        <p14:section name="Saida mak Python" id="{dd2a467e-d1d6-e63e-d482-6e1fd381558b}">
+        <p14:section name="Saida mak Python" id="{f52e3740-2865-605e-4e09-27d0ffc36e66}">
           <p14:sldIdLst>
             <p14:sldId id="260"/>
             <p14:sldId id="261"/>
@@ -157,7 +164,7 @@
             <p14:sldId id="264"/>
           </p14:sldIdLst>
         </p14:section>
-        <p14:section name="Istória Python" id="{e29809c1-78ab-edbf-b625-ded32a25480a}">
+        <p14:section name="Istória Python" id="{f1576378-9f93-24f3-d9d2-5ded00981394}">
           <p14:sldIdLst>
             <p14:sldId id="265"/>
             <p14:sldId id="266"/>
@@ -167,7 +174,7 @@
             <p14:sldId id="270"/>
           </p14:sldIdLst>
         </p14:section>
-        <p14:section name="Tanba sá Python" id="{2a08e26b-86a2-dd51-c6df-66a97a2253d4}">
+        <p14:section name="Tanba sá Python" id="{1e662323-a5ed-ecba-2bc0-294a92c07bd4}">
           <p14:sldIdLst>
             <p14:sldId id="271"/>
             <p14:sldId id="272"/>
@@ -175,7 +182,7 @@
             <p14:sldId id="274"/>
           </p14:sldIdLst>
         </p14:section>
-        <p14:section name="Python iha RbR" id="{0a8dd034-a56d-f589-f383-6857545e2d54}">
+        <p14:section name="Python iha RbR" id="{686f8348-5feb-fdc3-c09d-dc0ab434d0fe}">
           <p14:sldIdLst>
             <p14:sldId id="275"/>
             <p14:sldId id="276"/>
@@ -183,7 +190,7 @@
             <p14:sldId id="278"/>
           </p14:sldIdLst>
         </p14:section>
-        <p14:section name="Kódigu no Live" id="{9f4d18e8-cad6-1079-9edb-c01c64defa76}">
+        <p14:section name="Kódigu no Live" id="{c3314644-c13e-bf46-15b9-8617c90c9bb0}">
           <p14:sldIdLst>
             <p14:sldId id="279"/>
             <p14:sldId id="280"/>
@@ -192,18 +199,25 @@
             <p14:sldId id="283"/>
           </p14:sldIdLst>
         </p14:section>
-        <p14:section name="Futuru" id="{641f06da-8c86-4be3-eb7e-1d601598b5b4}">
+        <p14:section name="Futuru" id="{5c38bcd2-dc2d-d08d-b745-715a13360c21}">
           <p14:sldIdLst>
             <p14:sldId id="284"/>
             <p14:sldId id="285"/>
             <p14:sldId id="286"/>
           </p14:sldIdLst>
         </p14:section>
-        <p14:section name="Perguntas" id="{179421cd-d367-bbdd-d9a9-5cd4d6ac80ee}">
+        <p14:section name="Perguntas" id="{a363fa8d-fa90-16aa-2e30-8a75d8ab8bdd}">
           <p14:sldIdLst>
             <p14:sldId id="287"/>
             <p14:sldId id="288"/>
             <p14:sldId id="289"/>
+            <p14:sldId id="290"/>
+            <p14:sldId id="291"/>
+            <p14:sldId id="292"/>
+            <p14:sldId id="293"/>
+            <p14:sldId id="294"/>
+            <p14:sldId id="295"/>
+            <p14:sldId id="296"/>
           </p14:sldIdLst>
         </p14:section>
       </p14:sectionLst>
@@ -2906,7 +2920,7 @@
           <a:p>
             <a:r>
               <a:rPr lang="en-US" dirty="0"/>
-              <a:t>[11:43 – 5 min] Hatudu perguntas no resposta ne'ebé ema husu beibeik. Se partisipante nonok, uza slide ne'e atu hahú diskusaun: 'Ida-ne'ebé mak imi mós hakarak husu?' Depois loke ba perguntas livre.</a:t>
+              <a:t>[11:43 – 1 min] Fahe partisipante ba grupu 5 (kontagem 1–5 ka tuir mesa). Kada grupu hili porta-voz. Grupu ida-idak simu kartaun pergunta (imprime husi Kartaun_Grupu PDF). Diskute minutu 5, depois kada grupu aprezenta minutu 1. Hatete: la iha resposta sala, ita hakarak rona imi-nia hanoin.</a:t>
             </a:r>
             <a:endParaRPr lang="en-US" dirty="0"/>
           </a:p>
@@ -2994,7 +3008,7 @@
           <a:p>
             <a:r>
               <a:rPr lang="en-US" dirty="0"/>
-              <a:t>[11:48 – 12 min] Perguntas livre to'o 12:00. Iha rohan: fahe modulu Word/PDF ba partisipante ne'ebé hakarak aprende tan. Obrigadu.</a:t>
+              <a:t>[11:44 – 5 min] Husik slide ne'e iha ekran durante diskusaun. La'o haleu grupu, ajuda grupu ne'ebé nonok: 'Hanoin kona-ba imi-nia servisu loron-loron.' Hatete bainhira minutu 1 tan.</a:t>
             </a:r>
             <a:endParaRPr lang="en-US" dirty="0"/>
           </a:p>
@@ -3018,6 +3032,451 @@
             <a:fld id="{F7021451-1387-4CA6-816F-3879F97B5CBC}" type="slidenum">
               <a:rPr lang="en-US"/>
               <a:t>34</a:t>
+            </a:fld>
+            <a:endParaRPr lang="en-US"/>
+          </a:p>
+        </p:txBody>
+      </p:sp>
+    </p:spTree>
+    <p:extLst>
+      <p:ext uri="{BB962C8B-B14F-4D97-AF65-F5344CB8AC3E}">
+        <p14:creationId xmlns:p14="http://schemas.microsoft.com/office/powerpoint/2010/main" val="1024086991"/>
+      </p:ext>
+    </p:extLst>
+  </p:cSld>
+  <p:clrMapOvr>
+    <a:masterClrMapping/>
+  </p:clrMapOvr>
+</p:notes>
+</file>
+
+<file path=ppt/notesSlides/notesSlide35.xml><?xml version="1.0" encoding="utf-8"?>
+<p:notes xmlns:a="http://schemas.openxmlformats.org/drawingml/2006/main" xmlns:r="http://schemas.openxmlformats.org/officeDocument/2006/relationships" xmlns:p="http://schemas.openxmlformats.org/presentationml/2006/main">
+  <p:cSld>
+    <p:spTree>
+      <p:nvGrpSpPr>
+        <p:cNvPr id="1" name=""/>
+        <p:cNvGrpSpPr/>
+        <p:nvPr/>
+      </p:nvGrpSpPr>
+      <p:grpSpPr>
+        <a:xfrm>
+          <a:off x="0" y="0"/>
+          <a:ext cx="0" cy="0"/>
+          <a:chOff x="0" y="0"/>
+          <a:chExt cx="0" cy="0"/>
+        </a:xfrm>
+      </p:grpSpPr>
+      <p:sp>
+        <p:nvSpPr>
+          <p:cNvPr id="2" name="Slide Image Placeholder 1"/>
+          <p:cNvSpPr>
+            <a:spLocks noGrp="1" noRot="1" noChangeAspect="1"/>
+          </p:cNvSpPr>
+          <p:nvPr>
+            <p:ph type="sldImg"/>
+          </p:nvPr>
+        </p:nvSpPr>
+        <p:spPr/>
+      </p:sp>
+      <p:sp>
+        <p:nvSpPr>
+          <p:cNvPr id="3" name="Notes Placeholder 2"/>
+          <p:cNvSpPr>
+            <a:spLocks noGrp="1"/>
+          </p:cNvSpPr>
+          <p:nvPr>
+            <p:ph type="body" idx="1"/>
+          </p:nvPr>
+        </p:nvSpPr>
+        <p:spPr/>
+        <p:txBody>
+          <a:bodyPr/>
+          <a:lstStyle/>
+          <a:p>
+            <a:r>
+              <a:rPr lang="en-US" dirty="0"/>
+              <a:t>[11:49 – 1 min] Porta-voz Grupu 1 aprezenta. Hafoin, agradese no aumenta ideia ida se presiza.
+Resposta ezemplu: (1) 'Python mak lian atu fó ordem ba komputadór, hanesan ita fó instrusaun ba ema.' (2) Se eviksaun akontese ona (Sin), komputadór hatudu 'Kazu urjente!'. Se Lae, la hatudu buat ida. (3) Ezemplu: konta kazu kada fulan ba relatóriu, kombina Excel husi munisípiu, buka kazu duplikadu, kalkula uma-kain afetadu.</a:t>
+            </a:r>
+            <a:endParaRPr lang="en-US" dirty="0"/>
+          </a:p>
+        </p:txBody>
+      </p:sp>
+      <p:sp>
+        <p:nvSpPr>
+          <p:cNvPr id="4" name="Slide Number Placeholder 3"/>
+          <p:cNvSpPr>
+            <a:spLocks noGrp="1"/>
+          </p:cNvSpPr>
+          <p:nvPr>
+            <p:ph type="sldNum" sz="quarter" idx="10"/>
+          </p:nvPr>
+        </p:nvSpPr>
+        <p:spPr/>
+        <p:txBody>
+          <a:bodyPr/>
+          <a:lstStyle/>
+          <a:p>
+            <a:fld id="{F7021451-1387-4CA6-816F-3879F97B5CBC}" type="slidenum">
+              <a:rPr lang="en-US"/>
+              <a:t>35</a:t>
+            </a:fld>
+            <a:endParaRPr lang="en-US"/>
+          </a:p>
+        </p:txBody>
+      </p:sp>
+    </p:spTree>
+    <p:extLst>
+      <p:ext uri="{BB962C8B-B14F-4D97-AF65-F5344CB8AC3E}">
+        <p14:creationId xmlns:p14="http://schemas.microsoft.com/office/powerpoint/2010/main" val="1024086991"/>
+      </p:ext>
+    </p:extLst>
+  </p:cSld>
+  <p:clrMapOvr>
+    <a:masterClrMapping/>
+  </p:clrMapOvr>
+</p:notes>
+</file>
+
+<file path=ppt/notesSlides/notesSlide36.xml><?xml version="1.0" encoding="utf-8"?>
+<p:notes xmlns:a="http://schemas.openxmlformats.org/drawingml/2006/main" xmlns:r="http://schemas.openxmlformats.org/officeDocument/2006/relationships" xmlns:p="http://schemas.openxmlformats.org/presentationml/2006/main">
+  <p:cSld>
+    <p:spTree>
+      <p:nvGrpSpPr>
+        <p:cNvPr id="1" name=""/>
+        <p:cNvGrpSpPr/>
+        <p:nvPr/>
+      </p:nvGrpSpPr>
+      <p:grpSpPr>
+        <a:xfrm>
+          <a:off x="0" y="0"/>
+          <a:ext cx="0" cy="0"/>
+          <a:chOff x="0" y="0"/>
+          <a:chExt cx="0" cy="0"/>
+        </a:xfrm>
+      </p:grpSpPr>
+      <p:sp>
+        <p:nvSpPr>
+          <p:cNvPr id="2" name="Slide Image Placeholder 1"/>
+          <p:cNvSpPr>
+            <a:spLocks noGrp="1" noRot="1" noChangeAspect="1"/>
+          </p:cNvSpPr>
+          <p:nvPr>
+            <p:ph type="sldImg"/>
+          </p:nvPr>
+        </p:nvSpPr>
+        <p:spPr/>
+      </p:sp>
+      <p:sp>
+        <p:nvSpPr>
+          <p:cNvPr id="3" name="Notes Placeholder 2"/>
+          <p:cNvSpPr>
+            <a:spLocks noGrp="1"/>
+          </p:cNvSpPr>
+          <p:nvPr>
+            <p:ph type="body" idx="1"/>
+          </p:nvPr>
+        </p:nvSpPr>
+        <p:spPr/>
+        <p:txBody>
+          <a:bodyPr/>
+          <a:lstStyle/>
+          <a:p>
+            <a:r>
+              <a:rPr lang="en-US" dirty="0"/>
+              <a:t>[11:50 – 1 min] Porta-voz Grupu 2 aprezenta. Hafoin, agradese no aumenta ideia ida se presiza.
+Resposta ezemplu: (1) Husi programa komédia BBC 'Monty Python's Flying Circus', la'ós husi samea. (2) Buat boot bele hahú ki'ik; ideia ida + persisténsia; ema ida bele muda mundu. (3) La selu lisensa (osan ba programa), la depende ba kompañia ida, ema barak bele ajuda, seguru tanba komunidade haree no hadi'a.</a:t>
+            </a:r>
+            <a:endParaRPr lang="en-US" dirty="0"/>
+          </a:p>
+        </p:txBody>
+      </p:sp>
+      <p:sp>
+        <p:nvSpPr>
+          <p:cNvPr id="4" name="Slide Number Placeholder 3"/>
+          <p:cNvSpPr>
+            <a:spLocks noGrp="1"/>
+          </p:cNvSpPr>
+          <p:nvPr>
+            <p:ph type="sldNum" sz="quarter" idx="10"/>
+          </p:nvPr>
+        </p:nvSpPr>
+        <p:spPr/>
+        <p:txBody>
+          <a:bodyPr/>
+          <a:lstStyle/>
+          <a:p>
+            <a:fld id="{F7021451-1387-4CA6-816F-3879F97B5CBC}" type="slidenum">
+              <a:rPr lang="en-US"/>
+              <a:t>36</a:t>
+            </a:fld>
+            <a:endParaRPr lang="en-US"/>
+          </a:p>
+        </p:txBody>
+      </p:sp>
+    </p:spTree>
+    <p:extLst>
+      <p:ext uri="{BB962C8B-B14F-4D97-AF65-F5344CB8AC3E}">
+        <p14:creationId xmlns:p14="http://schemas.microsoft.com/office/powerpoint/2010/main" val="1024086991"/>
+      </p:ext>
+    </p:extLst>
+  </p:cSld>
+  <p:clrMapOvr>
+    <a:masterClrMapping/>
+  </p:clrMapOvr>
+</p:notes>
+</file>
+
+<file path=ppt/notesSlides/notesSlide37.xml><?xml version="1.0" encoding="utf-8"?>
+<p:notes xmlns:a="http://schemas.openxmlformats.org/drawingml/2006/main" xmlns:r="http://schemas.openxmlformats.org/officeDocument/2006/relationships" xmlns:p="http://schemas.openxmlformats.org/presentationml/2006/main">
+  <p:cSld>
+    <p:spTree>
+      <p:nvGrpSpPr>
+        <p:cNvPr id="1" name=""/>
+        <p:cNvGrpSpPr/>
+        <p:nvPr/>
+      </p:nvGrpSpPr>
+      <p:grpSpPr>
+        <a:xfrm>
+          <a:off x="0" y="0"/>
+          <a:ext cx="0" cy="0"/>
+          <a:chOff x="0" y="0"/>
+          <a:chExt cx="0" cy="0"/>
+        </a:xfrm>
+      </p:grpSpPr>
+      <p:sp>
+        <p:nvSpPr>
+          <p:cNvPr id="2" name="Slide Image Placeholder 1"/>
+          <p:cNvSpPr>
+            <a:spLocks noGrp="1" noRot="1" noChangeAspect="1"/>
+          </p:cNvSpPr>
+          <p:nvPr>
+            <p:ph type="sldImg"/>
+          </p:nvPr>
+        </p:nvSpPr>
+        <p:spPr/>
+      </p:sp>
+      <p:sp>
+        <p:nvSpPr>
+          <p:cNvPr id="3" name="Notes Placeholder 2"/>
+          <p:cNvSpPr>
+            <a:spLocks noGrp="1"/>
+          </p:cNvSpPr>
+          <p:nvPr>
+            <p:ph type="body" idx="1"/>
+          </p:nvPr>
+        </p:nvSpPr>
+        <p:spPr/>
+        <p:txBody>
+          <a:bodyPr/>
+          <a:lstStyle/>
+          <a:p>
+            <a:r>
+              <a:rPr lang="en-US" dirty="0"/>
+              <a:t>[11:51 – 1 min] Porta-voz Grupu 3 aprezenta. Hafoin, agradese no aumenta ideia ida se presiza.
+Resposta ezemplu: (1) Dokumentu lakon, versaun Excel barak, susar buka kazu, relatóriu manuál naruk. (2) Di'ak: buka lalais, mapa, app offline, relatóriu automátiku. Susar: aprende sistema foun, sinál internet. (3) Númeru sala (kazu barak liu loloos), governu ka doadór la fiar dadus, rekursu sala fatin. Tan ne'e SIBAR-RbR agora iha ID HP automátiku no avizu 'posivel duplikadu'.</a:t>
+            </a:r>
+            <a:endParaRPr lang="en-US" dirty="0"/>
+          </a:p>
+        </p:txBody>
+      </p:sp>
+      <p:sp>
+        <p:nvSpPr>
+          <p:cNvPr id="4" name="Slide Number Placeholder 3"/>
+          <p:cNvSpPr>
+            <a:spLocks noGrp="1"/>
+          </p:cNvSpPr>
+          <p:nvPr>
+            <p:ph type="sldNum" sz="quarter" idx="10"/>
+          </p:nvPr>
+        </p:nvSpPr>
+        <p:spPr/>
+        <p:txBody>
+          <a:bodyPr/>
+          <a:lstStyle/>
+          <a:p>
+            <a:fld id="{F7021451-1387-4CA6-816F-3879F97B5CBC}" type="slidenum">
+              <a:rPr lang="en-US"/>
+              <a:t>37</a:t>
+            </a:fld>
+            <a:endParaRPr lang="en-US"/>
+          </a:p>
+        </p:txBody>
+      </p:sp>
+    </p:spTree>
+    <p:extLst>
+      <p:ext uri="{BB962C8B-B14F-4D97-AF65-F5344CB8AC3E}">
+        <p14:creationId xmlns:p14="http://schemas.microsoft.com/office/powerpoint/2010/main" val="1024086991"/>
+      </p:ext>
+    </p:extLst>
+  </p:cSld>
+  <p:clrMapOvr>
+    <a:masterClrMapping/>
+  </p:clrMapOvr>
+</p:notes>
+</file>
+
+<file path=ppt/notesSlides/notesSlide38.xml><?xml version="1.0" encoding="utf-8"?>
+<p:notes xmlns:a="http://schemas.openxmlformats.org/drawingml/2006/main" xmlns:r="http://schemas.openxmlformats.org/officeDocument/2006/relationships" xmlns:p="http://schemas.openxmlformats.org/presentationml/2006/main">
+  <p:cSld>
+    <p:spTree>
+      <p:nvGrpSpPr>
+        <p:cNvPr id="1" name=""/>
+        <p:cNvGrpSpPr/>
+        <p:nvPr/>
+      </p:nvGrpSpPr>
+      <p:grpSpPr>
+        <a:xfrm>
+          <a:off x="0" y="0"/>
+          <a:ext cx="0" cy="0"/>
+          <a:chOff x="0" y="0"/>
+          <a:chExt cx="0" cy="0"/>
+        </a:xfrm>
+      </p:grpSpPr>
+      <p:sp>
+        <p:nvSpPr>
+          <p:cNvPr id="2" name="Slide Image Placeholder 1"/>
+          <p:cNvSpPr>
+            <a:spLocks noGrp="1" noRot="1" noChangeAspect="1"/>
+          </p:cNvSpPr>
+          <p:nvPr>
+            <p:ph type="sldImg"/>
+          </p:nvPr>
+        </p:nvSpPr>
+        <p:spPr/>
+      </p:sp>
+      <p:sp>
+        <p:nvSpPr>
+          <p:cNvPr id="3" name="Notes Placeholder 2"/>
+          <p:cNvSpPr>
+            <a:spLocks noGrp="1"/>
+          </p:cNvSpPr>
+          <p:nvPr>
+            <p:ph type="body" idx="1"/>
+          </p:nvPr>
+        </p:nvSpPr>
+        <p:spPr/>
+        <p:txBody>
+          <a:bodyPr/>
+          <a:lstStyle/>
+          <a:p>
+            <a:r>
+              <a:rPr lang="en-US" dirty="0"/>
+              <a:t>[11:52 – 1 min] Porta-voz Grupu 4 aprezenta. Hafoin, agradese no aumenta ideia ida se presiza.
+Resposta ezemplu: (1) Kazu eviksaun la iha konsultasaun molok; uma-kain afetadu; kazu urjente: hatudu impaktu loos. (2) Ezemplu: 'Munisípiu ida-ne'ebé kazu eviksaun sa'e liu iha tinan ida-ne'e?', 'Kazu hira mak entidade governu foti rai?'. (3) Evidénsia ba diálogu ho governu, relatóriu ba parlamentu no doadór, prioridade apoiu legál ba kazu urjente.</a:t>
+            </a:r>
+            <a:endParaRPr lang="en-US" dirty="0"/>
+          </a:p>
+        </p:txBody>
+      </p:sp>
+      <p:sp>
+        <p:nvSpPr>
+          <p:cNvPr id="4" name="Slide Number Placeholder 3"/>
+          <p:cNvSpPr>
+            <a:spLocks noGrp="1"/>
+          </p:cNvSpPr>
+          <p:nvPr>
+            <p:ph type="sldNum" sz="quarter" idx="10"/>
+          </p:nvPr>
+        </p:nvSpPr>
+        <p:spPr/>
+        <p:txBody>
+          <a:bodyPr/>
+          <a:lstStyle/>
+          <a:p>
+            <a:fld id="{F7021451-1387-4CA6-816F-3879F97B5CBC}" type="slidenum">
+              <a:rPr lang="en-US"/>
+              <a:t>38</a:t>
+            </a:fld>
+            <a:endParaRPr lang="en-US"/>
+          </a:p>
+        </p:txBody>
+      </p:sp>
+    </p:spTree>
+    <p:extLst>
+      <p:ext uri="{BB962C8B-B14F-4D97-AF65-F5344CB8AC3E}">
+        <p14:creationId xmlns:p14="http://schemas.microsoft.com/office/powerpoint/2010/main" val="1024086991"/>
+      </p:ext>
+    </p:extLst>
+  </p:cSld>
+  <p:clrMapOvr>
+    <a:masterClrMapping/>
+  </p:clrMapOvr>
+</p:notes>
+</file>
+
+<file path=ppt/notesSlides/notesSlide39.xml><?xml version="1.0" encoding="utf-8"?>
+<p:notes xmlns:a="http://schemas.openxmlformats.org/drawingml/2006/main" xmlns:r="http://schemas.openxmlformats.org/officeDocument/2006/relationships" xmlns:p="http://schemas.openxmlformats.org/presentationml/2006/main">
+  <p:cSld>
+    <p:spTree>
+      <p:nvGrpSpPr>
+        <p:cNvPr id="1" name=""/>
+        <p:cNvGrpSpPr/>
+        <p:nvPr/>
+      </p:nvGrpSpPr>
+      <p:grpSpPr>
+        <a:xfrm>
+          <a:off x="0" y="0"/>
+          <a:ext cx="0" cy="0"/>
+          <a:chOff x="0" y="0"/>
+          <a:chExt cx="0" cy="0"/>
+        </a:xfrm>
+      </p:grpSpPr>
+      <p:sp>
+        <p:nvSpPr>
+          <p:cNvPr id="2" name="Slide Image Placeholder 1"/>
+          <p:cNvSpPr>
+            <a:spLocks noGrp="1" noRot="1" noChangeAspect="1"/>
+          </p:cNvSpPr>
+          <p:nvPr>
+            <p:ph type="sldImg"/>
+          </p:nvPr>
+        </p:nvSpPr>
+        <p:spPr/>
+      </p:sp>
+      <p:sp>
+        <p:nvSpPr>
+          <p:cNvPr id="3" name="Notes Placeholder 2"/>
+          <p:cNvSpPr>
+            <a:spLocks noGrp="1"/>
+          </p:cNvSpPr>
+          <p:nvPr>
+            <p:ph type="body" idx="1"/>
+          </p:nvPr>
+        </p:nvSpPr>
+        <p:spPr/>
+        <p:txBody>
+          <a:bodyPr/>
+          <a:lstStyle/>
+          <a:p>
+            <a:r>
+              <a:rPr lang="en-US" dirty="0"/>
+              <a:t>[11:53 – 1 min] Porta-voz Grupu 5 aprezenta. Hafoin, agradese no aumenta ideia ida se presiza.
+Resposta ezemplu: (1) Hakerek relatóriu fulan, tradús dokumentu, responde pergunta komunidade kona-ba direitu rai, buka kazu hanesan. (2) Ko'alia ho komunidade, komprende kultura no konflitu, foti desizaun, verifika loos ka lae, akompaña iha terrenu. (3) Dadus iha servidór rasik RbR; la fahe naran ema la ho konsentimentu; ema sempre verifika rezultadu AI; asesu tuir papél.</a:t>
+            </a:r>
+            <a:endParaRPr lang="en-US" dirty="0"/>
+          </a:p>
+        </p:txBody>
+      </p:sp>
+      <p:sp>
+        <p:nvSpPr>
+          <p:cNvPr id="4" name="Slide Number Placeholder 3"/>
+          <p:cNvSpPr>
+            <a:spLocks noGrp="1"/>
+          </p:cNvSpPr>
+          <p:nvPr>
+            <p:ph type="sldNum" sz="quarter" idx="10"/>
+          </p:nvPr>
+        </p:nvSpPr>
+        <p:spPr/>
+        <p:txBody>
+          <a:bodyPr/>
+          <a:lstStyle/>
+          <a:p>
+            <a:fld id="{F7021451-1387-4CA6-816F-3879F97B5CBC}" type="slidenum">
+              <a:rPr lang="en-US"/>
+              <a:t>39</a:t>
             </a:fld>
             <a:endParaRPr lang="en-US"/>
           </a:p>
@@ -3106,6 +3565,182 @@
             <a:fld id="{F7021451-1387-4CA6-816F-3879F97B5CBC}" type="slidenum">
               <a:rPr lang="en-US"/>
               <a:t>4</a:t>
+            </a:fld>
+            <a:endParaRPr lang="en-US"/>
+          </a:p>
+        </p:txBody>
+      </p:sp>
+    </p:spTree>
+    <p:extLst>
+      <p:ext uri="{BB962C8B-B14F-4D97-AF65-F5344CB8AC3E}">
+        <p14:creationId xmlns:p14="http://schemas.microsoft.com/office/powerpoint/2010/main" val="1024086991"/>
+      </p:ext>
+    </p:extLst>
+  </p:cSld>
+  <p:clrMapOvr>
+    <a:masterClrMapping/>
+  </p:clrMapOvr>
+</p:notes>
+</file>
+
+<file path=ppt/notesSlides/notesSlide40.xml><?xml version="1.0" encoding="utf-8"?>
+<p:notes xmlns:a="http://schemas.openxmlformats.org/drawingml/2006/main" xmlns:r="http://schemas.openxmlformats.org/officeDocument/2006/relationships" xmlns:p="http://schemas.openxmlformats.org/presentationml/2006/main">
+  <p:cSld>
+    <p:spTree>
+      <p:nvGrpSpPr>
+        <p:cNvPr id="1" name=""/>
+        <p:cNvGrpSpPr/>
+        <p:nvPr/>
+      </p:nvGrpSpPr>
+      <p:grpSpPr>
+        <a:xfrm>
+          <a:off x="0" y="0"/>
+          <a:ext cx="0" cy="0"/>
+          <a:chOff x="0" y="0"/>
+          <a:chExt cx="0" cy="0"/>
+        </a:xfrm>
+      </p:grpSpPr>
+      <p:sp>
+        <p:nvSpPr>
+          <p:cNvPr id="2" name="Slide Image Placeholder 1"/>
+          <p:cNvSpPr>
+            <a:spLocks noGrp="1" noRot="1" noChangeAspect="1"/>
+          </p:cNvSpPr>
+          <p:nvPr>
+            <p:ph type="sldImg"/>
+          </p:nvPr>
+        </p:nvSpPr>
+        <p:spPr/>
+      </p:sp>
+      <p:sp>
+        <p:nvSpPr>
+          <p:cNvPr id="3" name="Notes Placeholder 2"/>
+          <p:cNvSpPr>
+            <a:spLocks noGrp="1"/>
+          </p:cNvSpPr>
+          <p:nvPr>
+            <p:ph type="body" idx="1"/>
+          </p:nvPr>
+        </p:nvSpPr>
+        <p:spPr/>
+        <p:txBody>
+          <a:bodyPr/>
+          <a:lstStyle/>
+          <a:p>
+            <a:r>
+              <a:rPr lang="en-US" dirty="0"/>
+              <a:t>[11:55 – 3 min] Hatudu perguntas no resposta ne'ebé ema husu beibeik. Se partisipante nonok, uza slide ne'e atu hahú diskusaun: 'Ida-ne'ebé mak imi mós hakarak husu?' Depois loke ba perguntas livre.</a:t>
+            </a:r>
+            <a:endParaRPr lang="en-US" dirty="0"/>
+          </a:p>
+        </p:txBody>
+      </p:sp>
+      <p:sp>
+        <p:nvSpPr>
+          <p:cNvPr id="4" name="Slide Number Placeholder 3"/>
+          <p:cNvSpPr>
+            <a:spLocks noGrp="1"/>
+          </p:cNvSpPr>
+          <p:nvPr>
+            <p:ph type="sldNum" sz="quarter" idx="10"/>
+          </p:nvPr>
+        </p:nvSpPr>
+        <p:spPr/>
+        <p:txBody>
+          <a:bodyPr/>
+          <a:lstStyle/>
+          <a:p>
+            <a:fld id="{F7021451-1387-4CA6-816F-3879F97B5CBC}" type="slidenum">
+              <a:rPr lang="en-US"/>
+              <a:t>40</a:t>
+            </a:fld>
+            <a:endParaRPr lang="en-US"/>
+          </a:p>
+        </p:txBody>
+      </p:sp>
+    </p:spTree>
+    <p:extLst>
+      <p:ext uri="{BB962C8B-B14F-4D97-AF65-F5344CB8AC3E}">
+        <p14:creationId xmlns:p14="http://schemas.microsoft.com/office/powerpoint/2010/main" val="1024086991"/>
+      </p:ext>
+    </p:extLst>
+  </p:cSld>
+  <p:clrMapOvr>
+    <a:masterClrMapping/>
+  </p:clrMapOvr>
+</p:notes>
+</file>
+
+<file path=ppt/notesSlides/notesSlide41.xml><?xml version="1.0" encoding="utf-8"?>
+<p:notes xmlns:a="http://schemas.openxmlformats.org/drawingml/2006/main" xmlns:r="http://schemas.openxmlformats.org/officeDocument/2006/relationships" xmlns:p="http://schemas.openxmlformats.org/presentationml/2006/main">
+  <p:cSld>
+    <p:spTree>
+      <p:nvGrpSpPr>
+        <p:cNvPr id="1" name=""/>
+        <p:cNvGrpSpPr/>
+        <p:nvPr/>
+      </p:nvGrpSpPr>
+      <p:grpSpPr>
+        <a:xfrm>
+          <a:off x="0" y="0"/>
+          <a:ext cx="0" cy="0"/>
+          <a:chOff x="0" y="0"/>
+          <a:chExt cx="0" cy="0"/>
+        </a:xfrm>
+      </p:grpSpPr>
+      <p:sp>
+        <p:nvSpPr>
+          <p:cNvPr id="2" name="Slide Image Placeholder 1"/>
+          <p:cNvSpPr>
+            <a:spLocks noGrp="1" noRot="1" noChangeAspect="1"/>
+          </p:cNvSpPr>
+          <p:nvPr>
+            <p:ph type="sldImg"/>
+          </p:nvPr>
+        </p:nvSpPr>
+        <p:spPr/>
+      </p:sp>
+      <p:sp>
+        <p:nvSpPr>
+          <p:cNvPr id="3" name="Notes Placeholder 2"/>
+          <p:cNvSpPr>
+            <a:spLocks noGrp="1"/>
+          </p:cNvSpPr>
+          <p:nvPr>
+            <p:ph type="body" idx="1"/>
+          </p:nvPr>
+        </p:nvSpPr>
+        <p:spPr/>
+        <p:txBody>
+          <a:bodyPr/>
+          <a:lstStyle/>
+          <a:p>
+            <a:r>
+              <a:rPr lang="en-US" dirty="0"/>
+              <a:t>[11:58 – 2 min] Perguntas ikus to'o 12:00. Iha rohan: fahe modulu Word/PDF ba partisipante ne'ebé hakarak aprende tan. Obrigadu.</a:t>
+            </a:r>
+            <a:endParaRPr lang="en-US" dirty="0"/>
+          </a:p>
+        </p:txBody>
+      </p:sp>
+      <p:sp>
+        <p:nvSpPr>
+          <p:cNvPr id="4" name="Slide Number Placeholder 3"/>
+          <p:cNvSpPr>
+            <a:spLocks noGrp="1"/>
+          </p:cNvSpPr>
+          <p:nvPr>
+            <p:ph type="sldNum" sz="quarter" idx="10"/>
+          </p:nvPr>
+        </p:nvSpPr>
+        <p:spPr/>
+        <p:txBody>
+          <a:bodyPr/>
+          <a:lstStyle/>
+          <a:p>
+            <a:fld id="{F7021451-1387-4CA6-816F-3879F97B5CBC}" type="slidenum">
+              <a:rPr lang="en-US"/>
+              <a:t>41</a:t>
             </a:fld>
             <a:endParaRPr lang="en-US"/>
           </a:p>
@@ -24906,7 +25541,7 @@
                   <a:schemeClr val="bg1"/>
                 </a:solidFill>
               </a:rPr>
-              <a:t>Perguntas no resposta</a:t>
+              <a:t>Diskusaun grupu</a:t>
             </a:r>
             <a:endParaRPr lang="en-US" sz="4400" dirty="0"/>
           </a:p>
@@ -24944,7 +25579,7 @@
                   <a:schemeClr val="bg1"/>
                 </a:solidFill>
               </a:rPr>
-              <a:t>Ita ko'alia hamutuk</a:t>
+              <a:t>Grupu 5 · pergunta 3 · ita ko'alia hamutuk</a:t>
             </a:r>
             <a:endParaRPr lang="en-US" sz="2000" dirty="0"/>
           </a:p>
@@ -25084,7 +25719,7 @@
                   <a:schemeClr val="tx2"/>
                 </a:solidFill>
               </a:rPr>
-              <a:t>Perguntas ne'ebé ema husu beibeik</a:t>
+              <a:t>Diskusaun grupu: oinsá?</a:t>
             </a:r>
             <a:endParaRPr lang="en-US" sz="3000" dirty="0"/>
           </a:p>
@@ -25155,18 +25790,18 @@
       </p:sp>
       <p:sp>
         <p:nvSpPr>
-          <p:cNvPr id="5" name="q-0"/>
-          <p:cNvSpPr/>
-          <p:nvPr/>
-        </p:nvSpPr>
-        <p:spPr>
-          <a:xfrm>
-            <a:off x="548640" y="1417320"/>
-            <a:ext cx="5410048" cy="1417320"/>
+          <p:cNvPr id="5" name="pg-0"/>
+          <p:cNvSpPr/>
+          <p:nvPr/>
+        </p:nvSpPr>
+        <p:spPr>
+          <a:xfrm>
+            <a:off x="548640" y="1463040"/>
+            <a:ext cx="2545004" cy="3017520"/>
           </a:xfrm>
           <a:prstGeom prst="roundRect">
             <a:avLst>
-              <a:gd name="adj" fmla="val 7742"/>
+              <a:gd name="adj" fmla="val 4312"/>
             </a:avLst>
           </a:prstGeom>
           <a:solidFill>
@@ -25182,14 +25817,75 @@
       </p:sp>
       <p:sp>
         <p:nvSpPr>
-          <p:cNvPr id="6" name="q-n-0"/>
-          <p:cNvSpPr/>
-          <p:nvPr/>
-        </p:nvSpPr>
-        <p:spPr>
-          <a:xfrm>
-            <a:off x="777240" y="1801368"/>
-            <a:ext cx="640080" cy="640080"/>
+          <p:cNvPr id="6" name="pg-n-0"/>
+          <p:cNvSpPr/>
+          <p:nvPr/>
+        </p:nvSpPr>
+        <p:spPr>
+          <a:xfrm>
+            <a:off x="731520" y="1600200"/>
+            <a:ext cx="457200" cy="457200"/>
+          </a:xfrm>
+          <a:prstGeom prst="ellipse">
+            <a:avLst/>
+          </a:prstGeom>
+          <a:solidFill>
+            <a:schemeClr val="tx2"/>
+          </a:solidFill>
+          <a:ln w="12700">
+            <a:solidFill>
+              <a:schemeClr val="tx2"/>
+            </a:solidFill>
+            <a:prstDash val="solid"/>
+          </a:ln>
+        </p:spPr>
+      </p:sp>
+      <p:sp>
+        <p:nvSpPr>
+          <p:cNvPr id="7" name="pg-n-0-n"/>
+          <p:cNvSpPr txBox="1"/>
+          <p:nvPr/>
+        </p:nvSpPr>
+        <p:spPr>
+          <a:xfrm>
+            <a:off x="731520" y="1600200"/>
+            <a:ext cx="457200" cy="457200"/>
+          </a:xfrm>
+          <a:prstGeom prst="rect">
+            <a:avLst/>
+          </a:prstGeom>
+          <a:noFill/>
+          <a:ln/>
+        </p:spPr>
+        <p:txBody>
+          <a:bodyPr wrap="square" lIns="0" tIns="0" rIns="0" bIns="0" rtlCol="0" anchor="ctr"/>
+          <a:lstStyle/>
+          <a:p>
+            <a:pPr algn="ctr" indent="0" marL="0">
+              <a:buNone/>
+            </a:pPr>
+            <a:r>
+              <a:rPr lang="en-US" sz="1200" b="1" dirty="0">
+                <a:solidFill>
+                  <a:schemeClr val="bg1"/>
+                </a:solidFill>
+              </a:rPr>
+              <a:t>1</a:t>
+            </a:r>
+            <a:endParaRPr lang="en-US" sz="1200" dirty="0"/>
+          </a:p>
+        </p:txBody>
+      </p:sp>
+      <p:sp>
+        <p:nvSpPr>
+          <p:cNvPr id="8" name="pg-ik-0-sirkulu"/>
+          <p:cNvSpPr/>
+          <p:nvPr/>
+        </p:nvSpPr>
+        <p:spPr>
+          <a:xfrm>
+            <a:off x="1226782" y="1783080"/>
+            <a:ext cx="1188720" cy="1188720"/>
           </a:xfrm>
           <a:prstGeom prst="ellipse">
             <a:avLst/>
@@ -25205,52 +25901,76 @@
           </a:ln>
         </p:spPr>
       </p:sp>
-      <p:sp>
-        <p:nvSpPr>
-          <p:cNvPr id="7" name="q-n-0-n"/>
-          <p:cNvSpPr txBox="1"/>
-          <p:nvPr/>
-        </p:nvSpPr>
-        <p:spPr>
-          <a:xfrm>
-            <a:off x="777240" y="1801368"/>
-            <a:ext cx="640080" cy="640080"/>
-          </a:xfrm>
-          <a:prstGeom prst="rect">
-            <a:avLst/>
-          </a:prstGeom>
-          <a:noFill/>
-          <a:ln/>
-        </p:spPr>
-        <p:txBody>
-          <a:bodyPr wrap="square" lIns="0" tIns="0" rIns="0" bIns="0" rtlCol="0" anchor="ctr"/>
+      <p:pic>
+        <p:nvPicPr>
+          <p:cNvPr id="9" name="pg-ik-0-ikone" descr="preencoded.png">    </p:cNvPr>
+          <p:cNvPicPr>
+            <a:picLocks noChangeAspect="1"/>
+          </p:cNvPicPr>
+          <p:nvPr/>
+        </p:nvPicPr>
+        <p:blipFill>
+          <a:blip r:embed="rId1"/>
+          <a:stretch>
+            <a:fillRect/>
+          </a:stretch>
+        </p:blipFill>
+        <p:spPr>
+          <a:xfrm>
+            <a:off x="1512075" y="2068373"/>
+            <a:ext cx="618134" cy="618134"/>
+          </a:xfrm>
+          <a:prstGeom prst="rect">
+            <a:avLst/>
+          </a:prstGeom>
+        </p:spPr>
+      </p:pic>
+      <p:sp>
+        <p:nvSpPr>
+          <p:cNvPr id="10" name="Text 7"/>
+          <p:cNvSpPr txBox="1"/>
+          <p:nvPr/>
+        </p:nvSpPr>
+        <p:spPr>
+          <a:xfrm>
+            <a:off x="685800" y="3154680"/>
+            <a:ext cx="2270684" cy="457200"/>
+          </a:xfrm>
+          <a:prstGeom prst="rect">
+            <a:avLst/>
+          </a:prstGeom>
+          <a:noFill/>
+          <a:ln/>
+        </p:spPr>
+        <p:txBody>
+          <a:bodyPr wrap="square" lIns="0" tIns="0" rIns="0" bIns="0" rtlCol="0" anchor="t"/>
           <a:lstStyle/>
           <a:p>
             <a:pPr algn="ctr" indent="0" marL="0">
               <a:buNone/>
             </a:pPr>
             <a:r>
-              <a:rPr lang="en-US" sz="1700" b="1" dirty="0">
-                <a:solidFill>
-                  <a:schemeClr val="bg1"/>
-                </a:solidFill>
-              </a:rPr>
-              <a:t>?</a:t>
-            </a:r>
-            <a:endParaRPr lang="en-US" sz="1700" dirty="0"/>
-          </a:p>
-        </p:txBody>
-      </p:sp>
-      <p:sp>
-        <p:nvSpPr>
-          <p:cNvPr id="8" name="Text 6"/>
-          <p:cNvSpPr txBox="1"/>
-          <p:nvPr/>
-        </p:nvSpPr>
-        <p:spPr>
-          <a:xfrm>
-            <a:off x="1600200" y="1554480"/>
-            <a:ext cx="4175608" cy="457200"/>
+              <a:rPr lang="en-US" sz="1900" b="1" dirty="0">
+                <a:solidFill>
+                  <a:schemeClr val="tx2"/>
+                </a:solidFill>
+              </a:rPr>
+              <a:t>Fahe grupu 5</a:t>
+            </a:r>
+            <a:endParaRPr lang="en-US" sz="1900" dirty="0"/>
+          </a:p>
+        </p:txBody>
+      </p:sp>
+      <p:sp>
+        <p:nvSpPr>
+          <p:cNvPr id="11" name="Text 8"/>
+          <p:cNvSpPr txBox="1"/>
+          <p:nvPr/>
+        </p:nvSpPr>
+        <p:spPr>
+          <a:xfrm>
+            <a:off x="731520" y="3611880"/>
+            <a:ext cx="2179244" cy="731520"/>
           </a:xfrm>
           <a:prstGeom prst="rect">
             <a:avLst/>
@@ -25262,43 +25982,7 @@
           <a:bodyPr wrap="square" lIns="0" tIns="0" rIns="0" bIns="0" rtlCol="0" anchor="t"/>
           <a:lstStyle/>
           <a:p>
-            <a:pPr indent="0" marL="0">
-              <a:buNone/>
-            </a:pPr>
-            <a:r>
-              <a:rPr lang="en-US" sz="1600" b="1" dirty="0">
-                <a:solidFill>
-                  <a:schemeClr val="tx2"/>
-                </a:solidFill>
-              </a:rPr>
-              <a:t>Ha'u la'ós ema IT. Bele aprende?</a:t>
-            </a:r>
-            <a:endParaRPr lang="en-US" sz="1600" dirty="0"/>
-          </a:p>
-        </p:txBody>
-      </p:sp>
-      <p:sp>
-        <p:nvSpPr>
-          <p:cNvPr id="9" name="Text 7"/>
-          <p:cNvSpPr txBox="1"/>
-          <p:nvPr/>
-        </p:nvSpPr>
-        <p:spPr>
-          <a:xfrm>
-            <a:off x="1600200" y="2011680"/>
-            <a:ext cx="4175608" cy="731520"/>
-          </a:xfrm>
-          <a:prstGeom prst="rect">
-            <a:avLst/>
-          </a:prstGeom>
-          <a:noFill/>
-          <a:ln/>
-        </p:spPr>
-        <p:txBody>
-          <a:bodyPr wrap="square" lIns="0" tIns="0" rIns="0" bIns="0" rtlCol="0" anchor="t"/>
-          <a:lstStyle/>
-          <a:p>
-            <a:pPr indent="0" marL="0">
+            <a:pPr algn="ctr" indent="0" marL="0">
               <a:buNone/>
             </a:pPr>
             <a:r>
@@ -25307,7 +25991,7 @@
                   <a:schemeClr val="tx1"/>
                 </a:solidFill>
               </a:rPr>
-              <a:t>Sin. Python lian dahuluk ba ema hahú; presiza minutu 15 loron-loron.</a:t>
+              <a:t>Ema 3–5 kada grupu</a:t>
             </a:r>
             <a:endParaRPr lang="en-US" sz="1400" dirty="0"/>
           </a:p>
@@ -25315,18 +25999,18 @@
       </p:sp>
       <p:sp>
         <p:nvSpPr>
-          <p:cNvPr id="10" name="q-1"/>
-          <p:cNvSpPr/>
-          <p:nvPr/>
-        </p:nvSpPr>
-        <p:spPr>
-          <a:xfrm>
-            <a:off x="6233008" y="1417320"/>
-            <a:ext cx="5410048" cy="1417320"/>
+          <p:cNvPr id="12" name="pg-1"/>
+          <p:cNvSpPr/>
+          <p:nvPr/>
+        </p:nvSpPr>
+        <p:spPr>
+          <a:xfrm>
+            <a:off x="3322244" y="1463040"/>
+            <a:ext cx="2545004" cy="3017520"/>
           </a:xfrm>
           <a:prstGeom prst="roundRect">
             <a:avLst>
-              <a:gd name="adj" fmla="val 7742"/>
+              <a:gd name="adj" fmla="val 4312"/>
             </a:avLst>
           </a:prstGeom>
           <a:solidFill>
@@ -25342,14 +26026,75 @@
       </p:sp>
       <p:sp>
         <p:nvSpPr>
-          <p:cNvPr id="11" name="q-n-1"/>
-          <p:cNvSpPr/>
-          <p:nvPr/>
-        </p:nvSpPr>
-        <p:spPr>
-          <a:xfrm>
-            <a:off x="6461608" y="1801368"/>
-            <a:ext cx="640080" cy="640080"/>
+          <p:cNvPr id="13" name="pg-n-1"/>
+          <p:cNvSpPr/>
+          <p:nvPr/>
+        </p:nvSpPr>
+        <p:spPr>
+          <a:xfrm>
+            <a:off x="3505124" y="1600200"/>
+            <a:ext cx="457200" cy="457200"/>
+          </a:xfrm>
+          <a:prstGeom prst="ellipse">
+            <a:avLst/>
+          </a:prstGeom>
+          <a:solidFill>
+            <a:schemeClr val="tx2"/>
+          </a:solidFill>
+          <a:ln w="12700">
+            <a:solidFill>
+              <a:schemeClr val="tx2"/>
+            </a:solidFill>
+            <a:prstDash val="solid"/>
+          </a:ln>
+        </p:spPr>
+      </p:sp>
+      <p:sp>
+        <p:nvSpPr>
+          <p:cNvPr id="14" name="pg-n-1-n"/>
+          <p:cNvSpPr txBox="1"/>
+          <p:nvPr/>
+        </p:nvSpPr>
+        <p:spPr>
+          <a:xfrm>
+            <a:off x="3505124" y="1600200"/>
+            <a:ext cx="457200" cy="457200"/>
+          </a:xfrm>
+          <a:prstGeom prst="rect">
+            <a:avLst/>
+          </a:prstGeom>
+          <a:noFill/>
+          <a:ln/>
+        </p:spPr>
+        <p:txBody>
+          <a:bodyPr wrap="square" lIns="0" tIns="0" rIns="0" bIns="0" rtlCol="0" anchor="ctr"/>
+          <a:lstStyle/>
+          <a:p>
+            <a:pPr algn="ctr" indent="0" marL="0">
+              <a:buNone/>
+            </a:pPr>
+            <a:r>
+              <a:rPr lang="en-US" sz="1200" b="1" dirty="0">
+                <a:solidFill>
+                  <a:schemeClr val="bg1"/>
+                </a:solidFill>
+              </a:rPr>
+              <a:t>2</a:t>
+            </a:r>
+            <a:endParaRPr lang="en-US" sz="1200" dirty="0"/>
+          </a:p>
+        </p:txBody>
+      </p:sp>
+      <p:sp>
+        <p:nvSpPr>
+          <p:cNvPr id="15" name="pg-ik-1-sirkulu"/>
+          <p:cNvSpPr/>
+          <p:nvPr/>
+        </p:nvSpPr>
+        <p:spPr>
+          <a:xfrm>
+            <a:off x="4000386" y="1783080"/>
+            <a:ext cx="1188720" cy="1188720"/>
           </a:xfrm>
           <a:prstGeom prst="ellipse">
             <a:avLst/>
@@ -25365,52 +26110,76 @@
           </a:ln>
         </p:spPr>
       </p:sp>
-      <p:sp>
-        <p:nvSpPr>
-          <p:cNvPr id="12" name="q-n-1-n"/>
-          <p:cNvSpPr txBox="1"/>
-          <p:nvPr/>
-        </p:nvSpPr>
-        <p:spPr>
-          <a:xfrm>
-            <a:off x="6461608" y="1801368"/>
-            <a:ext cx="640080" cy="640080"/>
-          </a:xfrm>
-          <a:prstGeom prst="rect">
-            <a:avLst/>
-          </a:prstGeom>
-          <a:noFill/>
-          <a:ln/>
-        </p:spPr>
-        <p:txBody>
-          <a:bodyPr wrap="square" lIns="0" tIns="0" rIns="0" bIns="0" rtlCol="0" anchor="ctr"/>
+      <p:pic>
+        <p:nvPicPr>
+          <p:cNvPr id="16" name="pg-ik-1-ikone" descr="preencoded.png">    </p:cNvPr>
+          <p:cNvPicPr>
+            <a:picLocks noChangeAspect="1"/>
+          </p:cNvPicPr>
+          <p:nvPr/>
+        </p:nvPicPr>
+        <p:blipFill>
+          <a:blip r:embed="rId2"/>
+          <a:stretch>
+            <a:fillRect/>
+          </a:stretch>
+        </p:blipFill>
+        <p:spPr>
+          <a:xfrm>
+            <a:off x="4285679" y="2068373"/>
+            <a:ext cx="618134" cy="618134"/>
+          </a:xfrm>
+          <a:prstGeom prst="rect">
+            <a:avLst/>
+          </a:prstGeom>
+        </p:spPr>
+      </p:pic>
+      <p:sp>
+        <p:nvSpPr>
+          <p:cNvPr id="17" name="Text 13"/>
+          <p:cNvSpPr txBox="1"/>
+          <p:nvPr/>
+        </p:nvSpPr>
+        <p:spPr>
+          <a:xfrm>
+            <a:off x="3459404" y="3154680"/>
+            <a:ext cx="2270684" cy="457200"/>
+          </a:xfrm>
+          <a:prstGeom prst="rect">
+            <a:avLst/>
+          </a:prstGeom>
+          <a:noFill/>
+          <a:ln/>
+        </p:spPr>
+        <p:txBody>
+          <a:bodyPr wrap="square" lIns="0" tIns="0" rIns="0" bIns="0" rtlCol="0" anchor="t"/>
           <a:lstStyle/>
           <a:p>
             <a:pPr algn="ctr" indent="0" marL="0">
               <a:buNone/>
             </a:pPr>
             <a:r>
-              <a:rPr lang="en-US" sz="1700" b="1" dirty="0">
-                <a:solidFill>
-                  <a:schemeClr val="bg1"/>
-                </a:solidFill>
-              </a:rPr>
-              <a:t>?</a:t>
-            </a:r>
-            <a:endParaRPr lang="en-US" sz="1700" dirty="0"/>
-          </a:p>
-        </p:txBody>
-      </p:sp>
-      <p:sp>
-        <p:nvSpPr>
-          <p:cNvPr id="13" name="Text 11"/>
-          <p:cNvSpPr txBox="1"/>
-          <p:nvPr/>
-        </p:nvSpPr>
-        <p:spPr>
-          <a:xfrm>
-            <a:off x="7284568" y="1554480"/>
-            <a:ext cx="4175608" cy="457200"/>
+              <a:rPr lang="en-US" sz="1900" b="1" dirty="0">
+                <a:solidFill>
+                  <a:schemeClr val="tx2"/>
+                </a:solidFill>
+              </a:rPr>
+              <a:t>Hili porta-voz</a:t>
+            </a:r>
+            <a:endParaRPr lang="en-US" sz="1900" dirty="0"/>
+          </a:p>
+        </p:txBody>
+      </p:sp>
+      <p:sp>
+        <p:nvSpPr>
+          <p:cNvPr id="18" name="Text 14"/>
+          <p:cNvSpPr txBox="1"/>
+          <p:nvPr/>
+        </p:nvSpPr>
+        <p:spPr>
+          <a:xfrm>
+            <a:off x="3505124" y="3611880"/>
+            <a:ext cx="2179244" cy="731520"/>
           </a:xfrm>
           <a:prstGeom prst="rect">
             <a:avLst/>
@@ -25422,43 +26191,7 @@
           <a:bodyPr wrap="square" lIns="0" tIns="0" rIns="0" bIns="0" rtlCol="0" anchor="t"/>
           <a:lstStyle/>
           <a:p>
-            <a:pPr indent="0" marL="0">
-              <a:buNone/>
-            </a:pPr>
-            <a:r>
-              <a:rPr lang="en-US" sz="1600" b="1" dirty="0">
-                <a:solidFill>
-                  <a:schemeClr val="tx2"/>
-                </a:solidFill>
-              </a:rPr>
-              <a:t>Ha'u presiza matenek matemátika?</a:t>
-            </a:r>
-            <a:endParaRPr lang="en-US" sz="1600" dirty="0"/>
-          </a:p>
-        </p:txBody>
-      </p:sp>
-      <p:sp>
-        <p:nvSpPr>
-          <p:cNvPr id="14" name="Text 12"/>
-          <p:cNvSpPr txBox="1"/>
-          <p:nvPr/>
-        </p:nvSpPr>
-        <p:spPr>
-          <a:xfrm>
-            <a:off x="7284568" y="2011680"/>
-            <a:ext cx="4175608" cy="731520"/>
-          </a:xfrm>
-          <a:prstGeom prst="rect">
-            <a:avLst/>
-          </a:prstGeom>
-          <a:noFill/>
-          <a:ln/>
-        </p:spPr>
-        <p:txBody>
-          <a:bodyPr wrap="square" lIns="0" tIns="0" rIns="0" bIns="0" rtlCol="0" anchor="t"/>
-          <a:lstStyle/>
-          <a:p>
-            <a:pPr indent="0" marL="0">
+            <a:pPr algn="ctr" indent="0" marL="0">
               <a:buNone/>
             </a:pPr>
             <a:r>
@@ -25467,7 +26200,7 @@
                   <a:schemeClr val="tx1"/>
                 </a:solidFill>
               </a:rPr>
-              <a:t>Lae. Ba dadus kazu presiza lójika simples: soma, konta, kompara.</a:t>
+              <a:t>Ema ida mak aprezenta</a:t>
             </a:r>
             <a:endParaRPr lang="en-US" sz="1400" dirty="0"/>
           </a:p>
@@ -25475,18 +26208,18 @@
       </p:sp>
       <p:sp>
         <p:nvSpPr>
-          <p:cNvPr id="15" name="q-2"/>
-          <p:cNvSpPr/>
-          <p:nvPr/>
-        </p:nvSpPr>
-        <p:spPr>
-          <a:xfrm>
-            <a:off x="548640" y="2990088"/>
-            <a:ext cx="5410048" cy="1417320"/>
+          <p:cNvPr id="19" name="pg-2"/>
+          <p:cNvSpPr/>
+          <p:nvPr/>
+        </p:nvSpPr>
+        <p:spPr>
+          <a:xfrm>
+            <a:off x="6095848" y="1463040"/>
+            <a:ext cx="2545004" cy="3017520"/>
           </a:xfrm>
           <a:prstGeom prst="roundRect">
             <a:avLst>
-              <a:gd name="adj" fmla="val 7742"/>
+              <a:gd name="adj" fmla="val 4312"/>
             </a:avLst>
           </a:prstGeom>
           <a:solidFill>
@@ -25502,14 +26235,75 @@
       </p:sp>
       <p:sp>
         <p:nvSpPr>
-          <p:cNvPr id="16" name="q-n-2"/>
-          <p:cNvSpPr/>
-          <p:nvPr/>
-        </p:nvSpPr>
-        <p:spPr>
-          <a:xfrm>
-            <a:off x="777240" y="3374136"/>
-            <a:ext cx="640080" cy="640080"/>
+          <p:cNvPr id="20" name="pg-n-2"/>
+          <p:cNvSpPr/>
+          <p:nvPr/>
+        </p:nvSpPr>
+        <p:spPr>
+          <a:xfrm>
+            <a:off x="6278728" y="1600200"/>
+            <a:ext cx="457200" cy="457200"/>
+          </a:xfrm>
+          <a:prstGeom prst="ellipse">
+            <a:avLst/>
+          </a:prstGeom>
+          <a:solidFill>
+            <a:schemeClr val="tx2"/>
+          </a:solidFill>
+          <a:ln w="12700">
+            <a:solidFill>
+              <a:schemeClr val="tx2"/>
+            </a:solidFill>
+            <a:prstDash val="solid"/>
+          </a:ln>
+        </p:spPr>
+      </p:sp>
+      <p:sp>
+        <p:nvSpPr>
+          <p:cNvPr id="21" name="pg-n-2-n"/>
+          <p:cNvSpPr txBox="1"/>
+          <p:nvPr/>
+        </p:nvSpPr>
+        <p:spPr>
+          <a:xfrm>
+            <a:off x="6278728" y="1600200"/>
+            <a:ext cx="457200" cy="457200"/>
+          </a:xfrm>
+          <a:prstGeom prst="rect">
+            <a:avLst/>
+          </a:prstGeom>
+          <a:noFill/>
+          <a:ln/>
+        </p:spPr>
+        <p:txBody>
+          <a:bodyPr wrap="square" lIns="0" tIns="0" rIns="0" bIns="0" rtlCol="0" anchor="ctr"/>
+          <a:lstStyle/>
+          <a:p>
+            <a:pPr algn="ctr" indent="0" marL="0">
+              <a:buNone/>
+            </a:pPr>
+            <a:r>
+              <a:rPr lang="en-US" sz="1200" b="1" dirty="0">
+                <a:solidFill>
+                  <a:schemeClr val="bg1"/>
+                </a:solidFill>
+              </a:rPr>
+              <a:t>3</a:t>
+            </a:r>
+            <a:endParaRPr lang="en-US" sz="1200" dirty="0"/>
+          </a:p>
+        </p:txBody>
+      </p:sp>
+      <p:sp>
+        <p:nvSpPr>
+          <p:cNvPr id="22" name="pg-ik-2-sirkulu"/>
+          <p:cNvSpPr/>
+          <p:nvPr/>
+        </p:nvSpPr>
+        <p:spPr>
+          <a:xfrm>
+            <a:off x="6773990" y="1783080"/>
+            <a:ext cx="1188720" cy="1188720"/>
           </a:xfrm>
           <a:prstGeom prst="ellipse">
             <a:avLst/>
@@ -25525,52 +26319,76 @@
           </a:ln>
         </p:spPr>
       </p:sp>
-      <p:sp>
-        <p:nvSpPr>
-          <p:cNvPr id="17" name="q-n-2-n"/>
-          <p:cNvSpPr txBox="1"/>
-          <p:nvPr/>
-        </p:nvSpPr>
-        <p:spPr>
-          <a:xfrm>
-            <a:off x="777240" y="3374136"/>
-            <a:ext cx="640080" cy="640080"/>
-          </a:xfrm>
-          <a:prstGeom prst="rect">
-            <a:avLst/>
-          </a:prstGeom>
-          <a:noFill/>
-          <a:ln/>
-        </p:spPr>
-        <p:txBody>
-          <a:bodyPr wrap="square" lIns="0" tIns="0" rIns="0" bIns="0" rtlCol="0" anchor="ctr"/>
+      <p:pic>
+        <p:nvPicPr>
+          <p:cNvPr id="23" name="pg-ik-2-ikone" descr="preencoded.png">    </p:cNvPr>
+          <p:cNvPicPr>
+            <a:picLocks noChangeAspect="1"/>
+          </p:cNvPicPr>
+          <p:nvPr/>
+        </p:nvPicPr>
+        <p:blipFill>
+          <a:blip r:embed="rId3"/>
+          <a:stretch>
+            <a:fillRect/>
+          </a:stretch>
+        </p:blipFill>
+        <p:spPr>
+          <a:xfrm>
+            <a:off x="7059282" y="2068373"/>
+            <a:ext cx="618134" cy="618134"/>
+          </a:xfrm>
+          <a:prstGeom prst="rect">
+            <a:avLst/>
+          </a:prstGeom>
+        </p:spPr>
+      </p:pic>
+      <p:sp>
+        <p:nvSpPr>
+          <p:cNvPr id="24" name="Text 19"/>
+          <p:cNvSpPr txBox="1"/>
+          <p:nvPr/>
+        </p:nvSpPr>
+        <p:spPr>
+          <a:xfrm>
+            <a:off x="6233008" y="3154680"/>
+            <a:ext cx="2270684" cy="457200"/>
+          </a:xfrm>
+          <a:prstGeom prst="rect">
+            <a:avLst/>
+          </a:prstGeom>
+          <a:noFill/>
+          <a:ln/>
+        </p:spPr>
+        <p:txBody>
+          <a:bodyPr wrap="square" lIns="0" tIns="0" rIns="0" bIns="0" rtlCol="0" anchor="t"/>
           <a:lstStyle/>
           <a:p>
             <a:pPr algn="ctr" indent="0" marL="0">
               <a:buNone/>
             </a:pPr>
             <a:r>
-              <a:rPr lang="en-US" sz="1700" b="1" dirty="0">
-                <a:solidFill>
-                  <a:schemeClr val="bg1"/>
-                </a:solidFill>
-              </a:rPr>
-              <a:t>?</a:t>
-            </a:r>
-            <a:endParaRPr lang="en-US" sz="1700" dirty="0"/>
-          </a:p>
-        </p:txBody>
-      </p:sp>
-      <p:sp>
-        <p:nvSpPr>
-          <p:cNvPr id="18" name="Text 16"/>
-          <p:cNvSpPr txBox="1"/>
-          <p:nvPr/>
-        </p:nvSpPr>
-        <p:spPr>
-          <a:xfrm>
-            <a:off x="1600200" y="3127248"/>
-            <a:ext cx="4175608" cy="457200"/>
+              <a:rPr lang="en-US" sz="1900" b="1" dirty="0">
+                <a:solidFill>
+                  <a:schemeClr val="tx2"/>
+                </a:solidFill>
+              </a:rPr>
+              <a:t>Diskute 5 min</a:t>
+            </a:r>
+            <a:endParaRPr lang="en-US" sz="1900" dirty="0"/>
+          </a:p>
+        </p:txBody>
+      </p:sp>
+      <p:sp>
+        <p:nvSpPr>
+          <p:cNvPr id="25" name="Text 20"/>
+          <p:cNvSpPr txBox="1"/>
+          <p:nvPr/>
+        </p:nvSpPr>
+        <p:spPr>
+          <a:xfrm>
+            <a:off x="6278728" y="3611880"/>
+            <a:ext cx="2179244" cy="731520"/>
           </a:xfrm>
           <a:prstGeom prst="rect">
             <a:avLst/>
@@ -25582,43 +26400,7 @@
           <a:bodyPr wrap="square" lIns="0" tIns="0" rIns="0" bIns="0" rtlCol="0" anchor="t"/>
           <a:lstStyle/>
           <a:p>
-            <a:pPr indent="0" marL="0">
-              <a:buNone/>
-            </a:pPr>
-            <a:r>
-              <a:rPr lang="en-US" sz="1600" b="1" dirty="0">
-                <a:solidFill>
-                  <a:schemeClr val="tx2"/>
-                </a:solidFill>
-              </a:rPr>
-              <a:t>Python troka Excel?</a:t>
-            </a:r>
-            <a:endParaRPr lang="en-US" sz="1600" dirty="0"/>
-          </a:p>
-        </p:txBody>
-      </p:sp>
-      <p:sp>
-        <p:nvSpPr>
-          <p:cNvPr id="19" name="Text 17"/>
-          <p:cNvSpPr txBox="1"/>
-          <p:nvPr/>
-        </p:nvSpPr>
-        <p:spPr>
-          <a:xfrm>
-            <a:off x="1600200" y="3584448"/>
-            <a:ext cx="4175608" cy="731520"/>
-          </a:xfrm>
-          <a:prstGeom prst="rect">
-            <a:avLst/>
-          </a:prstGeom>
-          <a:noFill/>
-          <a:ln/>
-        </p:spPr>
-        <p:txBody>
-          <a:bodyPr wrap="square" lIns="0" tIns="0" rIns="0" bIns="0" rtlCol="0" anchor="t"/>
-          <a:lstStyle/>
-          <a:p>
-            <a:pPr indent="0" marL="0">
+            <a:pPr algn="ctr" indent="0" marL="0">
               <a:buNone/>
             </a:pPr>
             <a:r>
@@ -25627,7 +26409,7 @@
                   <a:schemeClr val="tx1"/>
                 </a:solidFill>
               </a:rPr>
-              <a:t>Lae. Excel nafatin di'ak ba tabela ki'ik; Python ajuda dadus barak no servisu repete.</a:t>
+              <a:t>Pergunta 3 · la iha resposta sala</a:t>
             </a:r>
             <a:endParaRPr lang="en-US" sz="1400" dirty="0"/>
           </a:p>
@@ -25635,18 +26417,18 @@
       </p:sp>
       <p:sp>
         <p:nvSpPr>
-          <p:cNvPr id="20" name="q-3"/>
-          <p:cNvSpPr/>
-          <p:nvPr/>
-        </p:nvSpPr>
-        <p:spPr>
-          <a:xfrm>
-            <a:off x="6233008" y="2990088"/>
-            <a:ext cx="5410048" cy="1417320"/>
+          <p:cNvPr id="26" name="pg-3"/>
+          <p:cNvSpPr/>
+          <p:nvPr/>
+        </p:nvSpPr>
+        <p:spPr>
+          <a:xfrm>
+            <a:off x="8869451" y="1463040"/>
+            <a:ext cx="2545004" cy="3017520"/>
           </a:xfrm>
           <a:prstGeom prst="roundRect">
             <a:avLst>
-              <a:gd name="adj" fmla="val 7742"/>
+              <a:gd name="adj" fmla="val 4312"/>
             </a:avLst>
           </a:prstGeom>
           <a:solidFill>
@@ -25662,24 +26444,24 @@
       </p:sp>
       <p:sp>
         <p:nvSpPr>
-          <p:cNvPr id="21" name="q-n-3"/>
-          <p:cNvSpPr/>
-          <p:nvPr/>
-        </p:nvSpPr>
-        <p:spPr>
-          <a:xfrm>
-            <a:off x="6461608" y="3374136"/>
-            <a:ext cx="640080" cy="640080"/>
+          <p:cNvPr id="27" name="pg-n-3"/>
+          <p:cNvSpPr/>
+          <p:nvPr/>
+        </p:nvSpPr>
+        <p:spPr>
+          <a:xfrm>
+            <a:off x="9052331" y="1600200"/>
+            <a:ext cx="457200" cy="457200"/>
           </a:xfrm>
           <a:prstGeom prst="ellipse">
             <a:avLst/>
           </a:prstGeom>
           <a:solidFill>
-            <a:schemeClr val="accent1"/>
+            <a:schemeClr val="tx2"/>
           </a:solidFill>
           <a:ln w="12700">
             <a:solidFill>
-              <a:schemeClr val="accent1"/>
+              <a:schemeClr val="tx2"/>
             </a:solidFill>
             <a:prstDash val="solid"/>
           </a:ln>
@@ -25687,14 +26469,14 @@
       </p:sp>
       <p:sp>
         <p:nvSpPr>
-          <p:cNvPr id="22" name="q-n-3-n"/>
-          <p:cNvSpPr txBox="1"/>
-          <p:nvPr/>
-        </p:nvSpPr>
-        <p:spPr>
-          <a:xfrm>
-            <a:off x="6461608" y="3374136"/>
-            <a:ext cx="640080" cy="640080"/>
+          <p:cNvPr id="28" name="pg-n-3-n"/>
+          <p:cNvSpPr txBox="1"/>
+          <p:nvPr/>
+        </p:nvSpPr>
+        <p:spPr>
+          <a:xfrm>
+            <a:off x="9052331" y="1600200"/>
+            <a:ext cx="457200" cy="457200"/>
           </a:xfrm>
           <a:prstGeom prst="rect">
             <a:avLst/>
@@ -25710,136 +26492,160 @@
               <a:buNone/>
             </a:pPr>
             <a:r>
-              <a:rPr lang="en-US" sz="1700" b="1" dirty="0">
+              <a:rPr lang="en-US" sz="1200" b="1" dirty="0">
                 <a:solidFill>
                   <a:schemeClr val="bg1"/>
                 </a:solidFill>
               </a:rPr>
-              <a:t>?</a:t>
-            </a:r>
-            <a:endParaRPr lang="en-US" sz="1700" dirty="0"/>
-          </a:p>
-        </p:txBody>
-      </p:sp>
-      <p:sp>
-        <p:nvSpPr>
-          <p:cNvPr id="23" name="Text 21"/>
-          <p:cNvSpPr txBox="1"/>
-          <p:nvPr/>
-        </p:nvSpPr>
-        <p:spPr>
-          <a:xfrm>
-            <a:off x="7284568" y="3127248"/>
-            <a:ext cx="4175608" cy="457200"/>
-          </a:xfrm>
-          <a:prstGeom prst="rect">
-            <a:avLst/>
-          </a:prstGeom>
-          <a:noFill/>
-          <a:ln/>
-        </p:spPr>
-        <p:txBody>
-          <a:bodyPr wrap="square" lIns="0" tIns="0" rIns="0" bIns="0" rtlCol="0" anchor="t"/>
-          <a:lstStyle/>
-          <a:p>
-            <a:pPr indent="0" marL="0">
-              <a:buNone/>
-            </a:pPr>
-            <a:r>
-              <a:rPr lang="en-US" sz="1600" b="1" dirty="0">
-                <a:solidFill>
-                  <a:schemeClr val="tx2"/>
-                </a:solidFill>
-              </a:rPr>
-              <a:t>AI sei troka ita-nia servisu?</a:t>
-            </a:r>
-            <a:endParaRPr lang="en-US" sz="1600" dirty="0"/>
-          </a:p>
-        </p:txBody>
-      </p:sp>
-      <p:sp>
-        <p:nvSpPr>
-          <p:cNvPr id="24" name="Text 22"/>
-          <p:cNvSpPr txBox="1"/>
-          <p:nvPr/>
-        </p:nvSpPr>
-        <p:spPr>
-          <a:xfrm>
-            <a:off x="7284568" y="3584448"/>
-            <a:ext cx="4175608" cy="731520"/>
-          </a:xfrm>
-          <a:prstGeom prst="rect">
-            <a:avLst/>
-          </a:prstGeom>
-          <a:noFill/>
-          <a:ln/>
-        </p:spPr>
-        <p:txBody>
-          <a:bodyPr wrap="square" lIns="0" tIns="0" rIns="0" bIns="0" rtlCol="0" anchor="t"/>
-          <a:lstStyle/>
-          <a:p>
-            <a:pPr indent="0" marL="0">
-              <a:buNone/>
-            </a:pPr>
-            <a:r>
-              <a:rPr lang="en-US" sz="1400" dirty="0">
-                <a:solidFill>
-                  <a:schemeClr val="tx1"/>
-                </a:solidFill>
-              </a:rPr>
-              <a:t>Lae. AI ajuda servisu lalais; staf mak hatene komunidade no foti desizaun.</a:t>
-            </a:r>
-            <a:endParaRPr lang="en-US" sz="1400" dirty="0"/>
-          </a:p>
-        </p:txBody>
-      </p:sp>
-      <p:sp>
-        <p:nvSpPr>
-          <p:cNvPr id="25" name="q-4"/>
-          <p:cNvSpPr/>
-          <p:nvPr/>
-        </p:nvSpPr>
-        <p:spPr>
-          <a:xfrm>
-            <a:off x="548640" y="4562856"/>
-            <a:ext cx="5410048" cy="1417320"/>
-          </a:xfrm>
-          <a:prstGeom prst="roundRect">
-            <a:avLst>
-              <a:gd name="adj" fmla="val 7742"/>
-            </a:avLst>
+              <a:t>4</a:t>
+            </a:r>
+            <a:endParaRPr lang="en-US" sz="1200" dirty="0"/>
+          </a:p>
+        </p:txBody>
+      </p:sp>
+      <p:sp>
+        <p:nvSpPr>
+          <p:cNvPr id="29" name="pg-ik-3-sirkulu"/>
+          <p:cNvSpPr/>
+          <p:nvPr/>
+        </p:nvSpPr>
+        <p:spPr>
+          <a:xfrm>
+            <a:off x="9547593" y="1783080"/>
+            <a:ext cx="1188720" cy="1188720"/>
+          </a:xfrm>
+          <a:prstGeom prst="ellipse">
+            <a:avLst/>
           </a:prstGeom>
           <a:solidFill>
-            <a:schemeClr val="bg2"/>
+            <a:schemeClr val="accent4"/>
           </a:solidFill>
           <a:ln w="12700">
             <a:solidFill>
-              <a:schemeClr val="bg2"/>
+              <a:schemeClr val="accent4"/>
             </a:solidFill>
             <a:prstDash val="solid"/>
           </a:ln>
         </p:spPr>
       </p:sp>
-      <p:sp>
-        <p:nvSpPr>
-          <p:cNvPr id="26" name="q-n-4"/>
-          <p:cNvSpPr/>
-          <p:nvPr/>
-        </p:nvSpPr>
-        <p:spPr>
-          <a:xfrm>
-            <a:off x="777240" y="4946904"/>
-            <a:ext cx="640080" cy="640080"/>
-          </a:xfrm>
-          <a:prstGeom prst="ellipse">
-            <a:avLst/>
+      <p:pic>
+        <p:nvPicPr>
+          <p:cNvPr id="30" name="pg-ik-3-ikone" descr="preencoded.png">    </p:cNvPr>
+          <p:cNvPicPr>
+            <a:picLocks noChangeAspect="1"/>
+          </p:cNvPicPr>
+          <p:nvPr/>
+        </p:nvPicPr>
+        <p:blipFill>
+          <a:blip r:embed="rId4"/>
+          <a:stretch>
+            <a:fillRect/>
+          </a:stretch>
+        </p:blipFill>
+        <p:spPr>
+          <a:xfrm>
+            <a:off x="9832886" y="2068373"/>
+            <a:ext cx="618134" cy="618134"/>
+          </a:xfrm>
+          <a:prstGeom prst="rect">
+            <a:avLst/>
+          </a:prstGeom>
+        </p:spPr>
+      </p:pic>
+      <p:sp>
+        <p:nvSpPr>
+          <p:cNvPr id="31" name="Text 25"/>
+          <p:cNvSpPr txBox="1"/>
+          <p:nvPr/>
+        </p:nvSpPr>
+        <p:spPr>
+          <a:xfrm>
+            <a:off x="9006611" y="3154680"/>
+            <a:ext cx="2270684" cy="457200"/>
+          </a:xfrm>
+          <a:prstGeom prst="rect">
+            <a:avLst/>
+          </a:prstGeom>
+          <a:noFill/>
+          <a:ln/>
+        </p:spPr>
+        <p:txBody>
+          <a:bodyPr wrap="square" lIns="0" tIns="0" rIns="0" bIns="0" rtlCol="0" anchor="t"/>
+          <a:lstStyle/>
+          <a:p>
+            <a:pPr algn="ctr" indent="0" marL="0">
+              <a:buNone/>
+            </a:pPr>
+            <a:r>
+              <a:rPr lang="en-US" sz="1900" b="1" dirty="0">
+                <a:solidFill>
+                  <a:schemeClr val="tx2"/>
+                </a:solidFill>
+              </a:rPr>
+              <a:t>Aprezenta 1 min</a:t>
+            </a:r>
+            <a:endParaRPr lang="en-US" sz="1900" dirty="0"/>
+          </a:p>
+        </p:txBody>
+      </p:sp>
+      <p:sp>
+        <p:nvSpPr>
+          <p:cNvPr id="32" name="Text 26"/>
+          <p:cNvSpPr txBox="1"/>
+          <p:nvPr/>
+        </p:nvSpPr>
+        <p:spPr>
+          <a:xfrm>
+            <a:off x="9052331" y="3611880"/>
+            <a:ext cx="2179244" cy="731520"/>
+          </a:xfrm>
+          <a:prstGeom prst="rect">
+            <a:avLst/>
+          </a:prstGeom>
+          <a:noFill/>
+          <a:ln/>
+        </p:spPr>
+        <p:txBody>
+          <a:bodyPr wrap="square" lIns="0" tIns="0" rIns="0" bIns="0" rtlCol="0" anchor="t"/>
+          <a:lstStyle/>
+          <a:p>
+            <a:pPr algn="ctr" indent="0" marL="0">
+              <a:buNone/>
+            </a:pPr>
+            <a:r>
+              <a:rPr lang="en-US" sz="1400" dirty="0">
+                <a:solidFill>
+                  <a:schemeClr val="tx1"/>
+                </a:solidFill>
+              </a:rPr>
+              <a:t>Ideia prinsipál de'it</a:t>
+            </a:r>
+            <a:endParaRPr lang="en-US" sz="1400" dirty="0"/>
+          </a:p>
+        </p:txBody>
+      </p:sp>
+      <p:sp>
+        <p:nvSpPr>
+          <p:cNvPr id="33" name="pg-msg"/>
+          <p:cNvSpPr/>
+          <p:nvPr/>
+        </p:nvSpPr>
+        <p:spPr>
+          <a:xfrm>
+            <a:off x="548640" y="4754880"/>
+            <a:ext cx="11094415" cy="1371600"/>
+          </a:xfrm>
+          <a:prstGeom prst="roundRect">
+            <a:avLst>
+              <a:gd name="adj" fmla="val 8000"/>
+            </a:avLst>
           </a:prstGeom>
           <a:solidFill>
-            <a:schemeClr val="accent5"/>
+            <a:schemeClr val="tx2"/>
           </a:solidFill>
           <a:ln w="12700">
             <a:solidFill>
-              <a:schemeClr val="accent5"/>
+              <a:schemeClr val="tx2"/>
             </a:solidFill>
             <a:prstDash val="solid"/>
           </a:ln>
@@ -25847,14 +26653,14 @@
       </p:sp>
       <p:sp>
         <p:nvSpPr>
-          <p:cNvPr id="27" name="q-n-4-n"/>
-          <p:cNvSpPr txBox="1"/>
-          <p:nvPr/>
-        </p:nvSpPr>
-        <p:spPr>
-          <a:xfrm>
-            <a:off x="777240" y="4946904"/>
-            <a:ext cx="640080" cy="640080"/>
+          <p:cNvPr id="34" name="Text 28"/>
+          <p:cNvSpPr txBox="1"/>
+          <p:nvPr/>
+        </p:nvSpPr>
+        <p:spPr>
+          <a:xfrm>
+            <a:off x="914400" y="4754880"/>
+            <a:ext cx="10362895" cy="1371600"/>
           </a:xfrm>
           <a:prstGeom prst="rect">
             <a:avLst/>
@@ -25866,250 +26672,35 @@
           <a:bodyPr wrap="square" lIns="0" tIns="0" rIns="0" bIns="0" rtlCol="0" anchor="ctr"/>
           <a:lstStyle/>
           <a:p>
-            <a:pPr algn="ctr" indent="0" marL="0">
-              <a:buNone/>
-            </a:pPr>
-            <a:r>
-              <a:rPr lang="en-US" sz="1700" b="1" dirty="0">
+            <a:pPr indent="0" marL="0">
+              <a:buNone/>
+            </a:pPr>
+            <a:r>
+              <a:rPr lang="en-US" sz="2000" b="1" dirty="0">
+                <a:solidFill>
+                  <a:schemeClr val="accent2"/>
+                </a:solidFill>
+                <a:latin typeface="Cambria" pitchFamily="34" charset="0"/>
+                <a:ea typeface="Cambria" pitchFamily="34" charset="-122"/>
+                <a:cs typeface="Cambria" pitchFamily="34" charset="-120"/>
+              </a:rPr>
+              <a:t>Regra: </a:t>
+            </a:r>
+            <a:pPr indent="0" marL="0">
+              <a:buNone/>
+            </a:pPr>
+            <a:r>
+              <a:rPr lang="en-US" sz="2000" dirty="0">
                 <a:solidFill>
                   <a:schemeClr val="bg1"/>
                 </a:solidFill>
-              </a:rPr>
-              <a:t>?</a:t>
-            </a:r>
-            <a:endParaRPr lang="en-US" sz="1700" dirty="0"/>
-          </a:p>
-        </p:txBody>
-      </p:sp>
-      <p:sp>
-        <p:nvSpPr>
-          <p:cNvPr id="28" name="Text 26"/>
-          <p:cNvSpPr txBox="1"/>
-          <p:nvPr/>
-        </p:nvSpPr>
-        <p:spPr>
-          <a:xfrm>
-            <a:off x="1600200" y="4700016"/>
-            <a:ext cx="4175608" cy="457200"/>
-          </a:xfrm>
-          <a:prstGeom prst="rect">
-            <a:avLst/>
-          </a:prstGeom>
-          <a:noFill/>
-          <a:ln/>
-        </p:spPr>
-        <p:txBody>
-          <a:bodyPr wrap="square" lIns="0" tIns="0" rIns="0" bIns="0" rtlCol="0" anchor="t"/>
-          <a:lstStyle/>
-          <a:p>
-            <a:pPr indent="0" marL="0">
-              <a:buNone/>
-            </a:pPr>
-            <a:r>
-              <a:rPr lang="en-US" sz="1600" b="1" dirty="0">
-                <a:solidFill>
-                  <a:schemeClr val="tx2"/>
-                </a:solidFill>
-              </a:rPr>
-              <a:t>Dadus kazu eviksaun seguru?</a:t>
-            </a:r>
-            <a:endParaRPr lang="en-US" sz="1600" dirty="0"/>
-          </a:p>
-        </p:txBody>
-      </p:sp>
-      <p:sp>
-        <p:nvSpPr>
-          <p:cNvPr id="29" name="Text 27"/>
-          <p:cNvSpPr txBox="1"/>
-          <p:nvPr/>
-        </p:nvSpPr>
-        <p:spPr>
-          <a:xfrm>
-            <a:off x="1600200" y="5157216"/>
-            <a:ext cx="4175608" cy="731520"/>
-          </a:xfrm>
-          <a:prstGeom prst="rect">
-            <a:avLst/>
-          </a:prstGeom>
-          <a:noFill/>
-          <a:ln/>
-        </p:spPr>
-        <p:txBody>
-          <a:bodyPr wrap="square" lIns="0" tIns="0" rIns="0" bIns="0" rtlCol="0" anchor="t"/>
-          <a:lstStyle/>
-          <a:p>
-            <a:pPr indent="0" marL="0">
-              <a:buNone/>
-            </a:pPr>
-            <a:r>
-              <a:rPr lang="en-US" sz="1400" dirty="0">
-                <a:solidFill>
-                  <a:schemeClr val="tx1"/>
-                </a:solidFill>
-              </a:rPr>
-              <a:t>Sin: asesu tuir papél, password, PIN, enkriptasaun iha HP no log asesu.</a:t>
-            </a:r>
-            <a:endParaRPr lang="en-US" sz="1400" dirty="0"/>
-          </a:p>
-        </p:txBody>
-      </p:sp>
-      <p:sp>
-        <p:nvSpPr>
-          <p:cNvPr id="30" name="q-5"/>
-          <p:cNvSpPr/>
-          <p:nvPr/>
-        </p:nvSpPr>
-        <p:spPr>
-          <a:xfrm>
-            <a:off x="6233008" y="4562856"/>
-            <a:ext cx="5410048" cy="1417320"/>
-          </a:xfrm>
-          <a:prstGeom prst="roundRect">
-            <a:avLst>
-              <a:gd name="adj" fmla="val 7742"/>
-            </a:avLst>
-          </a:prstGeom>
-          <a:solidFill>
-            <a:schemeClr val="bg2"/>
-          </a:solidFill>
-          <a:ln w="12700">
-            <a:solidFill>
-              <a:schemeClr val="bg2"/>
-            </a:solidFill>
-            <a:prstDash val="solid"/>
-          </a:ln>
-        </p:spPr>
-      </p:sp>
-      <p:sp>
-        <p:nvSpPr>
-          <p:cNvPr id="31" name="q-n-5"/>
-          <p:cNvSpPr/>
-          <p:nvPr/>
-        </p:nvSpPr>
-        <p:spPr>
-          <a:xfrm>
-            <a:off x="6461608" y="4946904"/>
-            <a:ext cx="640080" cy="640080"/>
-          </a:xfrm>
-          <a:prstGeom prst="ellipse">
-            <a:avLst/>
-          </a:prstGeom>
-          <a:solidFill>
-            <a:schemeClr val="accent3"/>
-          </a:solidFill>
-          <a:ln w="12700">
-            <a:solidFill>
-              <a:schemeClr val="accent3"/>
-            </a:solidFill>
-            <a:prstDash val="solid"/>
-          </a:ln>
-        </p:spPr>
-      </p:sp>
-      <p:sp>
-        <p:nvSpPr>
-          <p:cNvPr id="32" name="q-n-5-n"/>
-          <p:cNvSpPr txBox="1"/>
-          <p:nvPr/>
-        </p:nvSpPr>
-        <p:spPr>
-          <a:xfrm>
-            <a:off x="6461608" y="4946904"/>
-            <a:ext cx="640080" cy="640080"/>
-          </a:xfrm>
-          <a:prstGeom prst="rect">
-            <a:avLst/>
-          </a:prstGeom>
-          <a:noFill/>
-          <a:ln/>
-        </p:spPr>
-        <p:txBody>
-          <a:bodyPr wrap="square" lIns="0" tIns="0" rIns="0" bIns="0" rtlCol="0" anchor="ctr"/>
-          <a:lstStyle/>
-          <a:p>
-            <a:pPr algn="ctr" indent="0" marL="0">
-              <a:buNone/>
-            </a:pPr>
-            <a:r>
-              <a:rPr lang="en-US" sz="1700" b="1" dirty="0">
-                <a:solidFill>
-                  <a:schemeClr val="bg1"/>
-                </a:solidFill>
-              </a:rPr>
-              <a:t>?</a:t>
-            </a:r>
-            <a:endParaRPr lang="en-US" sz="1700" dirty="0"/>
-          </a:p>
-        </p:txBody>
-      </p:sp>
-      <p:sp>
-        <p:nvSpPr>
-          <p:cNvPr id="33" name="Text 31"/>
-          <p:cNvSpPr txBox="1"/>
-          <p:nvPr/>
-        </p:nvSpPr>
-        <p:spPr>
-          <a:xfrm>
-            <a:off x="7284568" y="4700016"/>
-            <a:ext cx="4175608" cy="457200"/>
-          </a:xfrm>
-          <a:prstGeom prst="rect">
-            <a:avLst/>
-          </a:prstGeom>
-          <a:noFill/>
-          <a:ln/>
-        </p:spPr>
-        <p:txBody>
-          <a:bodyPr wrap="square" lIns="0" tIns="0" rIns="0" bIns="0" rtlCol="0" anchor="t"/>
-          <a:lstStyle/>
-          <a:p>
-            <a:pPr indent="0" marL="0">
-              <a:buNone/>
-            </a:pPr>
-            <a:r>
-              <a:rPr lang="en-US" sz="1600" b="1" dirty="0">
-                <a:solidFill>
-                  <a:schemeClr val="tx2"/>
-                </a:solidFill>
-              </a:rPr>
-              <a:t>Ha'u bele aprende iha ne'ebé?</a:t>
-            </a:r>
-            <a:endParaRPr lang="en-US" sz="1600" dirty="0"/>
-          </a:p>
-        </p:txBody>
-      </p:sp>
-      <p:sp>
-        <p:nvSpPr>
-          <p:cNvPr id="34" name="Text 32"/>
-          <p:cNvSpPr txBox="1"/>
-          <p:nvPr/>
-        </p:nvSpPr>
-        <p:spPr>
-          <a:xfrm>
-            <a:off x="7284568" y="5157216"/>
-            <a:ext cx="4175608" cy="731520"/>
-          </a:xfrm>
-          <a:prstGeom prst="rect">
-            <a:avLst/>
-          </a:prstGeom>
-          <a:noFill/>
-          <a:ln/>
-        </p:spPr>
-        <p:txBody>
-          <a:bodyPr wrap="square" lIns="0" tIns="0" rIns="0" bIns="0" rtlCol="0" anchor="t"/>
-          <a:lstStyle/>
-          <a:p>
-            <a:pPr indent="0" marL="0">
-              <a:buNone/>
-            </a:pPr>
-            <a:r>
-              <a:rPr lang="en-US" sz="1400" dirty="0">
-                <a:solidFill>
-                  <a:schemeClr val="tx1"/>
-                </a:solidFill>
-              </a:rPr>
-              <a:t>w3schools.com/python, Google Colab, no modulu Python RbR (Word/PDF).</a:t>
-            </a:r>
-            <a:endParaRPr lang="en-US" sz="1400" dirty="0"/>
+                <a:latin typeface="Cambria" pitchFamily="34" charset="0"/>
+                <a:ea typeface="Cambria" pitchFamily="34" charset="-122"/>
+                <a:cs typeface="Cambria" pitchFamily="34" charset="-120"/>
+              </a:rPr>
+              <a:t>Ema hotu ko'alia. La iha resposta sala. Uza ezemplu husi imi-nia servisu iha Rede ba Rai.</a:t>
+            </a:r>
+            <a:endParaRPr lang="en-US" sz="2000" dirty="0"/>
           </a:p>
         </p:txBody>
       </p:sp>
@@ -26193,46 +26784,285 @@
         </p:nvSpPr>
         <p:spPr>
           <a:xfrm>
-            <a:off x="548640" y="2011680"/>
-            <a:ext cx="7680960" cy="1371600"/>
-          </a:xfrm>
-          <a:prstGeom prst="rect">
-            <a:avLst/>
-          </a:prstGeom>
-          <a:noFill/>
-          <a:ln/>
-        </p:spPr>
-        <p:txBody>
-          <a:bodyPr wrap="square" lIns="0" tIns="0" rIns="0" bIns="0" rtlCol="0" anchor="b"/>
+            <a:off x="548640" y="320040"/>
+            <a:ext cx="11094415" cy="777240"/>
+          </a:xfrm>
+          <a:prstGeom prst="rect">
+            <a:avLst/>
+          </a:prstGeom>
+          <a:noFill/>
+          <a:ln/>
+        </p:spPr>
+        <p:txBody>
+          <a:bodyPr wrap="square" lIns="0" tIns="0" rIns="0" bIns="0" rtlCol="0" anchor="ctr"/>
           <a:lstStyle/>
           <a:p>
             <a:pPr algn="l" indent="0" marL="0">
               <a:buNone/>
             </a:pPr>
             <a:r>
-              <a:rPr lang="en-US" sz="5000" b="1" dirty="0">
+              <a:rPr lang="en-US" sz="3000" b="1" dirty="0">
+                <a:solidFill>
+                  <a:schemeClr val="tx2"/>
+                </a:solidFill>
+              </a:rPr>
+              <a:t>Grupu 5, tema 5</a:t>
+            </a:r>
+            <a:endParaRPr lang="en-US" sz="3000" dirty="0"/>
+          </a:p>
+        </p:txBody>
+      </p:sp>
+      <p:sp>
+        <p:nvSpPr>
+          <p:cNvPr id="3" name="tempu"/>
+          <p:cNvSpPr/>
+          <p:nvPr/>
+        </p:nvSpPr>
+        <p:spPr>
+          <a:xfrm>
+            <a:off x="10271455" y="457200"/>
+            <a:ext cx="1371600" cy="384048"/>
+          </a:xfrm>
+          <a:prstGeom prst="roundRect">
+            <a:avLst>
+              <a:gd name="adj" fmla="val 50000"/>
+            </a:avLst>
+          </a:prstGeom>
+          <a:solidFill>
+            <a:schemeClr val="bg2"/>
+          </a:solidFill>
+          <a:ln w="12700">
+            <a:solidFill>
+              <a:schemeClr val="bg2"/>
+            </a:solidFill>
+            <a:prstDash val="solid"/>
+          </a:ln>
+        </p:spPr>
+      </p:sp>
+      <p:sp>
+        <p:nvSpPr>
+          <p:cNvPr id="4" name="Text 2"/>
+          <p:cNvSpPr txBox="1"/>
+          <p:nvPr/>
+        </p:nvSpPr>
+        <p:spPr>
+          <a:xfrm>
+            <a:off x="10271455" y="457200"/>
+            <a:ext cx="1371600" cy="384048"/>
+          </a:xfrm>
+          <a:prstGeom prst="rect">
+            <a:avLst/>
+          </a:prstGeom>
+          <a:noFill/>
+          <a:ln/>
+        </p:spPr>
+        <p:txBody>
+          <a:bodyPr wrap="square" lIns="0" tIns="0" rIns="0" bIns="0" rtlCol="0" anchor="ctr"/>
+          <a:lstStyle/>
+          <a:p>
+            <a:pPr algn="ctr" indent="0" marL="0">
+              <a:buNone/>
+            </a:pPr>
+            <a:r>
+              <a:rPr lang="en-US" sz="1200" b="1" dirty="0">
+                <a:solidFill>
+                  <a:schemeClr val="accent1"/>
+                </a:solidFill>
+              </a:rPr>
+              <a:t>11:44</a:t>
+            </a:r>
+            <a:endParaRPr lang="en-US" sz="1200" dirty="0"/>
+          </a:p>
+        </p:txBody>
+      </p:sp>
+      <p:sp>
+        <p:nvSpPr>
+          <p:cNvPr id="5" name="g5-cab-0"/>
+          <p:cNvSpPr/>
+          <p:nvPr/>
+        </p:nvSpPr>
+        <p:spPr>
+          <a:xfrm>
+            <a:off x="548640" y="1417320"/>
+            <a:ext cx="2036003" cy="685800"/>
+          </a:xfrm>
+          <a:prstGeom prst="roundRect">
+            <a:avLst>
+              <a:gd name="adj" fmla="val 13333"/>
+            </a:avLst>
+          </a:prstGeom>
+          <a:solidFill>
+            <a:schemeClr val="accent6"/>
+          </a:solidFill>
+          <a:ln w="12700">
+            <a:solidFill>
+              <a:schemeClr val="accent6"/>
+            </a:solidFill>
+            <a:prstDash val="solid"/>
+          </a:ln>
+        </p:spPr>
+      </p:sp>
+      <p:sp>
+        <p:nvSpPr>
+          <p:cNvPr id="6" name="Text 4"/>
+          <p:cNvSpPr txBox="1"/>
+          <p:nvPr/>
+        </p:nvSpPr>
+        <p:spPr>
+          <a:xfrm>
+            <a:off x="548640" y="1417320"/>
+            <a:ext cx="2036003" cy="685800"/>
+          </a:xfrm>
+          <a:prstGeom prst="rect">
+            <a:avLst/>
+          </a:prstGeom>
+          <a:noFill/>
+          <a:ln/>
+        </p:spPr>
+        <p:txBody>
+          <a:bodyPr wrap="square" lIns="0" tIns="0" rIns="0" bIns="0" rtlCol="0" anchor="ctr"/>
+          <a:lstStyle/>
+          <a:p>
+            <a:pPr algn="ctr" indent="0" marL="0">
+              <a:buNone/>
+            </a:pPr>
+            <a:r>
+              <a:rPr lang="en-US" sz="2000" b="1" dirty="0">
                 <a:solidFill>
                   <a:schemeClr val="bg1"/>
                 </a:solidFill>
-              </a:rPr>
-              <a:t>Perguntas?</a:t>
-            </a:r>
-            <a:endParaRPr lang="en-US" sz="5000" dirty="0"/>
-          </a:p>
-        </p:txBody>
-      </p:sp>
-      <p:sp>
-        <p:nvSpPr>
-          <p:cNvPr id="3" name="Text 0"/>
-          <p:cNvSpPr/>
-          <p:nvPr>
-            <p:ph idx="101" type="body" hasCustomPrompt="1"/>
-          </p:nvPr>
-        </p:nvSpPr>
-        <p:spPr>
-          <a:xfrm>
-            <a:off x="548640" y="3520440"/>
-            <a:ext cx="7680960" cy="1645920"/>
+                <a:latin typeface="Cambria" pitchFamily="34" charset="0"/>
+                <a:ea typeface="Cambria" pitchFamily="34" charset="-122"/>
+                <a:cs typeface="Cambria" pitchFamily="34" charset="-120"/>
+              </a:rPr>
+              <a:t>Grupu 1</a:t>
+            </a:r>
+            <a:endParaRPr lang="en-US" sz="2000" dirty="0"/>
+          </a:p>
+        </p:txBody>
+      </p:sp>
+      <p:sp>
+        <p:nvSpPr>
+          <p:cNvPr id="7" name="g5-0"/>
+          <p:cNvSpPr/>
+          <p:nvPr/>
+        </p:nvSpPr>
+        <p:spPr>
+          <a:xfrm>
+            <a:off x="548640" y="2240280"/>
+            <a:ext cx="2036003" cy="3886200"/>
+          </a:xfrm>
+          <a:prstGeom prst="roundRect">
+            <a:avLst>
+              <a:gd name="adj" fmla="val 5389"/>
+            </a:avLst>
+          </a:prstGeom>
+          <a:solidFill>
+            <a:schemeClr val="bg2"/>
+          </a:solidFill>
+          <a:ln w="12700">
+            <a:solidFill>
+              <a:schemeClr val="bg2"/>
+            </a:solidFill>
+            <a:prstDash val="solid"/>
+          </a:ln>
+        </p:spPr>
+      </p:sp>
+      <p:sp>
+        <p:nvSpPr>
+          <p:cNvPr id="8" name="g5-ik-0-sirkulu"/>
+          <p:cNvSpPr/>
+          <p:nvPr/>
+        </p:nvSpPr>
+        <p:spPr>
+          <a:xfrm>
+            <a:off x="1109442" y="2468880"/>
+            <a:ext cx="914400" cy="914400"/>
+          </a:xfrm>
+          <a:prstGeom prst="ellipse">
+            <a:avLst/>
+          </a:prstGeom>
+          <a:solidFill>
+            <a:schemeClr val="accent6"/>
+          </a:solidFill>
+          <a:ln w="12700">
+            <a:solidFill>
+              <a:schemeClr val="accent6"/>
+            </a:solidFill>
+            <a:prstDash val="solid"/>
+          </a:ln>
+        </p:spPr>
+      </p:sp>
+      <p:pic>
+        <p:nvPicPr>
+          <p:cNvPr id="9" name="g5-ik-0-ikone" descr="preencoded.png">    </p:cNvPr>
+          <p:cNvPicPr>
+            <a:picLocks noChangeAspect="1"/>
+          </p:cNvPicPr>
+          <p:nvPr/>
+        </p:nvPicPr>
+        <p:blipFill>
+          <a:blip r:embed="rId1"/>
+          <a:stretch>
+            <a:fillRect/>
+          </a:stretch>
+        </p:blipFill>
+        <p:spPr>
+          <a:xfrm>
+            <a:off x="1328898" y="2688336"/>
+            <a:ext cx="475488" cy="475488"/>
+          </a:xfrm>
+          <a:prstGeom prst="rect">
+            <a:avLst/>
+          </a:prstGeom>
+        </p:spPr>
+      </p:pic>
+      <p:sp>
+        <p:nvSpPr>
+          <p:cNvPr id="10" name="Text 7"/>
+          <p:cNvSpPr txBox="1"/>
+          <p:nvPr/>
+        </p:nvSpPr>
+        <p:spPr>
+          <a:xfrm>
+            <a:off x="640080" y="3520440"/>
+            <a:ext cx="1853123" cy="685800"/>
+          </a:xfrm>
+          <a:prstGeom prst="rect">
+            <a:avLst/>
+          </a:prstGeom>
+          <a:noFill/>
+          <a:ln/>
+        </p:spPr>
+        <p:txBody>
+          <a:bodyPr wrap="square" lIns="0" tIns="0" rIns="0" bIns="0" rtlCol="0" anchor="ctr"/>
+          <a:lstStyle/>
+          <a:p>
+            <a:pPr algn="ctr" indent="0" marL="0">
+              <a:buNone/>
+            </a:pPr>
+            <a:r>
+              <a:rPr lang="en-US" sz="1600" b="1" dirty="0">
+                <a:solidFill>
+                  <a:schemeClr val="tx2"/>
+                </a:solidFill>
+              </a:rPr>
+              <a:t>Saida mak Python?</a:t>
+            </a:r>
+            <a:endParaRPr lang="en-US" sz="1600" dirty="0"/>
+          </a:p>
+        </p:txBody>
+      </p:sp>
+      <p:sp>
+        <p:nvSpPr>
+          <p:cNvPr id="11" name="Text 8"/>
+          <p:cNvSpPr txBox="1"/>
+          <p:nvPr/>
+        </p:nvSpPr>
+        <p:spPr>
+          <a:xfrm>
+            <a:off x="731520" y="4297680"/>
+            <a:ext cx="1670243" cy="1737360"/>
           </a:xfrm>
           <a:prstGeom prst="rect">
             <a:avLst/>
@@ -26244,30 +27074,296 @@
           <a:bodyPr wrap="square" lIns="0" tIns="0" rIns="0" bIns="0" rtlCol="0" anchor="t"/>
           <a:lstStyle/>
           <a:p>
-            <a:pPr indent="0" marL="0">
-              <a:buNone/>
-            </a:pPr>
-            <a:r>
-              <a:rPr lang="en-US" sz="2000" dirty="0">
-                <a:solidFill>
-                  <a:schemeClr val="bg2"/>
-                </a:solidFill>
-              </a:rPr>
-              <a:t>Obrigadu barak ba partisipasaun!</a:t>
+            <a:pPr algn="ctr" indent="0" marL="0">
+              <a:buNone/>
+            </a:pPr>
+            <a:r>
+              <a:rPr lang="en-US" sz="1300" i="1" dirty="0">
+                <a:solidFill>
+                  <a:schemeClr val="tx1"/>
+                </a:solidFill>
+              </a:rPr>
+              <a:t>Esplika Python ba ita-nia família ho fraze ida de'it. Saida mak imi sei dehan?</a:t>
+            </a:r>
+            <a:endParaRPr lang="en-US" sz="1300" dirty="0"/>
+          </a:p>
+        </p:txBody>
+      </p:sp>
+      <p:sp>
+        <p:nvSpPr>
+          <p:cNvPr id="12" name="g5-cab-1"/>
+          <p:cNvSpPr/>
+          <p:nvPr/>
+        </p:nvSpPr>
+        <p:spPr>
+          <a:xfrm>
+            <a:off x="2767523" y="1417320"/>
+            <a:ext cx="2036003" cy="685800"/>
+          </a:xfrm>
+          <a:prstGeom prst="roundRect">
+            <a:avLst>
+              <a:gd name="adj" fmla="val 13333"/>
+            </a:avLst>
+          </a:prstGeom>
+          <a:solidFill>
+            <a:schemeClr val="accent5"/>
+          </a:solidFill>
+          <a:ln w="12700">
+            <a:solidFill>
+              <a:schemeClr val="accent5"/>
+            </a:solidFill>
+            <a:prstDash val="solid"/>
+          </a:ln>
+        </p:spPr>
+      </p:sp>
+      <p:sp>
+        <p:nvSpPr>
+          <p:cNvPr id="13" name="Text 10"/>
+          <p:cNvSpPr txBox="1"/>
+          <p:nvPr/>
+        </p:nvSpPr>
+        <p:spPr>
+          <a:xfrm>
+            <a:off x="2767523" y="1417320"/>
+            <a:ext cx="2036003" cy="685800"/>
+          </a:xfrm>
+          <a:prstGeom prst="rect">
+            <a:avLst/>
+          </a:prstGeom>
+          <a:noFill/>
+          <a:ln/>
+        </p:spPr>
+        <p:txBody>
+          <a:bodyPr wrap="square" lIns="0" tIns="0" rIns="0" bIns="0" rtlCol="0" anchor="ctr"/>
+          <a:lstStyle/>
+          <a:p>
+            <a:pPr algn="ctr" indent="0" marL="0">
+              <a:buNone/>
+            </a:pPr>
+            <a:r>
+              <a:rPr lang="en-US" sz="2000" b="1" dirty="0">
+                <a:solidFill>
+                  <a:schemeClr val="bg1"/>
+                </a:solidFill>
+                <a:latin typeface="Cambria" pitchFamily="34" charset="0"/>
+                <a:ea typeface="Cambria" pitchFamily="34" charset="-122"/>
+                <a:cs typeface="Cambria" pitchFamily="34" charset="-120"/>
+              </a:rPr>
+              <a:t>Grupu 2</a:t>
             </a:r>
             <a:endParaRPr lang="en-US" sz="2000" dirty="0"/>
           </a:p>
-          <a:p>
-            <a:pPr indent="0" marL="0">
+        </p:txBody>
+      </p:sp>
+      <p:sp>
+        <p:nvSpPr>
+          <p:cNvPr id="14" name="g5-1"/>
+          <p:cNvSpPr/>
+          <p:nvPr/>
+        </p:nvSpPr>
+        <p:spPr>
+          <a:xfrm>
+            <a:off x="2767523" y="2240280"/>
+            <a:ext cx="2036003" cy="3886200"/>
+          </a:xfrm>
+          <a:prstGeom prst="roundRect">
+            <a:avLst>
+              <a:gd name="adj" fmla="val 5389"/>
+            </a:avLst>
+          </a:prstGeom>
+          <a:solidFill>
+            <a:schemeClr val="bg2"/>
+          </a:solidFill>
+          <a:ln w="12700">
+            <a:solidFill>
+              <a:schemeClr val="bg2"/>
+            </a:solidFill>
+            <a:prstDash val="solid"/>
+          </a:ln>
+        </p:spPr>
+      </p:sp>
+      <p:sp>
+        <p:nvSpPr>
+          <p:cNvPr id="15" name="g5-ik-1-sirkulu"/>
+          <p:cNvSpPr/>
+          <p:nvPr/>
+        </p:nvSpPr>
+        <p:spPr>
+          <a:xfrm>
+            <a:off x="3328325" y="2468880"/>
+            <a:ext cx="914400" cy="914400"/>
+          </a:xfrm>
+          <a:prstGeom prst="ellipse">
+            <a:avLst/>
+          </a:prstGeom>
+          <a:solidFill>
+            <a:schemeClr val="accent5"/>
+          </a:solidFill>
+          <a:ln w="12700">
+            <a:solidFill>
+              <a:schemeClr val="accent5"/>
+            </a:solidFill>
+            <a:prstDash val="solid"/>
+          </a:ln>
+        </p:spPr>
+      </p:sp>
+      <p:pic>
+        <p:nvPicPr>
+          <p:cNvPr id="16" name="g5-ik-1-ikone" descr="preencoded.png">    </p:cNvPr>
+          <p:cNvPicPr>
+            <a:picLocks noChangeAspect="1"/>
+          </p:cNvPicPr>
+          <p:nvPr/>
+        </p:nvPicPr>
+        <p:blipFill>
+          <a:blip r:embed="rId2"/>
+          <a:stretch>
+            <a:fillRect/>
+          </a:stretch>
+        </p:blipFill>
+        <p:spPr>
+          <a:xfrm>
+            <a:off x="3547781" y="2688336"/>
+            <a:ext cx="475488" cy="475488"/>
+          </a:xfrm>
+          <a:prstGeom prst="rect">
+            <a:avLst/>
+          </a:prstGeom>
+        </p:spPr>
+      </p:pic>
+      <p:sp>
+        <p:nvSpPr>
+          <p:cNvPr id="17" name="Text 13"/>
+          <p:cNvSpPr txBox="1"/>
+          <p:nvPr/>
+        </p:nvSpPr>
+        <p:spPr>
+          <a:xfrm>
+            <a:off x="2858963" y="3520440"/>
+            <a:ext cx="1853123" cy="685800"/>
+          </a:xfrm>
+          <a:prstGeom prst="rect">
+            <a:avLst/>
+          </a:prstGeom>
+          <a:noFill/>
+          <a:ln/>
+        </p:spPr>
+        <p:txBody>
+          <a:bodyPr wrap="square" lIns="0" tIns="0" rIns="0" bIns="0" rtlCol="0" anchor="ctr"/>
+          <a:lstStyle/>
+          <a:p>
+            <a:pPr algn="ctr" indent="0" marL="0">
+              <a:buNone/>
+            </a:pPr>
+            <a:r>
+              <a:rPr lang="en-US" sz="1600" b="1" dirty="0">
+                <a:solidFill>
+                  <a:schemeClr val="tx2"/>
+                </a:solidFill>
+              </a:rPr>
+              <a:t>Istória Python</a:t>
+            </a:r>
+            <a:endParaRPr lang="en-US" sz="1600" dirty="0"/>
+          </a:p>
+        </p:txBody>
+      </p:sp>
+      <p:sp>
+        <p:nvSpPr>
+          <p:cNvPr id="18" name="Text 14"/>
+          <p:cNvSpPr txBox="1"/>
+          <p:nvPr/>
+        </p:nvSpPr>
+        <p:spPr>
+          <a:xfrm>
+            <a:off x="2950403" y="4297680"/>
+            <a:ext cx="1670243" cy="1737360"/>
+          </a:xfrm>
+          <a:prstGeom prst="rect">
+            <a:avLst/>
+          </a:prstGeom>
+          <a:noFill/>
+          <a:ln/>
+        </p:spPr>
+        <p:txBody>
+          <a:bodyPr wrap="square" lIns="0" tIns="0" rIns="0" bIns="0" rtlCol="0" anchor="t"/>
+          <a:lstStyle/>
+          <a:p>
+            <a:pPr algn="ctr" indent="0" marL="0">
+              <a:buNone/>
+            </a:pPr>
+            <a:r>
+              <a:rPr lang="en-US" sz="1300" i="1" dirty="0">
+                <a:solidFill>
+                  <a:schemeClr val="tx1"/>
+                </a:solidFill>
+              </a:rPr>
+              <a:t>Tanba sá naran "Python"? Imi hanoin naran ne'e di'ak ka lae?</a:t>
+            </a:r>
+            <a:endParaRPr lang="en-US" sz="1300" dirty="0"/>
+          </a:p>
+        </p:txBody>
+      </p:sp>
+      <p:sp>
+        <p:nvSpPr>
+          <p:cNvPr id="19" name="g5-cab-2"/>
+          <p:cNvSpPr/>
+          <p:nvPr/>
+        </p:nvSpPr>
+        <p:spPr>
+          <a:xfrm>
+            <a:off x="4986406" y="1417320"/>
+            <a:ext cx="2036003" cy="685800"/>
+          </a:xfrm>
+          <a:prstGeom prst="roundRect">
+            <a:avLst>
+              <a:gd name="adj" fmla="val 13333"/>
+            </a:avLst>
+          </a:prstGeom>
+          <a:solidFill>
+            <a:schemeClr val="accent3"/>
+          </a:solidFill>
+          <a:ln w="12700">
+            <a:solidFill>
+              <a:schemeClr val="accent3"/>
+            </a:solidFill>
+            <a:prstDash val="solid"/>
+          </a:ln>
+        </p:spPr>
+      </p:sp>
+      <p:sp>
+        <p:nvSpPr>
+          <p:cNvPr id="20" name="Text 16"/>
+          <p:cNvSpPr txBox="1"/>
+          <p:nvPr/>
+        </p:nvSpPr>
+        <p:spPr>
+          <a:xfrm>
+            <a:off x="4986406" y="1417320"/>
+            <a:ext cx="2036003" cy="685800"/>
+          </a:xfrm>
+          <a:prstGeom prst="rect">
+            <a:avLst/>
+          </a:prstGeom>
+          <a:noFill/>
+          <a:ln/>
+        </p:spPr>
+        <p:txBody>
+          <a:bodyPr wrap="square" lIns="0" tIns="0" rIns="0" bIns="0" rtlCol="0" anchor="ctr"/>
+          <a:lstStyle/>
+          <a:p>
+            <a:pPr algn="ctr" indent="0" marL="0">
               <a:buNone/>
             </a:pPr>
             <a:r>
               <a:rPr lang="en-US" sz="2000" b="1" dirty="0">
                 <a:solidFill>
-                  <a:schemeClr val="accent2"/>
-                </a:solidFill>
-              </a:rPr>
-              <a:t>Python: lian ne'ebé harii SIBAR-RbR</a:t>
+                  <a:schemeClr val="bg1"/>
+                </a:solidFill>
+                <a:latin typeface="Cambria" pitchFamily="34" charset="0"/>
+                <a:ea typeface="Cambria" pitchFamily="34" charset="-122"/>
+                <a:cs typeface="Cambria" pitchFamily="34" charset="-120"/>
+              </a:rPr>
+              <a:t>Grupu 3</a:t>
             </a:r>
             <a:endParaRPr lang="en-US" sz="2000" dirty="0"/>
           </a:p>
@@ -26275,17 +27371,167 @@
       </p:sp>
       <p:sp>
         <p:nvSpPr>
-          <p:cNvPr id="4" name="rec-0-sirkulu"/>
-          <p:cNvSpPr/>
-          <p:nvPr/>
-        </p:nvSpPr>
-        <p:spPr>
-          <a:xfrm>
-            <a:off x="7955280" y="1371600"/>
-            <a:ext cx="868680" cy="868680"/>
+          <p:cNvPr id="21" name="g5-2"/>
+          <p:cNvSpPr/>
+          <p:nvPr/>
+        </p:nvSpPr>
+        <p:spPr>
+          <a:xfrm>
+            <a:off x="4986406" y="2240280"/>
+            <a:ext cx="2036003" cy="3886200"/>
+          </a:xfrm>
+          <a:prstGeom prst="roundRect">
+            <a:avLst>
+              <a:gd name="adj" fmla="val 5389"/>
+            </a:avLst>
+          </a:prstGeom>
+          <a:solidFill>
+            <a:schemeClr val="bg2"/>
+          </a:solidFill>
+          <a:ln w="12700">
+            <a:solidFill>
+              <a:schemeClr val="bg2"/>
+            </a:solidFill>
+            <a:prstDash val="solid"/>
+          </a:ln>
+        </p:spPr>
+      </p:sp>
+      <p:sp>
+        <p:nvSpPr>
+          <p:cNvPr id="22" name="g5-ik-2-sirkulu"/>
+          <p:cNvSpPr/>
+          <p:nvPr/>
+        </p:nvSpPr>
+        <p:spPr>
+          <a:xfrm>
+            <a:off x="5547208" y="2468880"/>
+            <a:ext cx="914400" cy="914400"/>
           </a:xfrm>
           <a:prstGeom prst="ellipse">
             <a:avLst/>
+          </a:prstGeom>
+          <a:solidFill>
+            <a:schemeClr val="accent3"/>
+          </a:solidFill>
+          <a:ln w="12700">
+            <a:solidFill>
+              <a:schemeClr val="accent3"/>
+            </a:solidFill>
+            <a:prstDash val="solid"/>
+          </a:ln>
+        </p:spPr>
+      </p:sp>
+      <p:pic>
+        <p:nvPicPr>
+          <p:cNvPr id="23" name="g5-ik-2-ikone" descr="preencoded.png">    </p:cNvPr>
+          <p:cNvPicPr>
+            <a:picLocks noChangeAspect="1"/>
+          </p:cNvPicPr>
+          <p:nvPr/>
+        </p:nvPicPr>
+        <p:blipFill>
+          <a:blip r:embed="rId3"/>
+          <a:stretch>
+            <a:fillRect/>
+          </a:stretch>
+        </p:blipFill>
+        <p:spPr>
+          <a:xfrm>
+            <a:off x="5766664" y="2688336"/>
+            <a:ext cx="475488" cy="475488"/>
+          </a:xfrm>
+          <a:prstGeom prst="rect">
+            <a:avLst/>
+          </a:prstGeom>
+        </p:spPr>
+      </p:pic>
+      <p:sp>
+        <p:nvSpPr>
+          <p:cNvPr id="24" name="Text 19"/>
+          <p:cNvSpPr txBox="1"/>
+          <p:nvPr/>
+        </p:nvSpPr>
+        <p:spPr>
+          <a:xfrm>
+            <a:off x="5077846" y="3520440"/>
+            <a:ext cx="1853123" cy="685800"/>
+          </a:xfrm>
+          <a:prstGeom prst="rect">
+            <a:avLst/>
+          </a:prstGeom>
+          <a:noFill/>
+          <a:ln/>
+        </p:spPr>
+        <p:txBody>
+          <a:bodyPr wrap="square" lIns="0" tIns="0" rIns="0" bIns="0" rtlCol="0" anchor="ctr"/>
+          <a:lstStyle/>
+          <a:p>
+            <a:pPr algn="ctr" indent="0" marL="0">
+              <a:buNone/>
+            </a:pPr>
+            <a:r>
+              <a:rPr lang="en-US" sz="1600" b="1" dirty="0">
+                <a:solidFill>
+                  <a:schemeClr val="tx2"/>
+                </a:solidFill>
+              </a:rPr>
+              <a:t>Dadus RbR: uluk no agora</a:t>
+            </a:r>
+            <a:endParaRPr lang="en-US" sz="1600" dirty="0"/>
+          </a:p>
+        </p:txBody>
+      </p:sp>
+      <p:sp>
+        <p:nvSpPr>
+          <p:cNvPr id="25" name="Text 20"/>
+          <p:cNvSpPr txBox="1"/>
+          <p:nvPr/>
+        </p:nvSpPr>
+        <p:spPr>
+          <a:xfrm>
+            <a:off x="5169286" y="4297680"/>
+            <a:ext cx="1670243" cy="1737360"/>
+          </a:xfrm>
+          <a:prstGeom prst="rect">
+            <a:avLst/>
+          </a:prstGeom>
+          <a:noFill/>
+          <a:ln/>
+        </p:spPr>
+        <p:txBody>
+          <a:bodyPr wrap="square" lIns="0" tIns="0" rIns="0" bIns="0" rtlCol="0" anchor="t"/>
+          <a:lstStyle/>
+          <a:p>
+            <a:pPr algn="ctr" indent="0" marL="0">
+              <a:buNone/>
+            </a:pPr>
+            <a:r>
+              <a:rPr lang="en-US" sz="1300" i="1" dirty="0">
+                <a:solidFill>
+                  <a:schemeClr val="tx1"/>
+                </a:solidFill>
+              </a:rPr>
+              <a:t>Iha tempu surat, Word no Excel: problema saida mak imi hasoru?</a:t>
+            </a:r>
+            <a:endParaRPr lang="en-US" sz="1300" dirty="0"/>
+          </a:p>
+        </p:txBody>
+      </p:sp>
+      <p:sp>
+        <p:nvSpPr>
+          <p:cNvPr id="26" name="g5-cab-3"/>
+          <p:cNvSpPr/>
+          <p:nvPr/>
+        </p:nvSpPr>
+        <p:spPr>
+          <a:xfrm>
+            <a:off x="7205289" y="1417320"/>
+            <a:ext cx="2036003" cy="685800"/>
+          </a:xfrm>
+          <a:prstGeom prst="roundRect">
+            <a:avLst>
+              <a:gd name="adj" fmla="val 13333"/>
+            </a:avLst>
           </a:prstGeom>
           <a:solidFill>
             <a:schemeClr val="accent1"/>
@@ -26298,9 +27544,633 @@
           </a:ln>
         </p:spPr>
       </p:sp>
+      <p:sp>
+        <p:nvSpPr>
+          <p:cNvPr id="27" name="Text 22"/>
+          <p:cNvSpPr txBox="1"/>
+          <p:nvPr/>
+        </p:nvSpPr>
+        <p:spPr>
+          <a:xfrm>
+            <a:off x="7205289" y="1417320"/>
+            <a:ext cx="2036003" cy="685800"/>
+          </a:xfrm>
+          <a:prstGeom prst="rect">
+            <a:avLst/>
+          </a:prstGeom>
+          <a:noFill/>
+          <a:ln/>
+        </p:spPr>
+        <p:txBody>
+          <a:bodyPr wrap="square" lIns="0" tIns="0" rIns="0" bIns="0" rtlCol="0" anchor="ctr"/>
+          <a:lstStyle/>
+          <a:p>
+            <a:pPr algn="ctr" indent="0" marL="0">
+              <a:buNone/>
+            </a:pPr>
+            <a:r>
+              <a:rPr lang="en-US" sz="2000" b="1" dirty="0">
+                <a:solidFill>
+                  <a:schemeClr val="bg1"/>
+                </a:solidFill>
+                <a:latin typeface="Cambria" pitchFamily="34" charset="0"/>
+                <a:ea typeface="Cambria" pitchFamily="34" charset="-122"/>
+                <a:cs typeface="Cambria" pitchFamily="34" charset="-120"/>
+              </a:rPr>
+              <a:t>Grupu 4</a:t>
+            </a:r>
+            <a:endParaRPr lang="en-US" sz="2000" dirty="0"/>
+          </a:p>
+        </p:txBody>
+      </p:sp>
+      <p:sp>
+        <p:nvSpPr>
+          <p:cNvPr id="28" name="g5-3"/>
+          <p:cNvSpPr/>
+          <p:nvPr/>
+        </p:nvSpPr>
+        <p:spPr>
+          <a:xfrm>
+            <a:off x="7205289" y="2240280"/>
+            <a:ext cx="2036003" cy="3886200"/>
+          </a:xfrm>
+          <a:prstGeom prst="roundRect">
+            <a:avLst>
+              <a:gd name="adj" fmla="val 5389"/>
+            </a:avLst>
+          </a:prstGeom>
+          <a:solidFill>
+            <a:schemeClr val="bg2"/>
+          </a:solidFill>
+          <a:ln w="12700">
+            <a:solidFill>
+              <a:schemeClr val="bg2"/>
+            </a:solidFill>
+            <a:prstDash val="solid"/>
+          </a:ln>
+        </p:spPr>
+      </p:sp>
+      <p:sp>
+        <p:nvSpPr>
+          <p:cNvPr id="29" name="g5-ik-3-sirkulu"/>
+          <p:cNvSpPr/>
+          <p:nvPr/>
+        </p:nvSpPr>
+        <p:spPr>
+          <a:xfrm>
+            <a:off x="7766091" y="2468880"/>
+            <a:ext cx="914400" cy="914400"/>
+          </a:xfrm>
+          <a:prstGeom prst="ellipse">
+            <a:avLst/>
+          </a:prstGeom>
+          <a:solidFill>
+            <a:schemeClr val="accent1"/>
+          </a:solidFill>
+          <a:ln w="12700">
+            <a:solidFill>
+              <a:schemeClr val="accent1"/>
+            </a:solidFill>
+            <a:prstDash val="solid"/>
+          </a:ln>
+        </p:spPr>
+      </p:sp>
       <p:pic>
         <p:nvPicPr>
-          <p:cNvPr id="5" name="rec-0-ikone" descr="preencoded.png">    </p:cNvPr>
+          <p:cNvPr id="30" name="g5-ik-3-ikone" descr="preencoded.png">    </p:cNvPr>
+          <p:cNvPicPr>
+            <a:picLocks noChangeAspect="1"/>
+          </p:cNvPicPr>
+          <p:nvPr/>
+        </p:nvPicPr>
+        <p:blipFill>
+          <a:blip r:embed="rId4"/>
+          <a:stretch>
+            <a:fillRect/>
+          </a:stretch>
+        </p:blipFill>
+        <p:spPr>
+          <a:xfrm>
+            <a:off x="7985547" y="2688336"/>
+            <a:ext cx="475488" cy="475488"/>
+          </a:xfrm>
+          <a:prstGeom prst="rect">
+            <a:avLst/>
+          </a:prstGeom>
+        </p:spPr>
+      </p:pic>
+      <p:sp>
+        <p:nvSpPr>
+          <p:cNvPr id="31" name="Text 25"/>
+          <p:cNvSpPr txBox="1"/>
+          <p:nvPr/>
+        </p:nvSpPr>
+        <p:spPr>
+          <a:xfrm>
+            <a:off x="7296729" y="3520440"/>
+            <a:ext cx="1853123" cy="685800"/>
+          </a:xfrm>
+          <a:prstGeom prst="rect">
+            <a:avLst/>
+          </a:prstGeom>
+          <a:noFill/>
+          <a:ln/>
+        </p:spPr>
+        <p:txBody>
+          <a:bodyPr wrap="square" lIns="0" tIns="0" rIns="0" bIns="0" rtlCol="0" anchor="ctr"/>
+          <a:lstStyle/>
+          <a:p>
+            <a:pPr algn="ctr" indent="0" marL="0">
+              <a:buNone/>
+            </a:pPr>
+            <a:r>
+              <a:rPr lang="en-US" sz="1600" b="1" dirty="0">
+                <a:solidFill>
+                  <a:schemeClr val="tx2"/>
+                </a:solidFill>
+              </a:rPr>
+              <a:t>Dadus ba advokasia</a:t>
+            </a:r>
+            <a:endParaRPr lang="en-US" sz="1600" dirty="0"/>
+          </a:p>
+        </p:txBody>
+      </p:sp>
+      <p:sp>
+        <p:nvSpPr>
+          <p:cNvPr id="32" name="Text 26"/>
+          <p:cNvSpPr txBox="1"/>
+          <p:nvPr/>
+        </p:nvSpPr>
+        <p:spPr>
+          <a:xfrm>
+            <a:off x="7388169" y="4297680"/>
+            <a:ext cx="1670243" cy="1737360"/>
+          </a:xfrm>
+          <a:prstGeom prst="rect">
+            <a:avLst/>
+          </a:prstGeom>
+          <a:noFill/>
+          <a:ln/>
+        </p:spPr>
+        <p:txBody>
+          <a:bodyPr wrap="square" lIns="0" tIns="0" rIns="0" bIns="0" rtlCol="0" anchor="t"/>
+          <a:lstStyle/>
+          <a:p>
+            <a:pPr algn="ctr" indent="0" marL="0">
+              <a:buNone/>
+            </a:pPr>
+            <a:r>
+              <a:rPr lang="en-US" sz="1300" i="1" dirty="0">
+                <a:solidFill>
+                  <a:schemeClr val="tx1"/>
+                </a:solidFill>
+              </a:rPr>
+              <a:t>Númeru ida-ne'ebé iha Live Dashboard mak importante liu ba advokasia? Tanba sá?</a:t>
+            </a:r>
+            <a:endParaRPr lang="en-US" sz="1300" dirty="0"/>
+          </a:p>
+        </p:txBody>
+      </p:sp>
+      <p:sp>
+        <p:nvSpPr>
+          <p:cNvPr id="33" name="g5-cab-4"/>
+          <p:cNvSpPr/>
+          <p:nvPr/>
+        </p:nvSpPr>
+        <p:spPr>
+          <a:xfrm>
+            <a:off x="9424172" y="1417320"/>
+            <a:ext cx="2036003" cy="685800"/>
+          </a:xfrm>
+          <a:prstGeom prst="roundRect">
+            <a:avLst>
+              <a:gd name="adj" fmla="val 13333"/>
+            </a:avLst>
+          </a:prstGeom>
+          <a:solidFill>
+            <a:schemeClr val="accent4"/>
+          </a:solidFill>
+          <a:ln w="12700">
+            <a:solidFill>
+              <a:schemeClr val="accent4"/>
+            </a:solidFill>
+            <a:prstDash val="solid"/>
+          </a:ln>
+        </p:spPr>
+      </p:sp>
+      <p:sp>
+        <p:nvSpPr>
+          <p:cNvPr id="34" name="Text 28"/>
+          <p:cNvSpPr txBox="1"/>
+          <p:nvPr/>
+        </p:nvSpPr>
+        <p:spPr>
+          <a:xfrm>
+            <a:off x="9424172" y="1417320"/>
+            <a:ext cx="2036003" cy="685800"/>
+          </a:xfrm>
+          <a:prstGeom prst="rect">
+            <a:avLst/>
+          </a:prstGeom>
+          <a:noFill/>
+          <a:ln/>
+        </p:spPr>
+        <p:txBody>
+          <a:bodyPr wrap="square" lIns="0" tIns="0" rIns="0" bIns="0" rtlCol="0" anchor="ctr"/>
+          <a:lstStyle/>
+          <a:p>
+            <a:pPr algn="ctr" indent="0" marL="0">
+              <a:buNone/>
+            </a:pPr>
+            <a:r>
+              <a:rPr lang="en-US" sz="2000" b="1" dirty="0">
+                <a:solidFill>
+                  <a:schemeClr val="bg1"/>
+                </a:solidFill>
+                <a:latin typeface="Cambria" pitchFamily="34" charset="0"/>
+                <a:ea typeface="Cambria" pitchFamily="34" charset="-122"/>
+                <a:cs typeface="Cambria" pitchFamily="34" charset="-120"/>
+              </a:rPr>
+              <a:t>Grupu 5</a:t>
+            </a:r>
+            <a:endParaRPr lang="en-US" sz="2000" dirty="0"/>
+          </a:p>
+        </p:txBody>
+      </p:sp>
+      <p:sp>
+        <p:nvSpPr>
+          <p:cNvPr id="35" name="g5-4"/>
+          <p:cNvSpPr/>
+          <p:nvPr/>
+        </p:nvSpPr>
+        <p:spPr>
+          <a:xfrm>
+            <a:off x="9424172" y="2240280"/>
+            <a:ext cx="2036003" cy="3886200"/>
+          </a:xfrm>
+          <a:prstGeom prst="roundRect">
+            <a:avLst>
+              <a:gd name="adj" fmla="val 5389"/>
+            </a:avLst>
+          </a:prstGeom>
+          <a:solidFill>
+            <a:schemeClr val="bg2"/>
+          </a:solidFill>
+          <a:ln w="12700">
+            <a:solidFill>
+              <a:schemeClr val="bg2"/>
+            </a:solidFill>
+            <a:prstDash val="solid"/>
+          </a:ln>
+        </p:spPr>
+      </p:sp>
+      <p:sp>
+        <p:nvSpPr>
+          <p:cNvPr id="36" name="g5-ik-4-sirkulu"/>
+          <p:cNvSpPr/>
+          <p:nvPr/>
+        </p:nvSpPr>
+        <p:spPr>
+          <a:xfrm>
+            <a:off x="9984974" y="2468880"/>
+            <a:ext cx="914400" cy="914400"/>
+          </a:xfrm>
+          <a:prstGeom prst="ellipse">
+            <a:avLst/>
+          </a:prstGeom>
+          <a:solidFill>
+            <a:schemeClr val="accent4"/>
+          </a:solidFill>
+          <a:ln w="12700">
+            <a:solidFill>
+              <a:schemeClr val="accent4"/>
+            </a:solidFill>
+            <a:prstDash val="solid"/>
+          </a:ln>
+        </p:spPr>
+      </p:sp>
+      <p:pic>
+        <p:nvPicPr>
+          <p:cNvPr id="37" name="g5-ik-4-ikone" descr="preencoded.png">    </p:cNvPr>
+          <p:cNvPicPr>
+            <a:picLocks noChangeAspect="1"/>
+          </p:cNvPicPr>
+          <p:nvPr/>
+        </p:nvPicPr>
+        <p:blipFill>
+          <a:blip r:embed="rId5"/>
+          <a:stretch>
+            <a:fillRect/>
+          </a:stretch>
+        </p:blipFill>
+        <p:spPr>
+          <a:xfrm>
+            <a:off x="10204430" y="2688336"/>
+            <a:ext cx="475488" cy="475488"/>
+          </a:xfrm>
+          <a:prstGeom prst="rect">
+            <a:avLst/>
+          </a:prstGeom>
+        </p:spPr>
+      </p:pic>
+      <p:sp>
+        <p:nvSpPr>
+          <p:cNvPr id="38" name="Text 31"/>
+          <p:cNvSpPr txBox="1"/>
+          <p:nvPr/>
+        </p:nvSpPr>
+        <p:spPr>
+          <a:xfrm>
+            <a:off x="9515612" y="3520440"/>
+            <a:ext cx="1853123" cy="685800"/>
+          </a:xfrm>
+          <a:prstGeom prst="rect">
+            <a:avLst/>
+          </a:prstGeom>
+          <a:noFill/>
+          <a:ln/>
+        </p:spPr>
+        <p:txBody>
+          <a:bodyPr wrap="square" lIns="0" tIns="0" rIns="0" bIns="0" rtlCol="0" anchor="ctr"/>
+          <a:lstStyle/>
+          <a:p>
+            <a:pPr algn="ctr" indent="0" marL="0">
+              <a:buNone/>
+            </a:pPr>
+            <a:r>
+              <a:rPr lang="en-US" sz="1600" b="1" dirty="0">
+                <a:solidFill>
+                  <a:schemeClr val="tx2"/>
+                </a:solidFill>
+              </a:rPr>
+              <a:t>Futuru no AI</a:t>
+            </a:r>
+            <a:endParaRPr lang="en-US" sz="1600" dirty="0"/>
+          </a:p>
+        </p:txBody>
+      </p:sp>
+      <p:sp>
+        <p:nvSpPr>
+          <p:cNvPr id="39" name="Text 32"/>
+          <p:cNvSpPr txBox="1"/>
+          <p:nvPr/>
+        </p:nvSpPr>
+        <p:spPr>
+          <a:xfrm>
+            <a:off x="9607052" y="4297680"/>
+            <a:ext cx="1670243" cy="1737360"/>
+          </a:xfrm>
+          <a:prstGeom prst="rect">
+            <a:avLst/>
+          </a:prstGeom>
+          <a:noFill/>
+          <a:ln/>
+        </p:spPr>
+        <p:txBody>
+          <a:bodyPr wrap="square" lIns="0" tIns="0" rIns="0" bIns="0" rtlCol="0" anchor="t"/>
+          <a:lstStyle/>
+          <a:p>
+            <a:pPr algn="ctr" indent="0" marL="0">
+              <a:buNone/>
+            </a:pPr>
+            <a:r>
+              <a:rPr lang="en-US" sz="1300" i="1" dirty="0">
+                <a:solidFill>
+                  <a:schemeClr val="tx1"/>
+                </a:solidFill>
+              </a:rPr>
+              <a:t>Se RbR iha ajente AI, servisu ida-ne'ebé imi hakarak AI ajuda?</a:t>
+            </a:r>
+            <a:endParaRPr lang="en-US" sz="1300" dirty="0"/>
+          </a:p>
+        </p:txBody>
+      </p:sp>
+      <p:sp>
+        <p:nvSpPr>
+          <p:cNvPr id="25" name="Slide Number Placeholder 0"/>
+          <p:cNvSpPr>
+            <a:spLocks noGrp="1"/>
+          </p:cNvSpPr>
+          <p:nvPr>
+            <p:ph type="sldNum" sz="quarter" idx="4294967295"/>
+          </p:nvPr>
+        </p:nvSpPr>
+        <p:spPr>
+          <a:xfrm>
+            <a:off x="11094415" y="6400800"/>
+            <a:ext cx="548640" cy="274320"/>
+          </a:xfrm>
+          <a:prstGeom prst="rect">
+            <a:avLst/>
+          </a:prstGeom>
+          <a:extLst>
+            <a:ext uri="{C572A759-6A51-4108-AA02-DFA0A04FC94B}">
+              <ma14:wrappingTextBoxFlag xmlns:ma14="http://schemas.microsoft.com/office/mac/drawingml/2011/main" val="0"/>
+            </a:ext>
+          </a:extLst>
+        </p:spPr>
+        <p:txBody>
+          <a:bodyPr/>
+          <a:lstStyle>
+            <a:lvl1pPr>
+              <a:defRPr sz="1000">
+                <a:solidFill>
+                  <a:srgbClr val="5E6B66"/>
+                </a:solidFill>
+              </a:defRPr>
+            </a:lvl1pPr>
+          </a:lstStyle>
+          <a:p>
+            <a:pPr algn="r"/>
+            <a:fld id="{F7021451-1387-4CA6-816F-3879F97B5CBC}" type="slidenum">
+              <a:rPr b="0" lang="en-US"/>
+              <a:t>34</a:t>
+            </a:fld>
+            <a:endParaRPr lang="en-US"/>
+          </a:p>
+        </p:txBody>
+      </p:sp>
+    </p:spTree>
+  </p:cSld>
+  <p:clrMapOvr>
+    <a:masterClrMapping/>
+  </p:clrMapOvr>
+</p:sld>
+</file>
+
+<file path=ppt/slides/slide35.xml><?xml version="1.0" encoding="utf-8"?>
+<p:sld xmlns:a="http://schemas.openxmlformats.org/drawingml/2006/main" xmlns:r="http://schemas.openxmlformats.org/officeDocument/2006/relationships" xmlns:p="http://schemas.openxmlformats.org/presentationml/2006/main">
+  <p:cSld name="Slide 35">
+    <p:spTree>
+      <p:nvGrpSpPr>
+        <p:cNvPr id="1" name=""/>
+        <p:cNvGrpSpPr/>
+        <p:nvPr/>
+      </p:nvGrpSpPr>
+      <p:grpSpPr>
+        <a:xfrm>
+          <a:off x="0" y="0"/>
+          <a:ext cx="0" cy="0"/>
+          <a:chOff x="0" y="0"/>
+          <a:chExt cx="0" cy="0"/>
+        </a:xfrm>
+      </p:grpSpPr>
+      <p:sp>
+        <p:nvSpPr>
+          <p:cNvPr id="2" name="Text 0"/>
+          <p:cNvSpPr/>
+          <p:nvPr>
+            <p:ph idx="100" type="title" hasCustomPrompt="1"/>
+          </p:nvPr>
+        </p:nvSpPr>
+        <p:spPr>
+          <a:xfrm>
+            <a:off x="548640" y="320040"/>
+            <a:ext cx="11094415" cy="777240"/>
+          </a:xfrm>
+          <a:prstGeom prst="rect">
+            <a:avLst/>
+          </a:prstGeom>
+          <a:noFill/>
+          <a:ln/>
+        </p:spPr>
+        <p:txBody>
+          <a:bodyPr wrap="square" lIns="0" tIns="0" rIns="0" bIns="0" rtlCol="0" anchor="ctr"/>
+          <a:lstStyle/>
+          <a:p>
+            <a:pPr algn="l" indent="0" marL="0">
+              <a:buNone/>
+            </a:pPr>
+            <a:r>
+              <a:rPr lang="en-US" sz="3000" b="1" dirty="0">
+                <a:solidFill>
+                  <a:schemeClr val="tx2"/>
+                </a:solidFill>
+              </a:rPr>
+              <a:t>Grupu 1: Saida mak Python?</a:t>
+            </a:r>
+            <a:endParaRPr lang="en-US" sz="3000" dirty="0"/>
+          </a:p>
+        </p:txBody>
+      </p:sp>
+      <p:sp>
+        <p:nvSpPr>
+          <p:cNvPr id="3" name="tempu"/>
+          <p:cNvSpPr/>
+          <p:nvPr/>
+        </p:nvSpPr>
+        <p:spPr>
+          <a:xfrm>
+            <a:off x="10271455" y="457200"/>
+            <a:ext cx="1371600" cy="384048"/>
+          </a:xfrm>
+          <a:prstGeom prst="roundRect">
+            <a:avLst>
+              <a:gd name="adj" fmla="val 50000"/>
+            </a:avLst>
+          </a:prstGeom>
+          <a:solidFill>
+            <a:schemeClr val="bg2"/>
+          </a:solidFill>
+          <a:ln w="12700">
+            <a:solidFill>
+              <a:schemeClr val="bg2"/>
+            </a:solidFill>
+            <a:prstDash val="solid"/>
+          </a:ln>
+        </p:spPr>
+      </p:sp>
+      <p:sp>
+        <p:nvSpPr>
+          <p:cNvPr id="4" name="Text 2"/>
+          <p:cNvSpPr txBox="1"/>
+          <p:nvPr/>
+        </p:nvSpPr>
+        <p:spPr>
+          <a:xfrm>
+            <a:off x="10271455" y="457200"/>
+            <a:ext cx="1371600" cy="384048"/>
+          </a:xfrm>
+          <a:prstGeom prst="rect">
+            <a:avLst/>
+          </a:prstGeom>
+          <a:noFill/>
+          <a:ln/>
+        </p:spPr>
+        <p:txBody>
+          <a:bodyPr wrap="square" lIns="0" tIns="0" rIns="0" bIns="0" rtlCol="0" anchor="ctr"/>
+          <a:lstStyle/>
+          <a:p>
+            <a:pPr algn="ctr" indent="0" marL="0">
+              <a:buNone/>
+            </a:pPr>
+            <a:r>
+              <a:rPr lang="en-US" sz="1200" b="1" dirty="0">
+                <a:solidFill>
+                  <a:schemeClr val="accent1"/>
+                </a:solidFill>
+              </a:rPr>
+              <a:t>11:49</a:t>
+            </a:r>
+            <a:endParaRPr lang="en-US" sz="1200" dirty="0"/>
+          </a:p>
+        </p:txBody>
+      </p:sp>
+      <p:sp>
+        <p:nvSpPr>
+          <p:cNvPr id="5" name="gr-lado"/>
+          <p:cNvSpPr/>
+          <p:nvPr/>
+        </p:nvSpPr>
+        <p:spPr>
+          <a:xfrm>
+            <a:off x="548640" y="1417320"/>
+            <a:ext cx="2377440" cy="4709160"/>
+          </a:xfrm>
+          <a:prstGeom prst="roundRect">
+            <a:avLst>
+              <a:gd name="adj" fmla="val 4615"/>
+            </a:avLst>
+          </a:prstGeom>
+          <a:solidFill>
+            <a:schemeClr val="accent6"/>
+          </a:solidFill>
+          <a:ln w="12700">
+            <a:solidFill>
+              <a:schemeClr val="accent6"/>
+            </a:solidFill>
+            <a:prstDash val="solid"/>
+          </a:ln>
+        </p:spPr>
+      </p:sp>
+      <p:sp>
+        <p:nvSpPr>
+          <p:cNvPr id="6" name="gr-ik-sirkulu"/>
+          <p:cNvSpPr/>
+          <p:nvPr/>
+        </p:nvSpPr>
+        <p:spPr>
+          <a:xfrm>
+            <a:off x="1005840" y="1920240"/>
+            <a:ext cx="1463040" cy="1463040"/>
+          </a:xfrm>
+          <a:prstGeom prst="ellipse">
+            <a:avLst/>
+          </a:prstGeom>
+          <a:solidFill>
+            <a:schemeClr val="tx2"/>
+          </a:solidFill>
+          <a:ln w="12700">
+            <a:solidFill>
+              <a:schemeClr val="tx2"/>
+            </a:solidFill>
+            <a:prstDash val="solid"/>
+          </a:ln>
+        </p:spPr>
+      </p:sp>
+      <p:pic>
+        <p:nvPicPr>
+          <p:cNvPr id="7" name="gr-ik-ikone" descr="preencoded.png">    </p:cNvPr>
           <p:cNvPicPr>
             <a:picLocks noChangeAspect="1"/>
           </p:cNvPicPr>
@@ -26314,8 +28184,8 @@
         </p:blipFill>
         <p:spPr>
           <a:xfrm>
-            <a:off x="8163763" y="1580083"/>
-            <a:ext cx="451714" cy="451714"/>
+            <a:off x="1356970" y="2271370"/>
+            <a:ext cx="760781" cy="760781"/>
           </a:xfrm>
           <a:prstGeom prst="rect">
             <a:avLst/>
@@ -26324,14 +28194,14 @@
       </p:pic>
       <p:sp>
         <p:nvSpPr>
-          <p:cNvPr id="6" name="Text 3"/>
-          <p:cNvSpPr txBox="1"/>
-          <p:nvPr/>
-        </p:nvSpPr>
-        <p:spPr>
-          <a:xfrm>
-            <a:off x="8961120" y="1444752"/>
-            <a:ext cx="3017520" cy="365760"/>
+          <p:cNvPr id="8" name="Text 5"/>
+          <p:cNvSpPr txBox="1"/>
+          <p:nvPr/>
+        </p:nvSpPr>
+        <p:spPr>
+          <a:xfrm>
+            <a:off x="548640" y="3657600"/>
+            <a:ext cx="2377440" cy="548640"/>
           </a:xfrm>
           <a:prstGeom prst="rect">
             <a:avLst/>
@@ -26343,31 +28213,772 @@
           <a:bodyPr wrap="square" lIns="0" tIns="0" rIns="0" bIns="0" rtlCol="0" anchor="t"/>
           <a:lstStyle/>
           <a:p>
+            <a:pPr algn="ctr" indent="0" marL="0">
+              <a:buNone/>
+            </a:pPr>
+            <a:r>
+              <a:rPr lang="en-US" sz="2600" b="1" dirty="0">
+                <a:solidFill>
+                  <a:schemeClr val="bg1"/>
+                </a:solidFill>
+                <a:latin typeface="Cambria" pitchFamily="34" charset="0"/>
+                <a:ea typeface="Cambria" pitchFamily="34" charset="-122"/>
+                <a:cs typeface="Cambria" pitchFamily="34" charset="-120"/>
+              </a:rPr>
+              <a:t>Grupu 1</a:t>
+            </a:r>
+            <a:endParaRPr lang="en-US" sz="2600" dirty="0"/>
+          </a:p>
+        </p:txBody>
+      </p:sp>
+      <p:sp>
+        <p:nvSpPr>
+          <p:cNvPr id="9" name="Text 6"/>
+          <p:cNvSpPr txBox="1"/>
+          <p:nvPr/>
+        </p:nvSpPr>
+        <p:spPr>
+          <a:xfrm>
+            <a:off x="685800" y="4206240"/>
+            <a:ext cx="2103120" cy="914400"/>
+          </a:xfrm>
+          <a:prstGeom prst="rect">
+            <a:avLst/>
+          </a:prstGeom>
+          <a:noFill/>
+          <a:ln/>
+        </p:spPr>
+        <p:txBody>
+          <a:bodyPr wrap="square" lIns="0" tIns="0" rIns="0" bIns="0" rtlCol="0" anchor="t"/>
+          <a:lstStyle/>
+          <a:p>
+            <a:pPr algn="ctr" indent="0" marL="0">
+              <a:buNone/>
+            </a:pPr>
+            <a:r>
+              <a:rPr lang="en-US" sz="1600" b="1" dirty="0">
+                <a:solidFill>
+                  <a:schemeClr val="bg1"/>
+                </a:solidFill>
+              </a:rPr>
+              <a:t>Saida mak Python?</a:t>
+            </a:r>
+            <a:endParaRPr lang="en-US" sz="1600" dirty="0"/>
+          </a:p>
+        </p:txBody>
+      </p:sp>
+      <p:sp>
+        <p:nvSpPr>
+          <p:cNvPr id="10" name="gr-q-0"/>
+          <p:cNvSpPr/>
+          <p:nvPr/>
+        </p:nvSpPr>
+        <p:spPr>
+          <a:xfrm>
+            <a:off x="3154680" y="1417320"/>
+            <a:ext cx="8488375" cy="1463040"/>
+          </a:xfrm>
+          <a:prstGeom prst="roundRect">
+            <a:avLst>
+              <a:gd name="adj" fmla="val 7500"/>
+            </a:avLst>
+          </a:prstGeom>
+          <a:solidFill>
+            <a:schemeClr val="bg2"/>
+          </a:solidFill>
+          <a:ln w="12700">
+            <a:solidFill>
+              <a:schemeClr val="bg2"/>
+            </a:solidFill>
+            <a:prstDash val="solid"/>
+          </a:ln>
+        </p:spPr>
+      </p:sp>
+      <p:sp>
+        <p:nvSpPr>
+          <p:cNvPr id="11" name="gr-n-0"/>
+          <p:cNvSpPr/>
+          <p:nvPr/>
+        </p:nvSpPr>
+        <p:spPr>
+          <a:xfrm>
+            <a:off x="3383280" y="1828800"/>
+            <a:ext cx="640080" cy="640080"/>
+          </a:xfrm>
+          <a:prstGeom prst="ellipse">
+            <a:avLst/>
+          </a:prstGeom>
+          <a:solidFill>
+            <a:schemeClr val="accent6"/>
+          </a:solidFill>
+          <a:ln w="12700">
+            <a:solidFill>
+              <a:schemeClr val="accent6"/>
+            </a:solidFill>
+            <a:prstDash val="solid"/>
+          </a:ln>
+        </p:spPr>
+      </p:sp>
+      <p:sp>
+        <p:nvSpPr>
+          <p:cNvPr id="12" name="gr-n-0-n"/>
+          <p:cNvSpPr txBox="1"/>
+          <p:nvPr/>
+        </p:nvSpPr>
+        <p:spPr>
+          <a:xfrm>
+            <a:off x="3383280" y="1828800"/>
+            <a:ext cx="640080" cy="640080"/>
+          </a:xfrm>
+          <a:prstGeom prst="rect">
+            <a:avLst/>
+          </a:prstGeom>
+          <a:noFill/>
+          <a:ln/>
+        </p:spPr>
+        <p:txBody>
+          <a:bodyPr wrap="square" lIns="0" tIns="0" rIns="0" bIns="0" rtlCol="0" anchor="ctr"/>
+          <a:lstStyle/>
+          <a:p>
+            <a:pPr algn="ctr" indent="0" marL="0">
+              <a:buNone/>
+            </a:pPr>
+            <a:r>
+              <a:rPr lang="en-US" sz="1700" b="1" dirty="0">
+                <a:solidFill>
+                  <a:schemeClr val="bg1"/>
+                </a:solidFill>
+              </a:rPr>
+              <a:t>1</a:t>
+            </a:r>
+            <a:endParaRPr lang="en-US" sz="1700" dirty="0"/>
+          </a:p>
+        </p:txBody>
+      </p:sp>
+      <p:sp>
+        <p:nvSpPr>
+          <p:cNvPr id="13" name="Text 10"/>
+          <p:cNvSpPr txBox="1"/>
+          <p:nvPr/>
+        </p:nvSpPr>
+        <p:spPr>
+          <a:xfrm>
+            <a:off x="4251960" y="1417320"/>
+            <a:ext cx="7162495" cy="1463040"/>
+          </a:xfrm>
+          <a:prstGeom prst="rect">
+            <a:avLst/>
+          </a:prstGeom>
+          <a:noFill/>
+          <a:ln/>
+        </p:spPr>
+        <p:txBody>
+          <a:bodyPr wrap="square" lIns="0" tIns="0" rIns="0" bIns="0" rtlCol="0" anchor="ctr"/>
+          <a:lstStyle/>
+          <a:p>
             <a:pPr indent="0" marL="0">
               <a:buNone/>
             </a:pPr>
             <a:r>
-              <a:rPr lang="en-US" sz="1400" b="1" dirty="0">
+              <a:rPr lang="en-US" sz="1800" b="1" dirty="0">
+                <a:solidFill>
+                  <a:schemeClr val="tx2"/>
+                </a:solidFill>
+              </a:rPr>
+              <a:t>Esplika Python ba ita-nia família ho fraze ida de'it. Saida mak imi sei dehan?</a:t>
+            </a:r>
+            <a:endParaRPr lang="en-US" sz="1800" dirty="0"/>
+          </a:p>
+        </p:txBody>
+      </p:sp>
+      <p:sp>
+        <p:nvSpPr>
+          <p:cNvPr id="14" name="gr-q-1"/>
+          <p:cNvSpPr/>
+          <p:nvPr/>
+        </p:nvSpPr>
+        <p:spPr>
+          <a:xfrm>
+            <a:off x="3154680" y="3035808"/>
+            <a:ext cx="8488375" cy="1463040"/>
+          </a:xfrm>
+          <a:prstGeom prst="roundRect">
+            <a:avLst>
+              <a:gd name="adj" fmla="val 7500"/>
+            </a:avLst>
+          </a:prstGeom>
+          <a:solidFill>
+            <a:schemeClr val="bg2"/>
+          </a:solidFill>
+          <a:ln w="12700">
+            <a:solidFill>
+              <a:schemeClr val="bg2"/>
+            </a:solidFill>
+            <a:prstDash val="solid"/>
+          </a:ln>
+        </p:spPr>
+      </p:sp>
+      <p:sp>
+        <p:nvSpPr>
+          <p:cNvPr id="15" name="gr-n-1"/>
+          <p:cNvSpPr/>
+          <p:nvPr/>
+        </p:nvSpPr>
+        <p:spPr>
+          <a:xfrm>
+            <a:off x="3383280" y="3447288"/>
+            <a:ext cx="640080" cy="640080"/>
+          </a:xfrm>
+          <a:prstGeom prst="ellipse">
+            <a:avLst/>
+          </a:prstGeom>
+          <a:solidFill>
+            <a:schemeClr val="accent6"/>
+          </a:solidFill>
+          <a:ln w="12700">
+            <a:solidFill>
+              <a:schemeClr val="accent6"/>
+            </a:solidFill>
+            <a:prstDash val="solid"/>
+          </a:ln>
+        </p:spPr>
+      </p:sp>
+      <p:sp>
+        <p:nvSpPr>
+          <p:cNvPr id="16" name="gr-n-1-n"/>
+          <p:cNvSpPr txBox="1"/>
+          <p:nvPr/>
+        </p:nvSpPr>
+        <p:spPr>
+          <a:xfrm>
+            <a:off x="3383280" y="3447288"/>
+            <a:ext cx="640080" cy="640080"/>
+          </a:xfrm>
+          <a:prstGeom prst="rect">
+            <a:avLst/>
+          </a:prstGeom>
+          <a:noFill/>
+          <a:ln/>
+        </p:spPr>
+        <p:txBody>
+          <a:bodyPr wrap="square" lIns="0" tIns="0" rIns="0" bIns="0" rtlCol="0" anchor="ctr"/>
+          <a:lstStyle/>
+          <a:p>
+            <a:pPr algn="ctr" indent="0" marL="0">
+              <a:buNone/>
+            </a:pPr>
+            <a:r>
+              <a:rPr lang="en-US" sz="1700" b="1" dirty="0">
                 <a:solidFill>
                   <a:schemeClr val="bg1"/>
                 </a:solidFill>
               </a:rPr>
-              <a:t>w3schools.com/python</a:t>
+              <a:t>2</a:t>
+            </a:r>
+            <a:endParaRPr lang="en-US" sz="1700" dirty="0"/>
+          </a:p>
+        </p:txBody>
+      </p:sp>
+      <p:sp>
+        <p:nvSpPr>
+          <p:cNvPr id="17" name="Text 14"/>
+          <p:cNvSpPr txBox="1"/>
+          <p:nvPr/>
+        </p:nvSpPr>
+        <p:spPr>
+          <a:xfrm>
+            <a:off x="4251960" y="3145536"/>
+            <a:ext cx="3291840" cy="1234440"/>
+          </a:xfrm>
+          <a:prstGeom prst="rect">
+            <a:avLst/>
+          </a:prstGeom>
+          <a:noFill/>
+          <a:ln/>
+        </p:spPr>
+        <p:txBody>
+          <a:bodyPr wrap="square" lIns="0" tIns="0" rIns="0" bIns="0" rtlCol="0" anchor="ctr"/>
+          <a:lstStyle/>
+          <a:p>
+            <a:pPr indent="0" marL="0">
+              <a:buNone/>
+            </a:pPr>
+            <a:r>
+              <a:rPr lang="en-US" sz="1700" b="1" dirty="0">
+                <a:solidFill>
+                  <a:schemeClr val="tx2"/>
+                </a:solidFill>
+              </a:rPr>
+              <a:t>Kódigu ida-ne'e halo saida?</a:t>
+            </a:r>
+            <a:endParaRPr lang="en-US" sz="1700" dirty="0"/>
+          </a:p>
+        </p:txBody>
+      </p:sp>
+      <p:sp>
+        <p:nvSpPr>
+          <p:cNvPr id="18" name="gr-k-1"/>
+          <p:cNvSpPr/>
+          <p:nvPr/>
+        </p:nvSpPr>
+        <p:spPr>
+          <a:xfrm>
+            <a:off x="7589520" y="3172968"/>
+            <a:ext cx="3824935" cy="1188720"/>
+          </a:xfrm>
+          <a:prstGeom prst="roundRect">
+            <a:avLst>
+              <a:gd name="adj" fmla="val 7692"/>
+            </a:avLst>
+          </a:prstGeom>
+          <a:solidFill>
+            <a:schemeClr val="tx1"/>
+          </a:solidFill>
+          <a:ln w="12700">
+            <a:solidFill>
+              <a:schemeClr val="tx1"/>
+            </a:solidFill>
+            <a:prstDash val="solid"/>
+          </a:ln>
+        </p:spPr>
+      </p:sp>
+      <p:sp>
+        <p:nvSpPr>
+          <p:cNvPr id="19" name="gr-k-1-t"/>
+          <p:cNvSpPr txBox="1"/>
+          <p:nvPr/>
+        </p:nvSpPr>
+        <p:spPr>
+          <a:xfrm>
+            <a:off x="7863840" y="3401568"/>
+            <a:ext cx="3276295" cy="731520"/>
+          </a:xfrm>
+          <a:prstGeom prst="rect">
+            <a:avLst/>
+          </a:prstGeom>
+          <a:noFill/>
+          <a:ln/>
+        </p:spPr>
+        <p:txBody>
+          <a:bodyPr wrap="square" lIns="0" tIns="0" rIns="0" bIns="0" rtlCol="0" anchor="t"/>
+          <a:lstStyle/>
+          <a:p>
+            <a:pPr indent="0" marL="0">
+              <a:buNone/>
+            </a:pPr>
+            <a:r>
+              <a:rPr lang="en-US" sz="1400" dirty="0">
+                <a:solidFill>
+                  <a:schemeClr val="bg1"/>
+                </a:solidFill>
+                <a:latin typeface="Courier New" pitchFamily="34" charset="0"/>
+                <a:ea typeface="Courier New" pitchFamily="34" charset="-122"/>
+                <a:cs typeface="Courier New" pitchFamily="34" charset="-120"/>
+              </a:rPr>
+              <a:t>if eviksaun == "Sin":</a:t>
             </a:r>
             <a:endParaRPr lang="en-US" sz="1400" dirty="0"/>
           </a:p>
-        </p:txBody>
-      </p:sp>
-      <p:sp>
-        <p:nvSpPr>
-          <p:cNvPr id="7" name="Text 4"/>
-          <p:cNvSpPr txBox="1"/>
-          <p:nvPr/>
-        </p:nvSpPr>
-        <p:spPr>
-          <a:xfrm>
-            <a:off x="8961120" y="1847088"/>
-            <a:ext cx="3017520" cy="365760"/>
+          <a:p>
+            <a:pPr indent="0" marL="0">
+              <a:buNone/>
+            </a:pPr>
+            <a:r>
+              <a:rPr lang="en-US" sz="1400" dirty="0">
+                <a:solidFill>
+                  <a:schemeClr val="bg1"/>
+                </a:solidFill>
+                <a:latin typeface="Courier New" pitchFamily="34" charset="0"/>
+                <a:ea typeface="Courier New" pitchFamily="34" charset="-122"/>
+                <a:cs typeface="Courier New" pitchFamily="34" charset="-120"/>
+              </a:rPr>
+              <a:t>    print("Kazu urjente!")</a:t>
+            </a:r>
+            <a:endParaRPr lang="en-US" sz="1400" dirty="0"/>
+          </a:p>
+        </p:txBody>
+      </p:sp>
+      <p:sp>
+        <p:nvSpPr>
+          <p:cNvPr id="20" name="gr-q-2"/>
+          <p:cNvSpPr/>
+          <p:nvPr/>
+        </p:nvSpPr>
+        <p:spPr>
+          <a:xfrm>
+            <a:off x="3154680" y="4654296"/>
+            <a:ext cx="8488375" cy="1463040"/>
+          </a:xfrm>
+          <a:prstGeom prst="roundRect">
+            <a:avLst>
+              <a:gd name="adj" fmla="val 7500"/>
+            </a:avLst>
+          </a:prstGeom>
+          <a:solidFill>
+            <a:schemeClr val="bg2"/>
+          </a:solidFill>
+          <a:ln w="12700">
+            <a:solidFill>
+              <a:schemeClr val="bg2"/>
+            </a:solidFill>
+            <a:prstDash val="solid"/>
+          </a:ln>
+        </p:spPr>
+      </p:sp>
+      <p:sp>
+        <p:nvSpPr>
+          <p:cNvPr id="21" name="gr-n-2"/>
+          <p:cNvSpPr/>
+          <p:nvPr/>
+        </p:nvSpPr>
+        <p:spPr>
+          <a:xfrm>
+            <a:off x="3383280" y="5065776"/>
+            <a:ext cx="640080" cy="640080"/>
+          </a:xfrm>
+          <a:prstGeom prst="ellipse">
+            <a:avLst/>
+          </a:prstGeom>
+          <a:solidFill>
+            <a:schemeClr val="accent6"/>
+          </a:solidFill>
+          <a:ln w="12700">
+            <a:solidFill>
+              <a:schemeClr val="accent6"/>
+            </a:solidFill>
+            <a:prstDash val="solid"/>
+          </a:ln>
+        </p:spPr>
+      </p:sp>
+      <p:sp>
+        <p:nvSpPr>
+          <p:cNvPr id="22" name="gr-n-2-n"/>
+          <p:cNvSpPr txBox="1"/>
+          <p:nvPr/>
+        </p:nvSpPr>
+        <p:spPr>
+          <a:xfrm>
+            <a:off x="3383280" y="5065776"/>
+            <a:ext cx="640080" cy="640080"/>
+          </a:xfrm>
+          <a:prstGeom prst="rect">
+            <a:avLst/>
+          </a:prstGeom>
+          <a:noFill/>
+          <a:ln/>
+        </p:spPr>
+        <p:txBody>
+          <a:bodyPr wrap="square" lIns="0" tIns="0" rIns="0" bIns="0" rtlCol="0" anchor="ctr"/>
+          <a:lstStyle/>
+          <a:p>
+            <a:pPr algn="ctr" indent="0" marL="0">
+              <a:buNone/>
+            </a:pPr>
+            <a:r>
+              <a:rPr lang="en-US" sz="1700" b="1" dirty="0">
+                <a:solidFill>
+                  <a:schemeClr val="bg1"/>
+                </a:solidFill>
+              </a:rPr>
+              <a:t>3</a:t>
+            </a:r>
+            <a:endParaRPr lang="en-US" sz="1700" dirty="0"/>
+          </a:p>
+        </p:txBody>
+      </p:sp>
+      <p:sp>
+        <p:nvSpPr>
+          <p:cNvPr id="23" name="Text 20"/>
+          <p:cNvSpPr txBox="1"/>
+          <p:nvPr/>
+        </p:nvSpPr>
+        <p:spPr>
+          <a:xfrm>
+            <a:off x="4251960" y="4654296"/>
+            <a:ext cx="7162495" cy="1463040"/>
+          </a:xfrm>
+          <a:prstGeom prst="rect">
+            <a:avLst/>
+          </a:prstGeom>
+          <a:noFill/>
+          <a:ln/>
+        </p:spPr>
+        <p:txBody>
+          <a:bodyPr wrap="square" lIns="0" tIns="0" rIns="0" bIns="0" rtlCol="0" anchor="ctr"/>
+          <a:lstStyle/>
+          <a:p>
+            <a:pPr indent="0" marL="0">
+              <a:buNone/>
+            </a:pPr>
+            <a:r>
+              <a:rPr lang="en-US" sz="1800" b="1" dirty="0">
+                <a:solidFill>
+                  <a:schemeClr val="tx2"/>
+                </a:solidFill>
+              </a:rPr>
+              <a:t>Servisu ida iha RbR ne'ebé imi halo fali beibeik ho liman. Python bele ajuda oinsá?</a:t>
+            </a:r>
+            <a:endParaRPr lang="en-US" sz="1800" dirty="0"/>
+          </a:p>
+        </p:txBody>
+      </p:sp>
+      <p:sp>
+        <p:nvSpPr>
+          <p:cNvPr id="25" name="Slide Number Placeholder 0"/>
+          <p:cNvSpPr>
+            <a:spLocks noGrp="1"/>
+          </p:cNvSpPr>
+          <p:nvPr>
+            <p:ph type="sldNum" sz="quarter" idx="4294967295"/>
+          </p:nvPr>
+        </p:nvSpPr>
+        <p:spPr>
+          <a:xfrm>
+            <a:off x="11094415" y="6400800"/>
+            <a:ext cx="548640" cy="274320"/>
+          </a:xfrm>
+          <a:prstGeom prst="rect">
+            <a:avLst/>
+          </a:prstGeom>
+          <a:extLst>
+            <a:ext uri="{C572A759-6A51-4108-AA02-DFA0A04FC94B}">
+              <ma14:wrappingTextBoxFlag xmlns:ma14="http://schemas.microsoft.com/office/mac/drawingml/2011/main" val="0"/>
+            </a:ext>
+          </a:extLst>
+        </p:spPr>
+        <p:txBody>
+          <a:bodyPr/>
+          <a:lstStyle>
+            <a:lvl1pPr>
+              <a:defRPr sz="1000">
+                <a:solidFill>
+                  <a:srgbClr val="5E6B66"/>
+                </a:solidFill>
+              </a:defRPr>
+            </a:lvl1pPr>
+          </a:lstStyle>
+          <a:p>
+            <a:pPr algn="r"/>
+            <a:fld id="{F7021451-1387-4CA6-816F-3879F97B5CBC}" type="slidenum">
+              <a:rPr b="0" lang="en-US"/>
+              <a:t>35</a:t>
+            </a:fld>
+            <a:endParaRPr lang="en-US"/>
+          </a:p>
+        </p:txBody>
+      </p:sp>
+    </p:spTree>
+  </p:cSld>
+  <p:clrMapOvr>
+    <a:masterClrMapping/>
+  </p:clrMapOvr>
+</p:sld>
+</file>
+
+<file path=ppt/slides/slide36.xml><?xml version="1.0" encoding="utf-8"?>
+<p:sld xmlns:a="http://schemas.openxmlformats.org/drawingml/2006/main" xmlns:r="http://schemas.openxmlformats.org/officeDocument/2006/relationships" xmlns:p="http://schemas.openxmlformats.org/presentationml/2006/main">
+  <p:cSld name="Slide 36">
+    <p:spTree>
+      <p:nvGrpSpPr>
+        <p:cNvPr id="1" name=""/>
+        <p:cNvGrpSpPr/>
+        <p:nvPr/>
+      </p:nvGrpSpPr>
+      <p:grpSpPr>
+        <a:xfrm>
+          <a:off x="0" y="0"/>
+          <a:ext cx="0" cy="0"/>
+          <a:chOff x="0" y="0"/>
+          <a:chExt cx="0" cy="0"/>
+        </a:xfrm>
+      </p:grpSpPr>
+      <p:sp>
+        <p:nvSpPr>
+          <p:cNvPr id="2" name="Text 0"/>
+          <p:cNvSpPr/>
+          <p:nvPr>
+            <p:ph idx="100" type="title" hasCustomPrompt="1"/>
+          </p:nvPr>
+        </p:nvSpPr>
+        <p:spPr>
+          <a:xfrm>
+            <a:off x="548640" y="320040"/>
+            <a:ext cx="11094415" cy="777240"/>
+          </a:xfrm>
+          <a:prstGeom prst="rect">
+            <a:avLst/>
+          </a:prstGeom>
+          <a:noFill/>
+          <a:ln/>
+        </p:spPr>
+        <p:txBody>
+          <a:bodyPr wrap="square" lIns="0" tIns="0" rIns="0" bIns="0" rtlCol="0" anchor="ctr"/>
+          <a:lstStyle/>
+          <a:p>
+            <a:pPr algn="l" indent="0" marL="0">
+              <a:buNone/>
+            </a:pPr>
+            <a:r>
+              <a:rPr lang="en-US" sz="3000" b="1" dirty="0">
+                <a:solidFill>
+                  <a:schemeClr val="tx2"/>
+                </a:solidFill>
+              </a:rPr>
+              <a:t>Grupu 2: Istória Python</a:t>
+            </a:r>
+            <a:endParaRPr lang="en-US" sz="3000" dirty="0"/>
+          </a:p>
+        </p:txBody>
+      </p:sp>
+      <p:sp>
+        <p:nvSpPr>
+          <p:cNvPr id="3" name="tempu"/>
+          <p:cNvSpPr/>
+          <p:nvPr/>
+        </p:nvSpPr>
+        <p:spPr>
+          <a:xfrm>
+            <a:off x="10271455" y="457200"/>
+            <a:ext cx="1371600" cy="384048"/>
+          </a:xfrm>
+          <a:prstGeom prst="roundRect">
+            <a:avLst>
+              <a:gd name="adj" fmla="val 50000"/>
+            </a:avLst>
+          </a:prstGeom>
+          <a:solidFill>
+            <a:schemeClr val="bg2"/>
+          </a:solidFill>
+          <a:ln w="12700">
+            <a:solidFill>
+              <a:schemeClr val="bg2"/>
+            </a:solidFill>
+            <a:prstDash val="solid"/>
+          </a:ln>
+        </p:spPr>
+      </p:sp>
+      <p:sp>
+        <p:nvSpPr>
+          <p:cNvPr id="4" name="Text 2"/>
+          <p:cNvSpPr txBox="1"/>
+          <p:nvPr/>
+        </p:nvSpPr>
+        <p:spPr>
+          <a:xfrm>
+            <a:off x="10271455" y="457200"/>
+            <a:ext cx="1371600" cy="384048"/>
+          </a:xfrm>
+          <a:prstGeom prst="rect">
+            <a:avLst/>
+          </a:prstGeom>
+          <a:noFill/>
+          <a:ln/>
+        </p:spPr>
+        <p:txBody>
+          <a:bodyPr wrap="square" lIns="0" tIns="0" rIns="0" bIns="0" rtlCol="0" anchor="ctr"/>
+          <a:lstStyle/>
+          <a:p>
+            <a:pPr algn="ctr" indent="0" marL="0">
+              <a:buNone/>
+            </a:pPr>
+            <a:r>
+              <a:rPr lang="en-US" sz="1200" b="1" dirty="0">
+                <a:solidFill>
+                  <a:schemeClr val="accent1"/>
+                </a:solidFill>
+              </a:rPr>
+              <a:t>11:50</a:t>
+            </a:r>
+            <a:endParaRPr lang="en-US" sz="1200" dirty="0"/>
+          </a:p>
+        </p:txBody>
+      </p:sp>
+      <p:sp>
+        <p:nvSpPr>
+          <p:cNvPr id="5" name="gr-lado"/>
+          <p:cNvSpPr/>
+          <p:nvPr/>
+        </p:nvSpPr>
+        <p:spPr>
+          <a:xfrm>
+            <a:off x="548640" y="1417320"/>
+            <a:ext cx="2377440" cy="4709160"/>
+          </a:xfrm>
+          <a:prstGeom prst="roundRect">
+            <a:avLst>
+              <a:gd name="adj" fmla="val 4615"/>
+            </a:avLst>
+          </a:prstGeom>
+          <a:solidFill>
+            <a:schemeClr val="accent5"/>
+          </a:solidFill>
+          <a:ln w="12700">
+            <a:solidFill>
+              <a:schemeClr val="accent5"/>
+            </a:solidFill>
+            <a:prstDash val="solid"/>
+          </a:ln>
+        </p:spPr>
+      </p:sp>
+      <p:sp>
+        <p:nvSpPr>
+          <p:cNvPr id="6" name="gr-ik-sirkulu"/>
+          <p:cNvSpPr/>
+          <p:nvPr/>
+        </p:nvSpPr>
+        <p:spPr>
+          <a:xfrm>
+            <a:off x="1005840" y="1920240"/>
+            <a:ext cx="1463040" cy="1463040"/>
+          </a:xfrm>
+          <a:prstGeom prst="ellipse">
+            <a:avLst/>
+          </a:prstGeom>
+          <a:solidFill>
+            <a:schemeClr val="tx2"/>
+          </a:solidFill>
+          <a:ln w="12700">
+            <a:solidFill>
+              <a:schemeClr val="tx2"/>
+            </a:solidFill>
+            <a:prstDash val="solid"/>
+          </a:ln>
+        </p:spPr>
+      </p:sp>
+      <p:pic>
+        <p:nvPicPr>
+          <p:cNvPr id="7" name="gr-ik-ikone" descr="preencoded.png">    </p:cNvPr>
+          <p:cNvPicPr>
+            <a:picLocks noChangeAspect="1"/>
+          </p:cNvPicPr>
+          <p:nvPr/>
+        </p:nvPicPr>
+        <p:blipFill>
+          <a:blip r:embed="rId1"/>
+          <a:stretch>
+            <a:fillRect/>
+          </a:stretch>
+        </p:blipFill>
+        <p:spPr>
+          <a:xfrm>
+            <a:off x="1356970" y="2271370"/>
+            <a:ext cx="760781" cy="760781"/>
+          </a:xfrm>
+          <a:prstGeom prst="rect">
+            <a:avLst/>
+          </a:prstGeom>
+        </p:spPr>
+      </p:pic>
+      <p:sp>
+        <p:nvSpPr>
+          <p:cNvPr id="8" name="Text 5"/>
+          <p:cNvSpPr txBox="1"/>
+          <p:nvPr/>
+        </p:nvSpPr>
+        <p:spPr>
+          <a:xfrm>
+            <a:off x="548640" y="3657600"/>
+            <a:ext cx="2377440" cy="548640"/>
           </a:xfrm>
           <a:prstGeom prst="rect">
             <a:avLst/>
@@ -26379,34 +28990,618 @@
           <a:bodyPr wrap="square" lIns="0" tIns="0" rIns="0" bIns="0" rtlCol="0" anchor="t"/>
           <a:lstStyle/>
           <a:p>
+            <a:pPr algn="ctr" indent="0" marL="0">
+              <a:buNone/>
+            </a:pPr>
+            <a:r>
+              <a:rPr lang="en-US" sz="2600" b="1" dirty="0">
+                <a:solidFill>
+                  <a:schemeClr val="bg1"/>
+                </a:solidFill>
+                <a:latin typeface="Cambria" pitchFamily="34" charset="0"/>
+                <a:ea typeface="Cambria" pitchFamily="34" charset="-122"/>
+                <a:cs typeface="Cambria" pitchFamily="34" charset="-120"/>
+              </a:rPr>
+              <a:t>Grupu 2</a:t>
+            </a:r>
+            <a:endParaRPr lang="en-US" sz="2600" dirty="0"/>
+          </a:p>
+        </p:txBody>
+      </p:sp>
+      <p:sp>
+        <p:nvSpPr>
+          <p:cNvPr id="9" name="Text 6"/>
+          <p:cNvSpPr txBox="1"/>
+          <p:nvPr/>
+        </p:nvSpPr>
+        <p:spPr>
+          <a:xfrm>
+            <a:off x="685800" y="4206240"/>
+            <a:ext cx="2103120" cy="914400"/>
+          </a:xfrm>
+          <a:prstGeom prst="rect">
+            <a:avLst/>
+          </a:prstGeom>
+          <a:noFill/>
+          <a:ln/>
+        </p:spPr>
+        <p:txBody>
+          <a:bodyPr wrap="square" lIns="0" tIns="0" rIns="0" bIns="0" rtlCol="0" anchor="t"/>
+          <a:lstStyle/>
+          <a:p>
+            <a:pPr algn="ctr" indent="0" marL="0">
+              <a:buNone/>
+            </a:pPr>
+            <a:r>
+              <a:rPr lang="en-US" sz="1600" b="1" dirty="0">
+                <a:solidFill>
+                  <a:schemeClr val="bg1"/>
+                </a:solidFill>
+              </a:rPr>
+              <a:t>Istória Python</a:t>
+            </a:r>
+            <a:endParaRPr lang="en-US" sz="1600" dirty="0"/>
+          </a:p>
+        </p:txBody>
+      </p:sp>
+      <p:sp>
+        <p:nvSpPr>
+          <p:cNvPr id="10" name="gr-q-0"/>
+          <p:cNvSpPr/>
+          <p:nvPr/>
+        </p:nvSpPr>
+        <p:spPr>
+          <a:xfrm>
+            <a:off x="3154680" y="1417320"/>
+            <a:ext cx="8488375" cy="1463040"/>
+          </a:xfrm>
+          <a:prstGeom prst="roundRect">
+            <a:avLst>
+              <a:gd name="adj" fmla="val 7500"/>
+            </a:avLst>
+          </a:prstGeom>
+          <a:solidFill>
+            <a:schemeClr val="bg2"/>
+          </a:solidFill>
+          <a:ln w="12700">
+            <a:solidFill>
+              <a:schemeClr val="bg2"/>
+            </a:solidFill>
+            <a:prstDash val="solid"/>
+          </a:ln>
+        </p:spPr>
+      </p:sp>
+      <p:sp>
+        <p:nvSpPr>
+          <p:cNvPr id="11" name="gr-n-0"/>
+          <p:cNvSpPr/>
+          <p:nvPr/>
+        </p:nvSpPr>
+        <p:spPr>
+          <a:xfrm>
+            <a:off x="3383280" y="1828800"/>
+            <a:ext cx="640080" cy="640080"/>
+          </a:xfrm>
+          <a:prstGeom prst="ellipse">
+            <a:avLst/>
+          </a:prstGeom>
+          <a:solidFill>
+            <a:schemeClr val="accent5"/>
+          </a:solidFill>
+          <a:ln w="12700">
+            <a:solidFill>
+              <a:schemeClr val="accent5"/>
+            </a:solidFill>
+            <a:prstDash val="solid"/>
+          </a:ln>
+        </p:spPr>
+      </p:sp>
+      <p:sp>
+        <p:nvSpPr>
+          <p:cNvPr id="12" name="gr-n-0-n"/>
+          <p:cNvSpPr txBox="1"/>
+          <p:nvPr/>
+        </p:nvSpPr>
+        <p:spPr>
+          <a:xfrm>
+            <a:off x="3383280" y="1828800"/>
+            <a:ext cx="640080" cy="640080"/>
+          </a:xfrm>
+          <a:prstGeom prst="rect">
+            <a:avLst/>
+          </a:prstGeom>
+          <a:noFill/>
+          <a:ln/>
+        </p:spPr>
+        <p:txBody>
+          <a:bodyPr wrap="square" lIns="0" tIns="0" rIns="0" bIns="0" rtlCol="0" anchor="ctr"/>
+          <a:lstStyle/>
+          <a:p>
+            <a:pPr algn="ctr" indent="0" marL="0">
+              <a:buNone/>
+            </a:pPr>
+            <a:r>
+              <a:rPr lang="en-US" sz="1700" b="1" dirty="0">
+                <a:solidFill>
+                  <a:schemeClr val="bg1"/>
+                </a:solidFill>
+              </a:rPr>
+              <a:t>1</a:t>
+            </a:r>
+            <a:endParaRPr lang="en-US" sz="1700" dirty="0"/>
+          </a:p>
+        </p:txBody>
+      </p:sp>
+      <p:sp>
+        <p:nvSpPr>
+          <p:cNvPr id="13" name="Text 10"/>
+          <p:cNvSpPr txBox="1"/>
+          <p:nvPr/>
+        </p:nvSpPr>
+        <p:spPr>
+          <a:xfrm>
+            <a:off x="4251960" y="1417320"/>
+            <a:ext cx="7162495" cy="1463040"/>
+          </a:xfrm>
+          <a:prstGeom prst="rect">
+            <a:avLst/>
+          </a:prstGeom>
+          <a:noFill/>
+          <a:ln/>
+        </p:spPr>
+        <p:txBody>
+          <a:bodyPr wrap="square" lIns="0" tIns="0" rIns="0" bIns="0" rtlCol="0" anchor="ctr"/>
+          <a:lstStyle/>
+          <a:p>
             <a:pPr indent="0" marL="0">
               <a:buNone/>
             </a:pPr>
             <a:r>
-              <a:rPr lang="en-US" sz="1300" dirty="0">
-                <a:solidFill>
-                  <a:schemeClr val="bg2"/>
-                </a:solidFill>
-              </a:rPr>
-              <a:t>Aprende baze, gratuitu</a:t>
-            </a:r>
-            <a:endParaRPr lang="en-US" sz="1300" dirty="0"/>
-          </a:p>
-        </p:txBody>
-      </p:sp>
-      <p:sp>
-        <p:nvSpPr>
-          <p:cNvPr id="8" name="rec-1-sirkulu"/>
-          <p:cNvSpPr/>
-          <p:nvPr/>
-        </p:nvSpPr>
-        <p:spPr>
-          <a:xfrm>
-            <a:off x="7955280" y="2834640"/>
-            <a:ext cx="868680" cy="868680"/>
+              <a:rPr lang="en-US" sz="1800" b="1" dirty="0">
+                <a:solidFill>
+                  <a:schemeClr val="tx2"/>
+                </a:solidFill>
+              </a:rPr>
+              <a:t>Tanba sá naran "Python"? Imi hanoin naran ne'e di'ak ka lae?</a:t>
+            </a:r>
+            <a:endParaRPr lang="en-US" sz="1800" dirty="0"/>
+          </a:p>
+        </p:txBody>
+      </p:sp>
+      <p:sp>
+        <p:nvSpPr>
+          <p:cNvPr id="14" name="gr-q-1"/>
+          <p:cNvSpPr/>
+          <p:nvPr/>
+        </p:nvSpPr>
+        <p:spPr>
+          <a:xfrm>
+            <a:off x="3154680" y="3035808"/>
+            <a:ext cx="8488375" cy="1463040"/>
+          </a:xfrm>
+          <a:prstGeom prst="roundRect">
+            <a:avLst>
+              <a:gd name="adj" fmla="val 7500"/>
+            </a:avLst>
+          </a:prstGeom>
+          <a:solidFill>
+            <a:schemeClr val="bg2"/>
+          </a:solidFill>
+          <a:ln w="12700">
+            <a:solidFill>
+              <a:schemeClr val="bg2"/>
+            </a:solidFill>
+            <a:prstDash val="solid"/>
+          </a:ln>
+        </p:spPr>
+      </p:sp>
+      <p:sp>
+        <p:nvSpPr>
+          <p:cNvPr id="15" name="gr-n-1"/>
+          <p:cNvSpPr/>
+          <p:nvPr/>
+        </p:nvSpPr>
+        <p:spPr>
+          <a:xfrm>
+            <a:off x="3383280" y="3447288"/>
+            <a:ext cx="640080" cy="640080"/>
           </a:xfrm>
           <a:prstGeom prst="ellipse">
             <a:avLst/>
+          </a:prstGeom>
+          <a:solidFill>
+            <a:schemeClr val="accent5"/>
+          </a:solidFill>
+          <a:ln w="12700">
+            <a:solidFill>
+              <a:schemeClr val="accent5"/>
+            </a:solidFill>
+            <a:prstDash val="solid"/>
+          </a:ln>
+        </p:spPr>
+      </p:sp>
+      <p:sp>
+        <p:nvSpPr>
+          <p:cNvPr id="16" name="gr-n-1-n"/>
+          <p:cNvSpPr txBox="1"/>
+          <p:nvPr/>
+        </p:nvSpPr>
+        <p:spPr>
+          <a:xfrm>
+            <a:off x="3383280" y="3447288"/>
+            <a:ext cx="640080" cy="640080"/>
+          </a:xfrm>
+          <a:prstGeom prst="rect">
+            <a:avLst/>
+          </a:prstGeom>
+          <a:noFill/>
+          <a:ln/>
+        </p:spPr>
+        <p:txBody>
+          <a:bodyPr wrap="square" lIns="0" tIns="0" rIns="0" bIns="0" rtlCol="0" anchor="ctr"/>
+          <a:lstStyle/>
+          <a:p>
+            <a:pPr algn="ctr" indent="0" marL="0">
+              <a:buNone/>
+            </a:pPr>
+            <a:r>
+              <a:rPr lang="en-US" sz="1700" b="1" dirty="0">
+                <a:solidFill>
+                  <a:schemeClr val="bg1"/>
+                </a:solidFill>
+              </a:rPr>
+              <a:t>2</a:t>
+            </a:r>
+            <a:endParaRPr lang="en-US" sz="1700" dirty="0"/>
+          </a:p>
+        </p:txBody>
+      </p:sp>
+      <p:sp>
+        <p:nvSpPr>
+          <p:cNvPr id="17" name="Text 14"/>
+          <p:cNvSpPr txBox="1"/>
+          <p:nvPr/>
+        </p:nvSpPr>
+        <p:spPr>
+          <a:xfrm>
+            <a:off x="4251960" y="3035808"/>
+            <a:ext cx="7162495" cy="1463040"/>
+          </a:xfrm>
+          <a:prstGeom prst="rect">
+            <a:avLst/>
+          </a:prstGeom>
+          <a:noFill/>
+          <a:ln/>
+        </p:spPr>
+        <p:txBody>
+          <a:bodyPr wrap="square" lIns="0" tIns="0" rIns="0" bIns="0" rtlCol="0" anchor="ctr"/>
+          <a:lstStyle/>
+          <a:p>
+            <a:pPr indent="0" marL="0">
+              <a:buNone/>
+            </a:pPr>
+            <a:r>
+              <a:rPr lang="en-US" sz="1800" b="1" dirty="0">
+                <a:solidFill>
+                  <a:schemeClr val="tx2"/>
+                </a:solidFill>
+              </a:rPr>
+              <a:t>Guido hahú Python iha feriadu Natál hanesan projetu ki'ik. Lisaun saida ba ita?</a:t>
+            </a:r>
+            <a:endParaRPr lang="en-US" sz="1800" dirty="0"/>
+          </a:p>
+        </p:txBody>
+      </p:sp>
+      <p:sp>
+        <p:nvSpPr>
+          <p:cNvPr id="18" name="gr-q-2"/>
+          <p:cNvSpPr/>
+          <p:nvPr/>
+        </p:nvSpPr>
+        <p:spPr>
+          <a:xfrm>
+            <a:off x="3154680" y="4654296"/>
+            <a:ext cx="8488375" cy="1463040"/>
+          </a:xfrm>
+          <a:prstGeom prst="roundRect">
+            <a:avLst>
+              <a:gd name="adj" fmla="val 7500"/>
+            </a:avLst>
+          </a:prstGeom>
+          <a:solidFill>
+            <a:schemeClr val="bg2"/>
+          </a:solidFill>
+          <a:ln w="12700">
+            <a:solidFill>
+              <a:schemeClr val="bg2"/>
+            </a:solidFill>
+            <a:prstDash val="solid"/>
+          </a:ln>
+        </p:spPr>
+      </p:sp>
+      <p:sp>
+        <p:nvSpPr>
+          <p:cNvPr id="19" name="gr-n-2"/>
+          <p:cNvSpPr/>
+          <p:nvPr/>
+        </p:nvSpPr>
+        <p:spPr>
+          <a:xfrm>
+            <a:off x="3383280" y="5065776"/>
+            <a:ext cx="640080" cy="640080"/>
+          </a:xfrm>
+          <a:prstGeom prst="ellipse">
+            <a:avLst/>
+          </a:prstGeom>
+          <a:solidFill>
+            <a:schemeClr val="accent5"/>
+          </a:solidFill>
+          <a:ln w="12700">
+            <a:solidFill>
+              <a:schemeClr val="accent5"/>
+            </a:solidFill>
+            <a:prstDash val="solid"/>
+          </a:ln>
+        </p:spPr>
+      </p:sp>
+      <p:sp>
+        <p:nvSpPr>
+          <p:cNvPr id="20" name="gr-n-2-n"/>
+          <p:cNvSpPr txBox="1"/>
+          <p:nvPr/>
+        </p:nvSpPr>
+        <p:spPr>
+          <a:xfrm>
+            <a:off x="3383280" y="5065776"/>
+            <a:ext cx="640080" cy="640080"/>
+          </a:xfrm>
+          <a:prstGeom prst="rect">
+            <a:avLst/>
+          </a:prstGeom>
+          <a:noFill/>
+          <a:ln/>
+        </p:spPr>
+        <p:txBody>
+          <a:bodyPr wrap="square" lIns="0" tIns="0" rIns="0" bIns="0" rtlCol="0" anchor="ctr"/>
+          <a:lstStyle/>
+          <a:p>
+            <a:pPr algn="ctr" indent="0" marL="0">
+              <a:buNone/>
+            </a:pPr>
+            <a:r>
+              <a:rPr lang="en-US" sz="1700" b="1" dirty="0">
+                <a:solidFill>
+                  <a:schemeClr val="bg1"/>
+                </a:solidFill>
+              </a:rPr>
+              <a:t>3</a:t>
+            </a:r>
+            <a:endParaRPr lang="en-US" sz="1700" dirty="0"/>
+          </a:p>
+        </p:txBody>
+      </p:sp>
+      <p:sp>
+        <p:nvSpPr>
+          <p:cNvPr id="21" name="Text 18"/>
+          <p:cNvSpPr txBox="1"/>
+          <p:nvPr/>
+        </p:nvSpPr>
+        <p:spPr>
+          <a:xfrm>
+            <a:off x="4251960" y="4654296"/>
+            <a:ext cx="7162495" cy="1463040"/>
+          </a:xfrm>
+          <a:prstGeom prst="rect">
+            <a:avLst/>
+          </a:prstGeom>
+          <a:noFill/>
+          <a:ln/>
+        </p:spPr>
+        <p:txBody>
+          <a:bodyPr wrap="square" lIns="0" tIns="0" rIns="0" bIns="0" rtlCol="0" anchor="ctr"/>
+          <a:lstStyle/>
+          <a:p>
+            <a:pPr indent="0" marL="0">
+              <a:buNone/>
+            </a:pPr>
+            <a:r>
+              <a:rPr lang="en-US" sz="1800" b="1" dirty="0">
+                <a:solidFill>
+                  <a:schemeClr val="tx2"/>
+                </a:solidFill>
+              </a:rPr>
+              <a:t>Python gratuitu no komunidade mundu mak kuida. Tanba sá ida-ne'e importante ba RbR?</a:t>
+            </a:r>
+            <a:endParaRPr lang="en-US" sz="1800" dirty="0"/>
+          </a:p>
+        </p:txBody>
+      </p:sp>
+      <p:sp>
+        <p:nvSpPr>
+          <p:cNvPr id="25" name="Slide Number Placeholder 0"/>
+          <p:cNvSpPr>
+            <a:spLocks noGrp="1"/>
+          </p:cNvSpPr>
+          <p:nvPr>
+            <p:ph type="sldNum" sz="quarter" idx="4294967295"/>
+          </p:nvPr>
+        </p:nvSpPr>
+        <p:spPr>
+          <a:xfrm>
+            <a:off x="11094415" y="6400800"/>
+            <a:ext cx="548640" cy="274320"/>
+          </a:xfrm>
+          <a:prstGeom prst="rect">
+            <a:avLst/>
+          </a:prstGeom>
+          <a:extLst>
+            <a:ext uri="{C572A759-6A51-4108-AA02-DFA0A04FC94B}">
+              <ma14:wrappingTextBoxFlag xmlns:ma14="http://schemas.microsoft.com/office/mac/drawingml/2011/main" val="0"/>
+            </a:ext>
+          </a:extLst>
+        </p:spPr>
+        <p:txBody>
+          <a:bodyPr/>
+          <a:lstStyle>
+            <a:lvl1pPr>
+              <a:defRPr sz="1000">
+                <a:solidFill>
+                  <a:srgbClr val="5E6B66"/>
+                </a:solidFill>
+              </a:defRPr>
+            </a:lvl1pPr>
+          </a:lstStyle>
+          <a:p>
+            <a:pPr algn="r"/>
+            <a:fld id="{F7021451-1387-4CA6-816F-3879F97B5CBC}" type="slidenum">
+              <a:rPr b="0" lang="en-US"/>
+              <a:t>36</a:t>
+            </a:fld>
+            <a:endParaRPr lang="en-US"/>
+          </a:p>
+        </p:txBody>
+      </p:sp>
+    </p:spTree>
+  </p:cSld>
+  <p:clrMapOvr>
+    <a:masterClrMapping/>
+  </p:clrMapOvr>
+</p:sld>
+</file>
+
+<file path=ppt/slides/slide37.xml><?xml version="1.0" encoding="utf-8"?>
+<p:sld xmlns:a="http://schemas.openxmlformats.org/drawingml/2006/main" xmlns:r="http://schemas.openxmlformats.org/officeDocument/2006/relationships" xmlns:p="http://schemas.openxmlformats.org/presentationml/2006/main">
+  <p:cSld name="Slide 37">
+    <p:spTree>
+      <p:nvGrpSpPr>
+        <p:cNvPr id="1" name=""/>
+        <p:cNvGrpSpPr/>
+        <p:nvPr/>
+      </p:nvGrpSpPr>
+      <p:grpSpPr>
+        <a:xfrm>
+          <a:off x="0" y="0"/>
+          <a:ext cx="0" cy="0"/>
+          <a:chOff x="0" y="0"/>
+          <a:chExt cx="0" cy="0"/>
+        </a:xfrm>
+      </p:grpSpPr>
+      <p:sp>
+        <p:nvSpPr>
+          <p:cNvPr id="2" name="Text 0"/>
+          <p:cNvSpPr/>
+          <p:nvPr>
+            <p:ph idx="100" type="title" hasCustomPrompt="1"/>
+          </p:nvPr>
+        </p:nvSpPr>
+        <p:spPr>
+          <a:xfrm>
+            <a:off x="548640" y="320040"/>
+            <a:ext cx="11094415" cy="777240"/>
+          </a:xfrm>
+          <a:prstGeom prst="rect">
+            <a:avLst/>
+          </a:prstGeom>
+          <a:noFill/>
+          <a:ln/>
+        </p:spPr>
+        <p:txBody>
+          <a:bodyPr wrap="square" lIns="0" tIns="0" rIns="0" bIns="0" rtlCol="0" anchor="ctr"/>
+          <a:lstStyle/>
+          <a:p>
+            <a:pPr algn="l" indent="0" marL="0">
+              <a:buNone/>
+            </a:pPr>
+            <a:r>
+              <a:rPr lang="en-US" sz="3000" b="1" dirty="0">
+                <a:solidFill>
+                  <a:schemeClr val="tx2"/>
+                </a:solidFill>
+              </a:rPr>
+              <a:t>Grupu 3: Dadus RbR: uluk no agora</a:t>
+            </a:r>
+            <a:endParaRPr lang="en-US" sz="3000" dirty="0"/>
+          </a:p>
+        </p:txBody>
+      </p:sp>
+      <p:sp>
+        <p:nvSpPr>
+          <p:cNvPr id="3" name="tempu"/>
+          <p:cNvSpPr/>
+          <p:nvPr/>
+        </p:nvSpPr>
+        <p:spPr>
+          <a:xfrm>
+            <a:off x="10271455" y="457200"/>
+            <a:ext cx="1371600" cy="384048"/>
+          </a:xfrm>
+          <a:prstGeom prst="roundRect">
+            <a:avLst>
+              <a:gd name="adj" fmla="val 50000"/>
+            </a:avLst>
+          </a:prstGeom>
+          <a:solidFill>
+            <a:schemeClr val="bg2"/>
+          </a:solidFill>
+          <a:ln w="12700">
+            <a:solidFill>
+              <a:schemeClr val="bg2"/>
+            </a:solidFill>
+            <a:prstDash val="solid"/>
+          </a:ln>
+        </p:spPr>
+      </p:sp>
+      <p:sp>
+        <p:nvSpPr>
+          <p:cNvPr id="4" name="Text 2"/>
+          <p:cNvSpPr txBox="1"/>
+          <p:nvPr/>
+        </p:nvSpPr>
+        <p:spPr>
+          <a:xfrm>
+            <a:off x="10271455" y="457200"/>
+            <a:ext cx="1371600" cy="384048"/>
+          </a:xfrm>
+          <a:prstGeom prst="rect">
+            <a:avLst/>
+          </a:prstGeom>
+          <a:noFill/>
+          <a:ln/>
+        </p:spPr>
+        <p:txBody>
+          <a:bodyPr wrap="square" lIns="0" tIns="0" rIns="0" bIns="0" rtlCol="0" anchor="ctr"/>
+          <a:lstStyle/>
+          <a:p>
+            <a:pPr algn="ctr" indent="0" marL="0">
+              <a:buNone/>
+            </a:pPr>
+            <a:r>
+              <a:rPr lang="en-US" sz="1200" b="1" dirty="0">
+                <a:solidFill>
+                  <a:schemeClr val="accent1"/>
+                </a:solidFill>
+              </a:rPr>
+              <a:t>11:51</a:t>
+            </a:r>
+            <a:endParaRPr lang="en-US" sz="1200" dirty="0"/>
+          </a:p>
+        </p:txBody>
+      </p:sp>
+      <p:sp>
+        <p:nvSpPr>
+          <p:cNvPr id="5" name="gr-lado"/>
+          <p:cNvSpPr/>
+          <p:nvPr/>
+        </p:nvSpPr>
+        <p:spPr>
+          <a:xfrm>
+            <a:off x="548640" y="1417320"/>
+            <a:ext cx="2377440" cy="4709160"/>
+          </a:xfrm>
+          <a:prstGeom prst="roundRect">
+            <a:avLst>
+              <a:gd name="adj" fmla="val 4615"/>
+            </a:avLst>
           </a:prstGeom>
           <a:solidFill>
             <a:schemeClr val="accent3"/>
@@ -26419,24 +29614,49 @@
           </a:ln>
         </p:spPr>
       </p:sp>
+      <p:sp>
+        <p:nvSpPr>
+          <p:cNvPr id="6" name="gr-ik-sirkulu"/>
+          <p:cNvSpPr/>
+          <p:nvPr/>
+        </p:nvSpPr>
+        <p:spPr>
+          <a:xfrm>
+            <a:off x="1005840" y="1920240"/>
+            <a:ext cx="1463040" cy="1463040"/>
+          </a:xfrm>
+          <a:prstGeom prst="ellipse">
+            <a:avLst/>
+          </a:prstGeom>
+          <a:solidFill>
+            <a:schemeClr val="tx2"/>
+          </a:solidFill>
+          <a:ln w="12700">
+            <a:solidFill>
+              <a:schemeClr val="tx2"/>
+            </a:solidFill>
+            <a:prstDash val="solid"/>
+          </a:ln>
+        </p:spPr>
+      </p:sp>
       <p:pic>
         <p:nvPicPr>
-          <p:cNvPr id="9" name="rec-1-ikone" descr="preencoded.png">    </p:cNvPr>
+          <p:cNvPr id="7" name="gr-ik-ikone" descr="preencoded.png">    </p:cNvPr>
           <p:cNvPicPr>
             <a:picLocks noChangeAspect="1"/>
           </p:cNvPicPr>
           <p:nvPr/>
         </p:nvPicPr>
         <p:blipFill>
-          <a:blip r:embed="rId2"/>
+          <a:blip r:embed="rId1"/>
           <a:stretch>
             <a:fillRect/>
           </a:stretch>
         </p:blipFill>
         <p:spPr>
           <a:xfrm>
-            <a:off x="8163763" y="3043123"/>
-            <a:ext cx="451714" cy="451714"/>
+            <a:off x="1356970" y="2271370"/>
+            <a:ext cx="760781" cy="760781"/>
           </a:xfrm>
           <a:prstGeom prst="rect">
             <a:avLst/>
@@ -26445,14 +29665,14 @@
       </p:pic>
       <p:sp>
         <p:nvSpPr>
-          <p:cNvPr id="10" name="Text 6"/>
-          <p:cNvSpPr txBox="1"/>
-          <p:nvPr/>
-        </p:nvSpPr>
-        <p:spPr>
-          <a:xfrm>
-            <a:off x="8961120" y="2907792"/>
-            <a:ext cx="3017520" cy="365760"/>
+          <p:cNvPr id="8" name="Text 5"/>
+          <p:cNvSpPr txBox="1"/>
+          <p:nvPr/>
+        </p:nvSpPr>
+        <p:spPr>
+          <a:xfrm>
+            <a:off x="548640" y="3657600"/>
+            <a:ext cx="2377440" cy="548640"/>
           </a:xfrm>
           <a:prstGeom prst="rect">
             <a:avLst/>
@@ -26464,31 +29684,34 @@
           <a:bodyPr wrap="square" lIns="0" tIns="0" rIns="0" bIns="0" rtlCol="0" anchor="t"/>
           <a:lstStyle/>
           <a:p>
-            <a:pPr indent="0" marL="0">
-              <a:buNone/>
-            </a:pPr>
-            <a:r>
-              <a:rPr lang="en-US" sz="1400" b="1" dirty="0">
+            <a:pPr algn="ctr" indent="0" marL="0">
+              <a:buNone/>
+            </a:pPr>
+            <a:r>
+              <a:rPr lang="en-US" sz="2600" b="1" dirty="0">
                 <a:solidFill>
                   <a:schemeClr val="bg1"/>
                 </a:solidFill>
-              </a:rPr>
-              <a:t>colab.research.google.com</a:t>
-            </a:r>
-            <a:endParaRPr lang="en-US" sz="1400" dirty="0"/>
-          </a:p>
-        </p:txBody>
-      </p:sp>
-      <p:sp>
-        <p:nvSpPr>
-          <p:cNvPr id="11" name="Text 7"/>
-          <p:cNvSpPr txBox="1"/>
-          <p:nvPr/>
-        </p:nvSpPr>
-        <p:spPr>
-          <a:xfrm>
-            <a:off x="8961120" y="3310128"/>
-            <a:ext cx="3017520" cy="365760"/>
+                <a:latin typeface="Cambria" pitchFamily="34" charset="0"/>
+                <a:ea typeface="Cambria" pitchFamily="34" charset="-122"/>
+                <a:cs typeface="Cambria" pitchFamily="34" charset="-120"/>
+              </a:rPr>
+              <a:t>Grupu 3</a:t>
+            </a:r>
+            <a:endParaRPr lang="en-US" sz="2600" dirty="0"/>
+          </a:p>
+        </p:txBody>
+      </p:sp>
+      <p:sp>
+        <p:nvSpPr>
+          <p:cNvPr id="9" name="Text 6"/>
+          <p:cNvSpPr txBox="1"/>
+          <p:nvPr/>
+        </p:nvSpPr>
+        <p:spPr>
+          <a:xfrm>
+            <a:off x="685800" y="4206240"/>
+            <a:ext cx="2103120" cy="914400"/>
           </a:xfrm>
           <a:prstGeom prst="rect">
             <a:avLst/>
@@ -26500,64 +29723,634 @@
           <a:bodyPr wrap="square" lIns="0" tIns="0" rIns="0" bIns="0" rtlCol="0" anchor="t"/>
           <a:lstStyle/>
           <a:p>
-            <a:pPr indent="0" marL="0">
-              <a:buNone/>
-            </a:pPr>
-            <a:r>
-              <a:rPr lang="en-US" sz="1300" dirty="0">
-                <a:solidFill>
-                  <a:schemeClr val="bg2"/>
-                </a:solidFill>
-              </a:rPr>
-              <a:t>Koko Python iha browser</a:t>
-            </a:r>
-            <a:endParaRPr lang="en-US" sz="1300" dirty="0"/>
-          </a:p>
-        </p:txBody>
-      </p:sp>
-      <p:sp>
-        <p:nvSpPr>
-          <p:cNvPr id="12" name="rec-2-sirkulu"/>
-          <p:cNvSpPr/>
-          <p:nvPr/>
-        </p:nvSpPr>
-        <p:spPr>
-          <a:xfrm>
-            <a:off x="7955280" y="4297680"/>
-            <a:ext cx="868680" cy="868680"/>
-          </a:xfrm>
-          <a:prstGeom prst="ellipse">
-            <a:avLst/>
+            <a:pPr algn="ctr" indent="0" marL="0">
+              <a:buNone/>
+            </a:pPr>
+            <a:r>
+              <a:rPr lang="en-US" sz="1600" b="1" dirty="0">
+                <a:solidFill>
+                  <a:schemeClr val="bg1"/>
+                </a:solidFill>
+              </a:rPr>
+              <a:t>Dadus RbR: uluk no agora</a:t>
+            </a:r>
+            <a:endParaRPr lang="en-US" sz="1600" dirty="0"/>
+          </a:p>
+        </p:txBody>
+      </p:sp>
+      <p:sp>
+        <p:nvSpPr>
+          <p:cNvPr id="10" name="gr-q-0"/>
+          <p:cNvSpPr/>
+          <p:nvPr/>
+        </p:nvSpPr>
+        <p:spPr>
+          <a:xfrm>
+            <a:off x="3154680" y="1417320"/>
+            <a:ext cx="8488375" cy="1463040"/>
+          </a:xfrm>
+          <a:prstGeom prst="roundRect">
+            <a:avLst>
+              <a:gd name="adj" fmla="val 7500"/>
+            </a:avLst>
           </a:prstGeom>
           <a:solidFill>
-            <a:schemeClr val="accent5"/>
+            <a:schemeClr val="bg2"/>
           </a:solidFill>
           <a:ln w="12700">
             <a:solidFill>
-              <a:schemeClr val="accent5"/>
+              <a:schemeClr val="bg2"/>
             </a:solidFill>
             <a:prstDash val="solid"/>
           </a:ln>
         </p:spPr>
       </p:sp>
+      <p:sp>
+        <p:nvSpPr>
+          <p:cNvPr id="11" name="gr-n-0"/>
+          <p:cNvSpPr/>
+          <p:nvPr/>
+        </p:nvSpPr>
+        <p:spPr>
+          <a:xfrm>
+            <a:off x="3383280" y="1828800"/>
+            <a:ext cx="640080" cy="640080"/>
+          </a:xfrm>
+          <a:prstGeom prst="ellipse">
+            <a:avLst/>
+          </a:prstGeom>
+          <a:solidFill>
+            <a:schemeClr val="accent3"/>
+          </a:solidFill>
+          <a:ln w="12700">
+            <a:solidFill>
+              <a:schemeClr val="accent3"/>
+            </a:solidFill>
+            <a:prstDash val="solid"/>
+          </a:ln>
+        </p:spPr>
+      </p:sp>
+      <p:sp>
+        <p:nvSpPr>
+          <p:cNvPr id="12" name="gr-n-0-n"/>
+          <p:cNvSpPr txBox="1"/>
+          <p:nvPr/>
+        </p:nvSpPr>
+        <p:spPr>
+          <a:xfrm>
+            <a:off x="3383280" y="1828800"/>
+            <a:ext cx="640080" cy="640080"/>
+          </a:xfrm>
+          <a:prstGeom prst="rect">
+            <a:avLst/>
+          </a:prstGeom>
+          <a:noFill/>
+          <a:ln/>
+        </p:spPr>
+        <p:txBody>
+          <a:bodyPr wrap="square" lIns="0" tIns="0" rIns="0" bIns="0" rtlCol="0" anchor="ctr"/>
+          <a:lstStyle/>
+          <a:p>
+            <a:pPr algn="ctr" indent="0" marL="0">
+              <a:buNone/>
+            </a:pPr>
+            <a:r>
+              <a:rPr lang="en-US" sz="1700" b="1" dirty="0">
+                <a:solidFill>
+                  <a:schemeClr val="bg1"/>
+                </a:solidFill>
+              </a:rPr>
+              <a:t>1</a:t>
+            </a:r>
+            <a:endParaRPr lang="en-US" sz="1700" dirty="0"/>
+          </a:p>
+        </p:txBody>
+      </p:sp>
+      <p:sp>
+        <p:nvSpPr>
+          <p:cNvPr id="13" name="Text 10"/>
+          <p:cNvSpPr txBox="1"/>
+          <p:nvPr/>
+        </p:nvSpPr>
+        <p:spPr>
+          <a:xfrm>
+            <a:off x="4251960" y="1417320"/>
+            <a:ext cx="7162495" cy="1463040"/>
+          </a:xfrm>
+          <a:prstGeom prst="rect">
+            <a:avLst/>
+          </a:prstGeom>
+          <a:noFill/>
+          <a:ln/>
+        </p:spPr>
+        <p:txBody>
+          <a:bodyPr wrap="square" lIns="0" tIns="0" rIns="0" bIns="0" rtlCol="0" anchor="ctr"/>
+          <a:lstStyle/>
+          <a:p>
+            <a:pPr indent="0" marL="0">
+              <a:buNone/>
+            </a:pPr>
+            <a:r>
+              <a:rPr lang="en-US" sz="1800" b="1" dirty="0">
+                <a:solidFill>
+                  <a:schemeClr val="tx2"/>
+                </a:solidFill>
+              </a:rPr>
+              <a:t>Iha tempu surat, Word no Excel: problema saida mak imi hasoru?</a:t>
+            </a:r>
+            <a:endParaRPr lang="en-US" sz="1800" dirty="0"/>
+          </a:p>
+        </p:txBody>
+      </p:sp>
+      <p:sp>
+        <p:nvSpPr>
+          <p:cNvPr id="14" name="gr-q-1"/>
+          <p:cNvSpPr/>
+          <p:nvPr/>
+        </p:nvSpPr>
+        <p:spPr>
+          <a:xfrm>
+            <a:off x="3154680" y="3035808"/>
+            <a:ext cx="8488375" cy="1463040"/>
+          </a:xfrm>
+          <a:prstGeom prst="roundRect">
+            <a:avLst>
+              <a:gd name="adj" fmla="val 7500"/>
+            </a:avLst>
+          </a:prstGeom>
+          <a:solidFill>
+            <a:schemeClr val="bg2"/>
+          </a:solidFill>
+          <a:ln w="12700">
+            <a:solidFill>
+              <a:schemeClr val="bg2"/>
+            </a:solidFill>
+            <a:prstDash val="solid"/>
+          </a:ln>
+        </p:spPr>
+      </p:sp>
+      <p:sp>
+        <p:nvSpPr>
+          <p:cNvPr id="15" name="gr-n-1"/>
+          <p:cNvSpPr/>
+          <p:nvPr/>
+        </p:nvSpPr>
+        <p:spPr>
+          <a:xfrm>
+            <a:off x="3383280" y="3447288"/>
+            <a:ext cx="640080" cy="640080"/>
+          </a:xfrm>
+          <a:prstGeom prst="ellipse">
+            <a:avLst/>
+          </a:prstGeom>
+          <a:solidFill>
+            <a:schemeClr val="accent3"/>
+          </a:solidFill>
+          <a:ln w="12700">
+            <a:solidFill>
+              <a:schemeClr val="accent3"/>
+            </a:solidFill>
+            <a:prstDash val="solid"/>
+          </a:ln>
+        </p:spPr>
+      </p:sp>
+      <p:sp>
+        <p:nvSpPr>
+          <p:cNvPr id="16" name="gr-n-1-n"/>
+          <p:cNvSpPr txBox="1"/>
+          <p:nvPr/>
+        </p:nvSpPr>
+        <p:spPr>
+          <a:xfrm>
+            <a:off x="3383280" y="3447288"/>
+            <a:ext cx="640080" cy="640080"/>
+          </a:xfrm>
+          <a:prstGeom prst="rect">
+            <a:avLst/>
+          </a:prstGeom>
+          <a:noFill/>
+          <a:ln/>
+        </p:spPr>
+        <p:txBody>
+          <a:bodyPr wrap="square" lIns="0" tIns="0" rIns="0" bIns="0" rtlCol="0" anchor="ctr"/>
+          <a:lstStyle/>
+          <a:p>
+            <a:pPr algn="ctr" indent="0" marL="0">
+              <a:buNone/>
+            </a:pPr>
+            <a:r>
+              <a:rPr lang="en-US" sz="1700" b="1" dirty="0">
+                <a:solidFill>
+                  <a:schemeClr val="bg1"/>
+                </a:solidFill>
+              </a:rPr>
+              <a:t>2</a:t>
+            </a:r>
+            <a:endParaRPr lang="en-US" sz="1700" dirty="0"/>
+          </a:p>
+        </p:txBody>
+      </p:sp>
+      <p:sp>
+        <p:nvSpPr>
+          <p:cNvPr id="17" name="Text 14"/>
+          <p:cNvSpPr txBox="1"/>
+          <p:nvPr/>
+        </p:nvSpPr>
+        <p:spPr>
+          <a:xfrm>
+            <a:off x="4251960" y="3035808"/>
+            <a:ext cx="7162495" cy="1463040"/>
+          </a:xfrm>
+          <a:prstGeom prst="rect">
+            <a:avLst/>
+          </a:prstGeom>
+          <a:noFill/>
+          <a:ln/>
+        </p:spPr>
+        <p:txBody>
+          <a:bodyPr wrap="square" lIns="0" tIns="0" rIns="0" bIns="0" rtlCol="0" anchor="ctr"/>
+          <a:lstStyle/>
+          <a:p>
+            <a:pPr indent="0" marL="0">
+              <a:buNone/>
+            </a:pPr>
+            <a:r>
+              <a:rPr lang="en-US" sz="1800" b="1" dirty="0">
+                <a:solidFill>
+                  <a:schemeClr val="tx2"/>
+                </a:solidFill>
+              </a:rPr>
+              <a:t>Saida mak muda iha imi-nia servisu ho SIBAR-RbR? Buat ida di'ak no buat ida susar.</a:t>
+            </a:r>
+            <a:endParaRPr lang="en-US" sz="1800" dirty="0"/>
+          </a:p>
+        </p:txBody>
+      </p:sp>
+      <p:sp>
+        <p:nvSpPr>
+          <p:cNvPr id="18" name="gr-q-2"/>
+          <p:cNvSpPr/>
+          <p:nvPr/>
+        </p:nvSpPr>
+        <p:spPr>
+          <a:xfrm>
+            <a:off x="3154680" y="4654296"/>
+            <a:ext cx="8488375" cy="1463040"/>
+          </a:xfrm>
+          <a:prstGeom prst="roundRect">
+            <a:avLst>
+              <a:gd name="adj" fmla="val 7500"/>
+            </a:avLst>
+          </a:prstGeom>
+          <a:solidFill>
+            <a:schemeClr val="bg2"/>
+          </a:solidFill>
+          <a:ln w="12700">
+            <a:solidFill>
+              <a:schemeClr val="bg2"/>
+            </a:solidFill>
+            <a:prstDash val="solid"/>
+          </a:ln>
+        </p:spPr>
+      </p:sp>
+      <p:sp>
+        <p:nvSpPr>
+          <p:cNvPr id="19" name="gr-n-2"/>
+          <p:cNvSpPr/>
+          <p:nvPr/>
+        </p:nvSpPr>
+        <p:spPr>
+          <a:xfrm>
+            <a:off x="3383280" y="5065776"/>
+            <a:ext cx="640080" cy="640080"/>
+          </a:xfrm>
+          <a:prstGeom prst="ellipse">
+            <a:avLst/>
+          </a:prstGeom>
+          <a:solidFill>
+            <a:schemeClr val="accent3"/>
+          </a:solidFill>
+          <a:ln w="12700">
+            <a:solidFill>
+              <a:schemeClr val="accent3"/>
+            </a:solidFill>
+            <a:prstDash val="solid"/>
+          </a:ln>
+        </p:spPr>
+      </p:sp>
+      <p:sp>
+        <p:nvSpPr>
+          <p:cNvPr id="20" name="gr-n-2-n"/>
+          <p:cNvSpPr txBox="1"/>
+          <p:nvPr/>
+        </p:nvSpPr>
+        <p:spPr>
+          <a:xfrm>
+            <a:off x="3383280" y="5065776"/>
+            <a:ext cx="640080" cy="640080"/>
+          </a:xfrm>
+          <a:prstGeom prst="rect">
+            <a:avLst/>
+          </a:prstGeom>
+          <a:noFill/>
+          <a:ln/>
+        </p:spPr>
+        <p:txBody>
+          <a:bodyPr wrap="square" lIns="0" tIns="0" rIns="0" bIns="0" rtlCol="0" anchor="ctr"/>
+          <a:lstStyle/>
+          <a:p>
+            <a:pPr algn="ctr" indent="0" marL="0">
+              <a:buNone/>
+            </a:pPr>
+            <a:r>
+              <a:rPr lang="en-US" sz="1700" b="1" dirty="0">
+                <a:solidFill>
+                  <a:schemeClr val="bg1"/>
+                </a:solidFill>
+              </a:rPr>
+              <a:t>3</a:t>
+            </a:r>
+            <a:endParaRPr lang="en-US" sz="1700" dirty="0"/>
+          </a:p>
+        </p:txBody>
+      </p:sp>
+      <p:sp>
+        <p:nvSpPr>
+          <p:cNvPr id="21" name="Text 18"/>
+          <p:cNvSpPr txBox="1"/>
+          <p:nvPr/>
+        </p:nvSpPr>
+        <p:spPr>
+          <a:xfrm>
+            <a:off x="4251960" y="4654296"/>
+            <a:ext cx="7162495" cy="1463040"/>
+          </a:xfrm>
+          <a:prstGeom prst="rect">
+            <a:avLst/>
+          </a:prstGeom>
+          <a:noFill/>
+          <a:ln/>
+        </p:spPr>
+        <p:txBody>
+          <a:bodyPr wrap="square" lIns="0" tIns="0" rIns="0" bIns="0" rtlCol="0" anchor="ctr"/>
+          <a:lstStyle/>
+          <a:p>
+            <a:pPr indent="0" marL="0">
+              <a:buNone/>
+            </a:pPr>
+            <a:r>
+              <a:rPr lang="en-US" sz="1800" b="1" dirty="0">
+                <a:solidFill>
+                  <a:schemeClr val="tx2"/>
+                </a:solidFill>
+              </a:rPr>
+              <a:t>Se kazu eviksaun ida rejista dala rua, saida mak bele akontese ba relatóriu no advokasia?</a:t>
+            </a:r>
+            <a:endParaRPr lang="en-US" sz="1800" dirty="0"/>
+          </a:p>
+        </p:txBody>
+      </p:sp>
+      <p:sp>
+        <p:nvSpPr>
+          <p:cNvPr id="25" name="Slide Number Placeholder 0"/>
+          <p:cNvSpPr>
+            <a:spLocks noGrp="1"/>
+          </p:cNvSpPr>
+          <p:nvPr>
+            <p:ph type="sldNum" sz="quarter" idx="4294967295"/>
+          </p:nvPr>
+        </p:nvSpPr>
+        <p:spPr>
+          <a:xfrm>
+            <a:off x="11094415" y="6400800"/>
+            <a:ext cx="548640" cy="274320"/>
+          </a:xfrm>
+          <a:prstGeom prst="rect">
+            <a:avLst/>
+          </a:prstGeom>
+          <a:extLst>
+            <a:ext uri="{C572A759-6A51-4108-AA02-DFA0A04FC94B}">
+              <ma14:wrappingTextBoxFlag xmlns:ma14="http://schemas.microsoft.com/office/mac/drawingml/2011/main" val="0"/>
+            </a:ext>
+          </a:extLst>
+        </p:spPr>
+        <p:txBody>
+          <a:bodyPr/>
+          <a:lstStyle>
+            <a:lvl1pPr>
+              <a:defRPr sz="1000">
+                <a:solidFill>
+                  <a:srgbClr val="5E6B66"/>
+                </a:solidFill>
+              </a:defRPr>
+            </a:lvl1pPr>
+          </a:lstStyle>
+          <a:p>
+            <a:pPr algn="r"/>
+            <a:fld id="{F7021451-1387-4CA6-816F-3879F97B5CBC}" type="slidenum">
+              <a:rPr b="0" lang="en-US"/>
+              <a:t>37</a:t>
+            </a:fld>
+            <a:endParaRPr lang="en-US"/>
+          </a:p>
+        </p:txBody>
+      </p:sp>
+    </p:spTree>
+  </p:cSld>
+  <p:clrMapOvr>
+    <a:masterClrMapping/>
+  </p:clrMapOvr>
+</p:sld>
+</file>
+
+<file path=ppt/slides/slide38.xml><?xml version="1.0" encoding="utf-8"?>
+<p:sld xmlns:a="http://schemas.openxmlformats.org/drawingml/2006/main" xmlns:r="http://schemas.openxmlformats.org/officeDocument/2006/relationships" xmlns:p="http://schemas.openxmlformats.org/presentationml/2006/main">
+  <p:cSld name="Slide 38">
+    <p:spTree>
+      <p:nvGrpSpPr>
+        <p:cNvPr id="1" name=""/>
+        <p:cNvGrpSpPr/>
+        <p:nvPr/>
+      </p:nvGrpSpPr>
+      <p:grpSpPr>
+        <a:xfrm>
+          <a:off x="0" y="0"/>
+          <a:ext cx="0" cy="0"/>
+          <a:chOff x="0" y="0"/>
+          <a:chExt cx="0" cy="0"/>
+        </a:xfrm>
+      </p:grpSpPr>
+      <p:sp>
+        <p:nvSpPr>
+          <p:cNvPr id="2" name="Text 0"/>
+          <p:cNvSpPr/>
+          <p:nvPr>
+            <p:ph idx="100" type="title" hasCustomPrompt="1"/>
+          </p:nvPr>
+        </p:nvSpPr>
+        <p:spPr>
+          <a:xfrm>
+            <a:off x="548640" y="320040"/>
+            <a:ext cx="11094415" cy="777240"/>
+          </a:xfrm>
+          <a:prstGeom prst="rect">
+            <a:avLst/>
+          </a:prstGeom>
+          <a:noFill/>
+          <a:ln/>
+        </p:spPr>
+        <p:txBody>
+          <a:bodyPr wrap="square" lIns="0" tIns="0" rIns="0" bIns="0" rtlCol="0" anchor="ctr"/>
+          <a:lstStyle/>
+          <a:p>
+            <a:pPr algn="l" indent="0" marL="0">
+              <a:buNone/>
+            </a:pPr>
+            <a:r>
+              <a:rPr lang="en-US" sz="3000" b="1" dirty="0">
+                <a:solidFill>
+                  <a:schemeClr val="tx2"/>
+                </a:solidFill>
+              </a:rPr>
+              <a:t>Grupu 4: Dadus ba advokasia</a:t>
+            </a:r>
+            <a:endParaRPr lang="en-US" sz="3000" dirty="0"/>
+          </a:p>
+        </p:txBody>
+      </p:sp>
+      <p:sp>
+        <p:nvSpPr>
+          <p:cNvPr id="3" name="tempu"/>
+          <p:cNvSpPr/>
+          <p:nvPr/>
+        </p:nvSpPr>
+        <p:spPr>
+          <a:xfrm>
+            <a:off x="10271455" y="457200"/>
+            <a:ext cx="1371600" cy="384048"/>
+          </a:xfrm>
+          <a:prstGeom prst="roundRect">
+            <a:avLst>
+              <a:gd name="adj" fmla="val 50000"/>
+            </a:avLst>
+          </a:prstGeom>
+          <a:solidFill>
+            <a:schemeClr val="bg2"/>
+          </a:solidFill>
+          <a:ln w="12700">
+            <a:solidFill>
+              <a:schemeClr val="bg2"/>
+            </a:solidFill>
+            <a:prstDash val="solid"/>
+          </a:ln>
+        </p:spPr>
+      </p:sp>
+      <p:sp>
+        <p:nvSpPr>
+          <p:cNvPr id="4" name="Text 2"/>
+          <p:cNvSpPr txBox="1"/>
+          <p:nvPr/>
+        </p:nvSpPr>
+        <p:spPr>
+          <a:xfrm>
+            <a:off x="10271455" y="457200"/>
+            <a:ext cx="1371600" cy="384048"/>
+          </a:xfrm>
+          <a:prstGeom prst="rect">
+            <a:avLst/>
+          </a:prstGeom>
+          <a:noFill/>
+          <a:ln/>
+        </p:spPr>
+        <p:txBody>
+          <a:bodyPr wrap="square" lIns="0" tIns="0" rIns="0" bIns="0" rtlCol="0" anchor="ctr"/>
+          <a:lstStyle/>
+          <a:p>
+            <a:pPr algn="ctr" indent="0" marL="0">
+              <a:buNone/>
+            </a:pPr>
+            <a:r>
+              <a:rPr lang="en-US" sz="1200" b="1" dirty="0">
+                <a:solidFill>
+                  <a:schemeClr val="accent1"/>
+                </a:solidFill>
+              </a:rPr>
+              <a:t>11:52</a:t>
+            </a:r>
+            <a:endParaRPr lang="en-US" sz="1200" dirty="0"/>
+          </a:p>
+        </p:txBody>
+      </p:sp>
+      <p:sp>
+        <p:nvSpPr>
+          <p:cNvPr id="5" name="gr-lado"/>
+          <p:cNvSpPr/>
+          <p:nvPr/>
+        </p:nvSpPr>
+        <p:spPr>
+          <a:xfrm>
+            <a:off x="548640" y="1417320"/>
+            <a:ext cx="2377440" cy="4709160"/>
+          </a:xfrm>
+          <a:prstGeom prst="roundRect">
+            <a:avLst>
+              <a:gd name="adj" fmla="val 4615"/>
+            </a:avLst>
+          </a:prstGeom>
+          <a:solidFill>
+            <a:schemeClr val="accent1"/>
+          </a:solidFill>
+          <a:ln w="12700">
+            <a:solidFill>
+              <a:schemeClr val="accent1"/>
+            </a:solidFill>
+            <a:prstDash val="solid"/>
+          </a:ln>
+        </p:spPr>
+      </p:sp>
+      <p:sp>
+        <p:nvSpPr>
+          <p:cNvPr id="6" name="gr-ik-sirkulu"/>
+          <p:cNvSpPr/>
+          <p:nvPr/>
+        </p:nvSpPr>
+        <p:spPr>
+          <a:xfrm>
+            <a:off x="1005840" y="1920240"/>
+            <a:ext cx="1463040" cy="1463040"/>
+          </a:xfrm>
+          <a:prstGeom prst="ellipse">
+            <a:avLst/>
+          </a:prstGeom>
+          <a:solidFill>
+            <a:schemeClr val="tx2"/>
+          </a:solidFill>
+          <a:ln w="12700">
+            <a:solidFill>
+              <a:schemeClr val="tx2"/>
+            </a:solidFill>
+            <a:prstDash val="solid"/>
+          </a:ln>
+        </p:spPr>
+      </p:sp>
       <p:pic>
         <p:nvPicPr>
-          <p:cNvPr id="13" name="rec-2-ikone" descr="preencoded.png">    </p:cNvPr>
+          <p:cNvPr id="7" name="gr-ik-ikone" descr="preencoded.png">    </p:cNvPr>
           <p:cNvPicPr>
             <a:picLocks noChangeAspect="1"/>
           </p:cNvPicPr>
           <p:nvPr/>
         </p:nvPicPr>
         <p:blipFill>
-          <a:blip r:embed="rId3"/>
+          <a:blip r:embed="rId1"/>
           <a:stretch>
             <a:fillRect/>
           </a:stretch>
         </p:blipFill>
         <p:spPr>
           <a:xfrm>
-            <a:off x="8163763" y="4506163"/>
-            <a:ext cx="451714" cy="451714"/>
+            <a:off x="1356970" y="2271370"/>
+            <a:ext cx="760781" cy="760781"/>
           </a:xfrm>
           <a:prstGeom prst="rect">
             <a:avLst/>
@@ -26566,14 +30359,14 @@
       </p:pic>
       <p:sp>
         <p:nvSpPr>
-          <p:cNvPr id="14" name="Text 9"/>
-          <p:cNvSpPr txBox="1"/>
-          <p:nvPr/>
-        </p:nvSpPr>
-        <p:spPr>
-          <a:xfrm>
-            <a:off x="8961120" y="4370832"/>
-            <a:ext cx="3017520" cy="365760"/>
+          <p:cNvPr id="8" name="Text 5"/>
+          <p:cNvSpPr txBox="1"/>
+          <p:nvPr/>
+        </p:nvSpPr>
+        <p:spPr>
+          <a:xfrm>
+            <a:off x="548640" y="3657600"/>
+            <a:ext cx="2377440" cy="548640"/>
           </a:xfrm>
           <a:prstGeom prst="rect">
             <a:avLst/>
@@ -26585,31 +30378,689 @@
           <a:bodyPr wrap="square" lIns="0" tIns="0" rIns="0" bIns="0" rtlCol="0" anchor="t"/>
           <a:lstStyle/>
           <a:p>
+            <a:pPr algn="ctr" indent="0" marL="0">
+              <a:buNone/>
+            </a:pPr>
+            <a:r>
+              <a:rPr lang="en-US" sz="2600" b="1" dirty="0">
+                <a:solidFill>
+                  <a:schemeClr val="bg1"/>
+                </a:solidFill>
+                <a:latin typeface="Cambria" pitchFamily="34" charset="0"/>
+                <a:ea typeface="Cambria" pitchFamily="34" charset="-122"/>
+                <a:cs typeface="Cambria" pitchFamily="34" charset="-120"/>
+              </a:rPr>
+              <a:t>Grupu 4</a:t>
+            </a:r>
+            <a:endParaRPr lang="en-US" sz="2600" dirty="0"/>
+          </a:p>
+        </p:txBody>
+      </p:sp>
+      <p:sp>
+        <p:nvSpPr>
+          <p:cNvPr id="9" name="Text 6"/>
+          <p:cNvSpPr txBox="1"/>
+          <p:nvPr/>
+        </p:nvSpPr>
+        <p:spPr>
+          <a:xfrm>
+            <a:off x="685800" y="4206240"/>
+            <a:ext cx="2103120" cy="914400"/>
+          </a:xfrm>
+          <a:prstGeom prst="rect">
+            <a:avLst/>
+          </a:prstGeom>
+          <a:noFill/>
+          <a:ln/>
+        </p:spPr>
+        <p:txBody>
+          <a:bodyPr wrap="square" lIns="0" tIns="0" rIns="0" bIns="0" rtlCol="0" anchor="t"/>
+          <a:lstStyle/>
+          <a:p>
+            <a:pPr algn="ctr" indent="0" marL="0">
+              <a:buNone/>
+            </a:pPr>
+            <a:r>
+              <a:rPr lang="en-US" sz="1600" b="1" dirty="0">
+                <a:solidFill>
+                  <a:schemeClr val="bg1"/>
+                </a:solidFill>
+              </a:rPr>
+              <a:t>Dadus ba advokasia</a:t>
+            </a:r>
+            <a:endParaRPr lang="en-US" sz="1600" dirty="0"/>
+          </a:p>
+        </p:txBody>
+      </p:sp>
+      <p:sp>
+        <p:nvSpPr>
+          <p:cNvPr id="10" name="gr-q-0"/>
+          <p:cNvSpPr/>
+          <p:nvPr/>
+        </p:nvSpPr>
+        <p:spPr>
+          <a:xfrm>
+            <a:off x="3154680" y="1417320"/>
+            <a:ext cx="8488375" cy="1463040"/>
+          </a:xfrm>
+          <a:prstGeom prst="roundRect">
+            <a:avLst>
+              <a:gd name="adj" fmla="val 7500"/>
+            </a:avLst>
+          </a:prstGeom>
+          <a:solidFill>
+            <a:schemeClr val="bg2"/>
+          </a:solidFill>
+          <a:ln w="12700">
+            <a:solidFill>
+              <a:schemeClr val="bg2"/>
+            </a:solidFill>
+            <a:prstDash val="solid"/>
+          </a:ln>
+        </p:spPr>
+      </p:sp>
+      <p:sp>
+        <p:nvSpPr>
+          <p:cNvPr id="11" name="gr-n-0"/>
+          <p:cNvSpPr/>
+          <p:nvPr/>
+        </p:nvSpPr>
+        <p:spPr>
+          <a:xfrm>
+            <a:off x="3383280" y="1828800"/>
+            <a:ext cx="640080" cy="640080"/>
+          </a:xfrm>
+          <a:prstGeom prst="ellipse">
+            <a:avLst/>
+          </a:prstGeom>
+          <a:solidFill>
+            <a:schemeClr val="accent1"/>
+          </a:solidFill>
+          <a:ln w="12700">
+            <a:solidFill>
+              <a:schemeClr val="accent1"/>
+            </a:solidFill>
+            <a:prstDash val="solid"/>
+          </a:ln>
+        </p:spPr>
+      </p:sp>
+      <p:sp>
+        <p:nvSpPr>
+          <p:cNvPr id="12" name="gr-n-0-n"/>
+          <p:cNvSpPr txBox="1"/>
+          <p:nvPr/>
+        </p:nvSpPr>
+        <p:spPr>
+          <a:xfrm>
+            <a:off x="3383280" y="1828800"/>
+            <a:ext cx="640080" cy="640080"/>
+          </a:xfrm>
+          <a:prstGeom prst="rect">
+            <a:avLst/>
+          </a:prstGeom>
+          <a:noFill/>
+          <a:ln/>
+        </p:spPr>
+        <p:txBody>
+          <a:bodyPr wrap="square" lIns="0" tIns="0" rIns="0" bIns="0" rtlCol="0" anchor="ctr"/>
+          <a:lstStyle/>
+          <a:p>
+            <a:pPr algn="ctr" indent="0" marL="0">
+              <a:buNone/>
+            </a:pPr>
+            <a:r>
+              <a:rPr lang="en-US" sz="1700" b="1" dirty="0">
+                <a:solidFill>
+                  <a:schemeClr val="bg1"/>
+                </a:solidFill>
+              </a:rPr>
+              <a:t>1</a:t>
+            </a:r>
+            <a:endParaRPr lang="en-US" sz="1700" dirty="0"/>
+          </a:p>
+        </p:txBody>
+      </p:sp>
+      <p:sp>
+        <p:nvSpPr>
+          <p:cNvPr id="13" name="Text 10"/>
+          <p:cNvSpPr txBox="1"/>
+          <p:nvPr/>
+        </p:nvSpPr>
+        <p:spPr>
+          <a:xfrm>
+            <a:off x="4251960" y="1417320"/>
+            <a:ext cx="7162495" cy="1463040"/>
+          </a:xfrm>
+          <a:prstGeom prst="rect">
+            <a:avLst/>
+          </a:prstGeom>
+          <a:noFill/>
+          <a:ln/>
+        </p:spPr>
+        <p:txBody>
+          <a:bodyPr wrap="square" lIns="0" tIns="0" rIns="0" bIns="0" rtlCol="0" anchor="ctr"/>
+          <a:lstStyle/>
+          <a:p>
             <a:pPr indent="0" marL="0">
               <a:buNone/>
             </a:pPr>
             <a:r>
-              <a:rPr lang="en-US" sz="1400" b="1" dirty="0">
+              <a:rPr lang="en-US" sz="1800" b="1" dirty="0">
+                <a:solidFill>
+                  <a:schemeClr val="tx2"/>
+                </a:solidFill>
+              </a:rPr>
+              <a:t>Númeru ida-ne'ebé iha Live Dashboard mak importante liu ba advokasia? Tanba sá?</a:t>
+            </a:r>
+            <a:endParaRPr lang="en-US" sz="1800" dirty="0"/>
+          </a:p>
+        </p:txBody>
+      </p:sp>
+      <p:sp>
+        <p:nvSpPr>
+          <p:cNvPr id="14" name="gr-q-1"/>
+          <p:cNvSpPr/>
+          <p:nvPr/>
+        </p:nvSpPr>
+        <p:spPr>
+          <a:xfrm>
+            <a:off x="3154680" y="3035808"/>
+            <a:ext cx="8488375" cy="1463040"/>
+          </a:xfrm>
+          <a:prstGeom prst="roundRect">
+            <a:avLst>
+              <a:gd name="adj" fmla="val 7500"/>
+            </a:avLst>
+          </a:prstGeom>
+          <a:solidFill>
+            <a:schemeClr val="bg2"/>
+          </a:solidFill>
+          <a:ln w="12700">
+            <a:solidFill>
+              <a:schemeClr val="bg2"/>
+            </a:solidFill>
+            <a:prstDash val="solid"/>
+          </a:ln>
+        </p:spPr>
+      </p:sp>
+      <p:sp>
+        <p:nvSpPr>
+          <p:cNvPr id="15" name="gr-n-1"/>
+          <p:cNvSpPr/>
+          <p:nvPr/>
+        </p:nvSpPr>
+        <p:spPr>
+          <a:xfrm>
+            <a:off x="3383280" y="3447288"/>
+            <a:ext cx="640080" cy="640080"/>
+          </a:xfrm>
+          <a:prstGeom prst="ellipse">
+            <a:avLst/>
+          </a:prstGeom>
+          <a:solidFill>
+            <a:schemeClr val="accent1"/>
+          </a:solidFill>
+          <a:ln w="12700">
+            <a:solidFill>
+              <a:schemeClr val="accent1"/>
+            </a:solidFill>
+            <a:prstDash val="solid"/>
+          </a:ln>
+        </p:spPr>
+      </p:sp>
+      <p:sp>
+        <p:nvSpPr>
+          <p:cNvPr id="16" name="gr-n-1-n"/>
+          <p:cNvSpPr txBox="1"/>
+          <p:nvPr/>
+        </p:nvSpPr>
+        <p:spPr>
+          <a:xfrm>
+            <a:off x="3383280" y="3447288"/>
+            <a:ext cx="640080" cy="640080"/>
+          </a:xfrm>
+          <a:prstGeom prst="rect">
+            <a:avLst/>
+          </a:prstGeom>
+          <a:noFill/>
+          <a:ln/>
+        </p:spPr>
+        <p:txBody>
+          <a:bodyPr wrap="square" lIns="0" tIns="0" rIns="0" bIns="0" rtlCol="0" anchor="ctr"/>
+          <a:lstStyle/>
+          <a:p>
+            <a:pPr algn="ctr" indent="0" marL="0">
+              <a:buNone/>
+            </a:pPr>
+            <a:r>
+              <a:rPr lang="en-US" sz="1700" b="1" dirty="0">
                 <a:solidFill>
                   <a:schemeClr val="bg1"/>
                 </a:solidFill>
               </a:rPr>
-              <a:t>Modulu Python RbR</a:t>
-            </a:r>
-            <a:endParaRPr lang="en-US" sz="1400" dirty="0"/>
-          </a:p>
-        </p:txBody>
-      </p:sp>
-      <p:sp>
-        <p:nvSpPr>
-          <p:cNvPr id="15" name="Text 10"/>
-          <p:cNvSpPr txBox="1"/>
-          <p:nvPr/>
-        </p:nvSpPr>
-        <p:spPr>
-          <a:xfrm>
-            <a:off x="8961120" y="4773168"/>
-            <a:ext cx="3017520" cy="365760"/>
+              <a:t>2</a:t>
+            </a:r>
+            <a:endParaRPr lang="en-US" sz="1700" dirty="0"/>
+          </a:p>
+        </p:txBody>
+      </p:sp>
+      <p:sp>
+        <p:nvSpPr>
+          <p:cNvPr id="17" name="Text 14"/>
+          <p:cNvSpPr txBox="1"/>
+          <p:nvPr/>
+        </p:nvSpPr>
+        <p:spPr>
+          <a:xfrm>
+            <a:off x="4251960" y="3035808"/>
+            <a:ext cx="7162495" cy="1463040"/>
+          </a:xfrm>
+          <a:prstGeom prst="rect">
+            <a:avLst/>
+          </a:prstGeom>
+          <a:noFill/>
+          <a:ln/>
+        </p:spPr>
+        <p:txBody>
+          <a:bodyPr wrap="square" lIns="0" tIns="0" rIns="0" bIns="0" rtlCol="0" anchor="ctr"/>
+          <a:lstStyle/>
+          <a:p>
+            <a:pPr indent="0" marL="0">
+              <a:buNone/>
+            </a:pPr>
+            <a:r>
+              <a:rPr lang="en-US" sz="1800" b="1" dirty="0">
+                <a:solidFill>
+                  <a:schemeClr val="tx2"/>
+                </a:solidFill>
+              </a:rPr>
+              <a:t>Se imi bele husu Python atu konta buat ida, saida mak imi hakarak hatene?</a:t>
+            </a:r>
+            <a:endParaRPr lang="en-US" sz="1800" dirty="0"/>
+          </a:p>
+        </p:txBody>
+      </p:sp>
+      <p:sp>
+        <p:nvSpPr>
+          <p:cNvPr id="18" name="gr-q-2"/>
+          <p:cNvSpPr/>
+          <p:nvPr/>
+        </p:nvSpPr>
+        <p:spPr>
+          <a:xfrm>
+            <a:off x="3154680" y="4654296"/>
+            <a:ext cx="8488375" cy="1463040"/>
+          </a:xfrm>
+          <a:prstGeom prst="roundRect">
+            <a:avLst>
+              <a:gd name="adj" fmla="val 7500"/>
+            </a:avLst>
+          </a:prstGeom>
+          <a:solidFill>
+            <a:schemeClr val="bg2"/>
+          </a:solidFill>
+          <a:ln w="12700">
+            <a:solidFill>
+              <a:schemeClr val="bg2"/>
+            </a:solidFill>
+            <a:prstDash val="solid"/>
+          </a:ln>
+        </p:spPr>
+      </p:sp>
+      <p:sp>
+        <p:nvSpPr>
+          <p:cNvPr id="19" name="gr-n-2"/>
+          <p:cNvSpPr/>
+          <p:nvPr/>
+        </p:nvSpPr>
+        <p:spPr>
+          <a:xfrm>
+            <a:off x="3383280" y="5065776"/>
+            <a:ext cx="640080" cy="640080"/>
+          </a:xfrm>
+          <a:prstGeom prst="ellipse">
+            <a:avLst/>
+          </a:prstGeom>
+          <a:solidFill>
+            <a:schemeClr val="accent1"/>
+          </a:solidFill>
+          <a:ln w="12700">
+            <a:solidFill>
+              <a:schemeClr val="accent1"/>
+            </a:solidFill>
+            <a:prstDash val="solid"/>
+          </a:ln>
+        </p:spPr>
+      </p:sp>
+      <p:sp>
+        <p:nvSpPr>
+          <p:cNvPr id="20" name="gr-n-2-n"/>
+          <p:cNvSpPr txBox="1"/>
+          <p:nvPr/>
+        </p:nvSpPr>
+        <p:spPr>
+          <a:xfrm>
+            <a:off x="3383280" y="5065776"/>
+            <a:ext cx="640080" cy="640080"/>
+          </a:xfrm>
+          <a:prstGeom prst="rect">
+            <a:avLst/>
+          </a:prstGeom>
+          <a:noFill/>
+          <a:ln/>
+        </p:spPr>
+        <p:txBody>
+          <a:bodyPr wrap="square" lIns="0" tIns="0" rIns="0" bIns="0" rtlCol="0" anchor="ctr"/>
+          <a:lstStyle/>
+          <a:p>
+            <a:pPr algn="ctr" indent="0" marL="0">
+              <a:buNone/>
+            </a:pPr>
+            <a:r>
+              <a:rPr lang="en-US" sz="1700" b="1" dirty="0">
+                <a:solidFill>
+                  <a:schemeClr val="bg1"/>
+                </a:solidFill>
+              </a:rPr>
+              <a:t>3</a:t>
+            </a:r>
+            <a:endParaRPr lang="en-US" sz="1700" dirty="0"/>
+          </a:p>
+        </p:txBody>
+      </p:sp>
+      <p:sp>
+        <p:nvSpPr>
+          <p:cNvPr id="21" name="Text 18"/>
+          <p:cNvSpPr txBox="1"/>
+          <p:nvPr/>
+        </p:nvSpPr>
+        <p:spPr>
+          <a:xfrm>
+            <a:off x="4251960" y="4654296"/>
+            <a:ext cx="7162495" cy="1463040"/>
+          </a:xfrm>
+          <a:prstGeom prst="rect">
+            <a:avLst/>
+          </a:prstGeom>
+          <a:noFill/>
+          <a:ln/>
+        </p:spPr>
+        <p:txBody>
+          <a:bodyPr wrap="square" lIns="0" tIns="0" rIns="0" bIns="0" rtlCol="0" anchor="ctr"/>
+          <a:lstStyle/>
+          <a:p>
+            <a:pPr indent="0" marL="0">
+              <a:buNone/>
+            </a:pPr>
+            <a:r>
+              <a:rPr lang="en-US" sz="1800" b="1" dirty="0">
+                <a:solidFill>
+                  <a:schemeClr val="tx2"/>
+                </a:solidFill>
+              </a:rPr>
+              <a:t>Oinsá dadus kazu eviksaun bele ajuda komunidade afetadu duni?</a:t>
+            </a:r>
+            <a:endParaRPr lang="en-US" sz="1800" dirty="0"/>
+          </a:p>
+        </p:txBody>
+      </p:sp>
+      <p:sp>
+        <p:nvSpPr>
+          <p:cNvPr id="25" name="Slide Number Placeholder 0"/>
+          <p:cNvSpPr>
+            <a:spLocks noGrp="1"/>
+          </p:cNvSpPr>
+          <p:nvPr>
+            <p:ph type="sldNum" sz="quarter" idx="4294967295"/>
+          </p:nvPr>
+        </p:nvSpPr>
+        <p:spPr>
+          <a:xfrm>
+            <a:off x="11094415" y="6400800"/>
+            <a:ext cx="548640" cy="274320"/>
+          </a:xfrm>
+          <a:prstGeom prst="rect">
+            <a:avLst/>
+          </a:prstGeom>
+          <a:extLst>
+            <a:ext uri="{C572A759-6A51-4108-AA02-DFA0A04FC94B}">
+              <ma14:wrappingTextBoxFlag xmlns:ma14="http://schemas.microsoft.com/office/mac/drawingml/2011/main" val="0"/>
+            </a:ext>
+          </a:extLst>
+        </p:spPr>
+        <p:txBody>
+          <a:bodyPr/>
+          <a:lstStyle>
+            <a:lvl1pPr>
+              <a:defRPr sz="1000">
+                <a:solidFill>
+                  <a:srgbClr val="5E6B66"/>
+                </a:solidFill>
+              </a:defRPr>
+            </a:lvl1pPr>
+          </a:lstStyle>
+          <a:p>
+            <a:pPr algn="r"/>
+            <a:fld id="{F7021451-1387-4CA6-816F-3879F97B5CBC}" type="slidenum">
+              <a:rPr b="0" lang="en-US"/>
+              <a:t>38</a:t>
+            </a:fld>
+            <a:endParaRPr lang="en-US"/>
+          </a:p>
+        </p:txBody>
+      </p:sp>
+    </p:spTree>
+  </p:cSld>
+  <p:clrMapOvr>
+    <a:masterClrMapping/>
+  </p:clrMapOvr>
+</p:sld>
+</file>
+
+<file path=ppt/slides/slide39.xml><?xml version="1.0" encoding="utf-8"?>
+<p:sld xmlns:a="http://schemas.openxmlformats.org/drawingml/2006/main" xmlns:r="http://schemas.openxmlformats.org/officeDocument/2006/relationships" xmlns:p="http://schemas.openxmlformats.org/presentationml/2006/main">
+  <p:cSld name="Slide 39">
+    <p:spTree>
+      <p:nvGrpSpPr>
+        <p:cNvPr id="1" name=""/>
+        <p:cNvGrpSpPr/>
+        <p:nvPr/>
+      </p:nvGrpSpPr>
+      <p:grpSpPr>
+        <a:xfrm>
+          <a:off x="0" y="0"/>
+          <a:ext cx="0" cy="0"/>
+          <a:chOff x="0" y="0"/>
+          <a:chExt cx="0" cy="0"/>
+        </a:xfrm>
+      </p:grpSpPr>
+      <p:sp>
+        <p:nvSpPr>
+          <p:cNvPr id="2" name="Text 0"/>
+          <p:cNvSpPr/>
+          <p:nvPr>
+            <p:ph idx="100" type="title" hasCustomPrompt="1"/>
+          </p:nvPr>
+        </p:nvSpPr>
+        <p:spPr>
+          <a:xfrm>
+            <a:off x="548640" y="320040"/>
+            <a:ext cx="11094415" cy="777240"/>
+          </a:xfrm>
+          <a:prstGeom prst="rect">
+            <a:avLst/>
+          </a:prstGeom>
+          <a:noFill/>
+          <a:ln/>
+        </p:spPr>
+        <p:txBody>
+          <a:bodyPr wrap="square" lIns="0" tIns="0" rIns="0" bIns="0" rtlCol="0" anchor="ctr"/>
+          <a:lstStyle/>
+          <a:p>
+            <a:pPr algn="l" indent="0" marL="0">
+              <a:buNone/>
+            </a:pPr>
+            <a:r>
+              <a:rPr lang="en-US" sz="3000" b="1" dirty="0">
+                <a:solidFill>
+                  <a:schemeClr val="tx2"/>
+                </a:solidFill>
+              </a:rPr>
+              <a:t>Grupu 5: Futuru no AI</a:t>
+            </a:r>
+            <a:endParaRPr lang="en-US" sz="3000" dirty="0"/>
+          </a:p>
+        </p:txBody>
+      </p:sp>
+      <p:sp>
+        <p:nvSpPr>
+          <p:cNvPr id="3" name="tempu"/>
+          <p:cNvSpPr/>
+          <p:nvPr/>
+        </p:nvSpPr>
+        <p:spPr>
+          <a:xfrm>
+            <a:off x="10271455" y="457200"/>
+            <a:ext cx="1371600" cy="384048"/>
+          </a:xfrm>
+          <a:prstGeom prst="roundRect">
+            <a:avLst>
+              <a:gd name="adj" fmla="val 50000"/>
+            </a:avLst>
+          </a:prstGeom>
+          <a:solidFill>
+            <a:schemeClr val="bg2"/>
+          </a:solidFill>
+          <a:ln w="12700">
+            <a:solidFill>
+              <a:schemeClr val="bg2"/>
+            </a:solidFill>
+            <a:prstDash val="solid"/>
+          </a:ln>
+        </p:spPr>
+      </p:sp>
+      <p:sp>
+        <p:nvSpPr>
+          <p:cNvPr id="4" name="Text 2"/>
+          <p:cNvSpPr txBox="1"/>
+          <p:nvPr/>
+        </p:nvSpPr>
+        <p:spPr>
+          <a:xfrm>
+            <a:off x="10271455" y="457200"/>
+            <a:ext cx="1371600" cy="384048"/>
+          </a:xfrm>
+          <a:prstGeom prst="rect">
+            <a:avLst/>
+          </a:prstGeom>
+          <a:noFill/>
+          <a:ln/>
+        </p:spPr>
+        <p:txBody>
+          <a:bodyPr wrap="square" lIns="0" tIns="0" rIns="0" bIns="0" rtlCol="0" anchor="ctr"/>
+          <a:lstStyle/>
+          <a:p>
+            <a:pPr algn="ctr" indent="0" marL="0">
+              <a:buNone/>
+            </a:pPr>
+            <a:r>
+              <a:rPr lang="en-US" sz="1200" b="1" dirty="0">
+                <a:solidFill>
+                  <a:schemeClr val="accent1"/>
+                </a:solidFill>
+              </a:rPr>
+              <a:t>11:53</a:t>
+            </a:r>
+            <a:endParaRPr lang="en-US" sz="1200" dirty="0"/>
+          </a:p>
+        </p:txBody>
+      </p:sp>
+      <p:sp>
+        <p:nvSpPr>
+          <p:cNvPr id="5" name="gr-lado"/>
+          <p:cNvSpPr/>
+          <p:nvPr/>
+        </p:nvSpPr>
+        <p:spPr>
+          <a:xfrm>
+            <a:off x="548640" y="1417320"/>
+            <a:ext cx="2377440" cy="4709160"/>
+          </a:xfrm>
+          <a:prstGeom prst="roundRect">
+            <a:avLst>
+              <a:gd name="adj" fmla="val 4615"/>
+            </a:avLst>
+          </a:prstGeom>
+          <a:solidFill>
+            <a:schemeClr val="accent4"/>
+          </a:solidFill>
+          <a:ln w="12700">
+            <a:solidFill>
+              <a:schemeClr val="accent4"/>
+            </a:solidFill>
+            <a:prstDash val="solid"/>
+          </a:ln>
+        </p:spPr>
+      </p:sp>
+      <p:sp>
+        <p:nvSpPr>
+          <p:cNvPr id="6" name="gr-ik-sirkulu"/>
+          <p:cNvSpPr/>
+          <p:nvPr/>
+        </p:nvSpPr>
+        <p:spPr>
+          <a:xfrm>
+            <a:off x="1005840" y="1920240"/>
+            <a:ext cx="1463040" cy="1463040"/>
+          </a:xfrm>
+          <a:prstGeom prst="ellipse">
+            <a:avLst/>
+          </a:prstGeom>
+          <a:solidFill>
+            <a:schemeClr val="tx2"/>
+          </a:solidFill>
+          <a:ln w="12700">
+            <a:solidFill>
+              <a:schemeClr val="tx2"/>
+            </a:solidFill>
+            <a:prstDash val="solid"/>
+          </a:ln>
+        </p:spPr>
+      </p:sp>
+      <p:pic>
+        <p:nvPicPr>
+          <p:cNvPr id="7" name="gr-ik-ikone" descr="preencoded.png">    </p:cNvPr>
+          <p:cNvPicPr>
+            <a:picLocks noChangeAspect="1"/>
+          </p:cNvPicPr>
+          <p:nvPr/>
+        </p:nvPicPr>
+        <p:blipFill>
+          <a:blip r:embed="rId1"/>
+          <a:stretch>
+            <a:fillRect/>
+          </a:stretch>
+        </p:blipFill>
+        <p:spPr>
+          <a:xfrm>
+            <a:off x="1356970" y="2271370"/>
+            <a:ext cx="760781" cy="760781"/>
+          </a:xfrm>
+          <a:prstGeom prst="rect">
+            <a:avLst/>
+          </a:prstGeom>
+        </p:spPr>
+      </p:pic>
+      <p:sp>
+        <p:nvSpPr>
+          <p:cNvPr id="8" name="Text 5"/>
+          <p:cNvSpPr txBox="1"/>
+          <p:nvPr/>
+        </p:nvSpPr>
+        <p:spPr>
+          <a:xfrm>
+            <a:off x="548640" y="3657600"/>
+            <a:ext cx="2377440" cy="548640"/>
           </a:xfrm>
           <a:prstGeom prst="rect">
             <a:avLst/>
@@ -26621,18 +31072,474 @@
           <a:bodyPr wrap="square" lIns="0" tIns="0" rIns="0" bIns="0" rtlCol="0" anchor="t"/>
           <a:lstStyle/>
           <a:p>
+            <a:pPr algn="ctr" indent="0" marL="0">
+              <a:buNone/>
+            </a:pPr>
+            <a:r>
+              <a:rPr lang="en-US" sz="2600" b="1" dirty="0">
+                <a:solidFill>
+                  <a:schemeClr val="bg1"/>
+                </a:solidFill>
+                <a:latin typeface="Cambria" pitchFamily="34" charset="0"/>
+                <a:ea typeface="Cambria" pitchFamily="34" charset="-122"/>
+                <a:cs typeface="Cambria" pitchFamily="34" charset="-120"/>
+              </a:rPr>
+              <a:t>Grupu 5</a:t>
+            </a:r>
+            <a:endParaRPr lang="en-US" sz="2600" dirty="0"/>
+          </a:p>
+        </p:txBody>
+      </p:sp>
+      <p:sp>
+        <p:nvSpPr>
+          <p:cNvPr id="9" name="Text 6"/>
+          <p:cNvSpPr txBox="1"/>
+          <p:nvPr/>
+        </p:nvSpPr>
+        <p:spPr>
+          <a:xfrm>
+            <a:off x="685800" y="4206240"/>
+            <a:ext cx="2103120" cy="914400"/>
+          </a:xfrm>
+          <a:prstGeom prst="rect">
+            <a:avLst/>
+          </a:prstGeom>
+          <a:noFill/>
+          <a:ln/>
+        </p:spPr>
+        <p:txBody>
+          <a:bodyPr wrap="square" lIns="0" tIns="0" rIns="0" bIns="0" rtlCol="0" anchor="t"/>
+          <a:lstStyle/>
+          <a:p>
+            <a:pPr algn="ctr" indent="0" marL="0">
+              <a:buNone/>
+            </a:pPr>
+            <a:r>
+              <a:rPr lang="en-US" sz="1600" b="1" dirty="0">
+                <a:solidFill>
+                  <a:schemeClr val="bg1"/>
+                </a:solidFill>
+              </a:rPr>
+              <a:t>Futuru no AI</a:t>
+            </a:r>
+            <a:endParaRPr lang="en-US" sz="1600" dirty="0"/>
+          </a:p>
+        </p:txBody>
+      </p:sp>
+      <p:sp>
+        <p:nvSpPr>
+          <p:cNvPr id="10" name="gr-q-0"/>
+          <p:cNvSpPr/>
+          <p:nvPr/>
+        </p:nvSpPr>
+        <p:spPr>
+          <a:xfrm>
+            <a:off x="3154680" y="1417320"/>
+            <a:ext cx="8488375" cy="1463040"/>
+          </a:xfrm>
+          <a:prstGeom prst="roundRect">
+            <a:avLst>
+              <a:gd name="adj" fmla="val 7500"/>
+            </a:avLst>
+          </a:prstGeom>
+          <a:solidFill>
+            <a:schemeClr val="bg2"/>
+          </a:solidFill>
+          <a:ln w="12700">
+            <a:solidFill>
+              <a:schemeClr val="bg2"/>
+            </a:solidFill>
+            <a:prstDash val="solid"/>
+          </a:ln>
+        </p:spPr>
+      </p:sp>
+      <p:sp>
+        <p:nvSpPr>
+          <p:cNvPr id="11" name="gr-n-0"/>
+          <p:cNvSpPr/>
+          <p:nvPr/>
+        </p:nvSpPr>
+        <p:spPr>
+          <a:xfrm>
+            <a:off x="3383280" y="1828800"/>
+            <a:ext cx="640080" cy="640080"/>
+          </a:xfrm>
+          <a:prstGeom prst="ellipse">
+            <a:avLst/>
+          </a:prstGeom>
+          <a:solidFill>
+            <a:schemeClr val="accent4"/>
+          </a:solidFill>
+          <a:ln w="12700">
+            <a:solidFill>
+              <a:schemeClr val="accent4"/>
+            </a:solidFill>
+            <a:prstDash val="solid"/>
+          </a:ln>
+        </p:spPr>
+      </p:sp>
+      <p:sp>
+        <p:nvSpPr>
+          <p:cNvPr id="12" name="gr-n-0-n"/>
+          <p:cNvSpPr txBox="1"/>
+          <p:nvPr/>
+        </p:nvSpPr>
+        <p:spPr>
+          <a:xfrm>
+            <a:off x="3383280" y="1828800"/>
+            <a:ext cx="640080" cy="640080"/>
+          </a:xfrm>
+          <a:prstGeom prst="rect">
+            <a:avLst/>
+          </a:prstGeom>
+          <a:noFill/>
+          <a:ln/>
+        </p:spPr>
+        <p:txBody>
+          <a:bodyPr wrap="square" lIns="0" tIns="0" rIns="0" bIns="0" rtlCol="0" anchor="ctr"/>
+          <a:lstStyle/>
+          <a:p>
+            <a:pPr algn="ctr" indent="0" marL="0">
+              <a:buNone/>
+            </a:pPr>
+            <a:r>
+              <a:rPr lang="en-US" sz="1700" b="1" dirty="0">
+                <a:solidFill>
+                  <a:schemeClr val="bg1"/>
+                </a:solidFill>
+              </a:rPr>
+              <a:t>1</a:t>
+            </a:r>
+            <a:endParaRPr lang="en-US" sz="1700" dirty="0"/>
+          </a:p>
+        </p:txBody>
+      </p:sp>
+      <p:sp>
+        <p:nvSpPr>
+          <p:cNvPr id="13" name="Text 10"/>
+          <p:cNvSpPr txBox="1"/>
+          <p:nvPr/>
+        </p:nvSpPr>
+        <p:spPr>
+          <a:xfrm>
+            <a:off x="4251960" y="1417320"/>
+            <a:ext cx="7162495" cy="1463040"/>
+          </a:xfrm>
+          <a:prstGeom prst="rect">
+            <a:avLst/>
+          </a:prstGeom>
+          <a:noFill/>
+          <a:ln/>
+        </p:spPr>
+        <p:txBody>
+          <a:bodyPr wrap="square" lIns="0" tIns="0" rIns="0" bIns="0" rtlCol="0" anchor="ctr"/>
+          <a:lstStyle/>
+          <a:p>
             <a:pPr indent="0" marL="0">
               <a:buNone/>
             </a:pPr>
             <a:r>
-              <a:rPr lang="en-US" sz="1300" dirty="0">
-                <a:solidFill>
-                  <a:schemeClr val="bg2"/>
-                </a:solidFill>
-              </a:rPr>
-              <a:t>Word / PDF ba partisipante</a:t>
-            </a:r>
-            <a:endParaRPr lang="en-US" sz="1300" dirty="0"/>
+              <a:rPr lang="en-US" sz="1800" b="1" dirty="0">
+                <a:solidFill>
+                  <a:schemeClr val="tx2"/>
+                </a:solidFill>
+              </a:rPr>
+              <a:t>Se RbR iha ajente AI, servisu ida-ne'ebé imi hakarak AI ajuda?</a:t>
+            </a:r>
+            <a:endParaRPr lang="en-US" sz="1800" dirty="0"/>
+          </a:p>
+        </p:txBody>
+      </p:sp>
+      <p:sp>
+        <p:nvSpPr>
+          <p:cNvPr id="14" name="gr-q-1"/>
+          <p:cNvSpPr/>
+          <p:nvPr/>
+        </p:nvSpPr>
+        <p:spPr>
+          <a:xfrm>
+            <a:off x="3154680" y="3035808"/>
+            <a:ext cx="8488375" cy="1463040"/>
+          </a:xfrm>
+          <a:prstGeom prst="roundRect">
+            <a:avLst>
+              <a:gd name="adj" fmla="val 7500"/>
+            </a:avLst>
+          </a:prstGeom>
+          <a:solidFill>
+            <a:schemeClr val="bg2"/>
+          </a:solidFill>
+          <a:ln w="12700">
+            <a:solidFill>
+              <a:schemeClr val="bg2"/>
+            </a:solidFill>
+            <a:prstDash val="solid"/>
+          </a:ln>
+        </p:spPr>
+      </p:sp>
+      <p:sp>
+        <p:nvSpPr>
+          <p:cNvPr id="15" name="gr-n-1"/>
+          <p:cNvSpPr/>
+          <p:nvPr/>
+        </p:nvSpPr>
+        <p:spPr>
+          <a:xfrm>
+            <a:off x="3383280" y="3447288"/>
+            <a:ext cx="640080" cy="640080"/>
+          </a:xfrm>
+          <a:prstGeom prst="ellipse">
+            <a:avLst/>
+          </a:prstGeom>
+          <a:solidFill>
+            <a:schemeClr val="accent4"/>
+          </a:solidFill>
+          <a:ln w="12700">
+            <a:solidFill>
+              <a:schemeClr val="accent4"/>
+            </a:solidFill>
+            <a:prstDash val="solid"/>
+          </a:ln>
+        </p:spPr>
+      </p:sp>
+      <p:sp>
+        <p:nvSpPr>
+          <p:cNvPr id="16" name="gr-n-1-n"/>
+          <p:cNvSpPr txBox="1"/>
+          <p:nvPr/>
+        </p:nvSpPr>
+        <p:spPr>
+          <a:xfrm>
+            <a:off x="3383280" y="3447288"/>
+            <a:ext cx="640080" cy="640080"/>
+          </a:xfrm>
+          <a:prstGeom prst="rect">
+            <a:avLst/>
+          </a:prstGeom>
+          <a:noFill/>
+          <a:ln/>
+        </p:spPr>
+        <p:txBody>
+          <a:bodyPr wrap="square" lIns="0" tIns="0" rIns="0" bIns="0" rtlCol="0" anchor="ctr"/>
+          <a:lstStyle/>
+          <a:p>
+            <a:pPr algn="ctr" indent="0" marL="0">
+              <a:buNone/>
+            </a:pPr>
+            <a:r>
+              <a:rPr lang="en-US" sz="1700" b="1" dirty="0">
+                <a:solidFill>
+                  <a:schemeClr val="bg1"/>
+                </a:solidFill>
+              </a:rPr>
+              <a:t>2</a:t>
+            </a:r>
+            <a:endParaRPr lang="en-US" sz="1700" dirty="0"/>
+          </a:p>
+        </p:txBody>
+      </p:sp>
+      <p:sp>
+        <p:nvSpPr>
+          <p:cNvPr id="17" name="Text 14"/>
+          <p:cNvSpPr txBox="1"/>
+          <p:nvPr/>
+        </p:nvSpPr>
+        <p:spPr>
+          <a:xfrm>
+            <a:off x="4251960" y="3035808"/>
+            <a:ext cx="7162495" cy="1463040"/>
+          </a:xfrm>
+          <a:prstGeom prst="rect">
+            <a:avLst/>
+          </a:prstGeom>
+          <a:noFill/>
+          <a:ln/>
+        </p:spPr>
+        <p:txBody>
+          <a:bodyPr wrap="square" lIns="0" tIns="0" rIns="0" bIns="0" rtlCol="0" anchor="ctr"/>
+          <a:lstStyle/>
+          <a:p>
+            <a:pPr indent="0" marL="0">
+              <a:buNone/>
+            </a:pPr>
+            <a:r>
+              <a:rPr lang="en-US" sz="1800" b="1" dirty="0">
+                <a:solidFill>
+                  <a:schemeClr val="tx2"/>
+                </a:solidFill>
+              </a:rPr>
+              <a:t>Servisu saida mak AI LABELE halo no tenke ema mak halo?</a:t>
+            </a:r>
+            <a:endParaRPr lang="en-US" sz="1800" dirty="0"/>
+          </a:p>
+        </p:txBody>
+      </p:sp>
+      <p:sp>
+        <p:nvSpPr>
+          <p:cNvPr id="18" name="gr-q-2"/>
+          <p:cNvSpPr/>
+          <p:nvPr/>
+        </p:nvSpPr>
+        <p:spPr>
+          <a:xfrm>
+            <a:off x="3154680" y="4654296"/>
+            <a:ext cx="8488375" cy="1463040"/>
+          </a:xfrm>
+          <a:prstGeom prst="roundRect">
+            <a:avLst>
+              <a:gd name="adj" fmla="val 7500"/>
+            </a:avLst>
+          </a:prstGeom>
+          <a:solidFill>
+            <a:schemeClr val="bg2"/>
+          </a:solidFill>
+          <a:ln w="12700">
+            <a:solidFill>
+              <a:schemeClr val="bg2"/>
+            </a:solidFill>
+            <a:prstDash val="solid"/>
+          </a:ln>
+        </p:spPr>
+      </p:sp>
+      <p:sp>
+        <p:nvSpPr>
+          <p:cNvPr id="19" name="gr-n-2"/>
+          <p:cNvSpPr/>
+          <p:nvPr/>
+        </p:nvSpPr>
+        <p:spPr>
+          <a:xfrm>
+            <a:off x="3383280" y="5065776"/>
+            <a:ext cx="640080" cy="640080"/>
+          </a:xfrm>
+          <a:prstGeom prst="ellipse">
+            <a:avLst/>
+          </a:prstGeom>
+          <a:solidFill>
+            <a:schemeClr val="accent4"/>
+          </a:solidFill>
+          <a:ln w="12700">
+            <a:solidFill>
+              <a:schemeClr val="accent4"/>
+            </a:solidFill>
+            <a:prstDash val="solid"/>
+          </a:ln>
+        </p:spPr>
+      </p:sp>
+      <p:sp>
+        <p:nvSpPr>
+          <p:cNvPr id="20" name="gr-n-2-n"/>
+          <p:cNvSpPr txBox="1"/>
+          <p:nvPr/>
+        </p:nvSpPr>
+        <p:spPr>
+          <a:xfrm>
+            <a:off x="3383280" y="5065776"/>
+            <a:ext cx="640080" cy="640080"/>
+          </a:xfrm>
+          <a:prstGeom prst="rect">
+            <a:avLst/>
+          </a:prstGeom>
+          <a:noFill/>
+          <a:ln/>
+        </p:spPr>
+        <p:txBody>
+          <a:bodyPr wrap="square" lIns="0" tIns="0" rIns="0" bIns="0" rtlCol="0" anchor="ctr"/>
+          <a:lstStyle/>
+          <a:p>
+            <a:pPr algn="ctr" indent="0" marL="0">
+              <a:buNone/>
+            </a:pPr>
+            <a:r>
+              <a:rPr lang="en-US" sz="1700" b="1" dirty="0">
+                <a:solidFill>
+                  <a:schemeClr val="bg1"/>
+                </a:solidFill>
+              </a:rPr>
+              <a:t>3</a:t>
+            </a:r>
+            <a:endParaRPr lang="en-US" sz="1700" dirty="0"/>
+          </a:p>
+        </p:txBody>
+      </p:sp>
+      <p:sp>
+        <p:nvSpPr>
+          <p:cNvPr id="21" name="Text 18"/>
+          <p:cNvSpPr txBox="1"/>
+          <p:nvPr/>
+        </p:nvSpPr>
+        <p:spPr>
+          <a:xfrm>
+            <a:off x="4251960" y="4654296"/>
+            <a:ext cx="7162495" cy="1463040"/>
+          </a:xfrm>
+          <a:prstGeom prst="rect">
+            <a:avLst/>
+          </a:prstGeom>
+          <a:noFill/>
+          <a:ln/>
+        </p:spPr>
+        <p:txBody>
+          <a:bodyPr wrap="square" lIns="0" tIns="0" rIns="0" bIns="0" rtlCol="0" anchor="ctr"/>
+          <a:lstStyle/>
+          <a:p>
+            <a:pPr indent="0" marL="0">
+              <a:buNone/>
+            </a:pPr>
+            <a:r>
+              <a:rPr lang="en-US" sz="1800" b="1" dirty="0">
+                <a:solidFill>
+                  <a:schemeClr val="tx2"/>
+                </a:solidFill>
+              </a:rPr>
+              <a:t>Dadus komunidade sensível: regra saida mak tenke iha bainhira uza AI?</a:t>
+            </a:r>
+            <a:endParaRPr lang="en-US" sz="1800" dirty="0"/>
+          </a:p>
+        </p:txBody>
+      </p:sp>
+      <p:sp>
+        <p:nvSpPr>
+          <p:cNvPr id="25" name="Slide Number Placeholder 0"/>
+          <p:cNvSpPr>
+            <a:spLocks noGrp="1"/>
+          </p:cNvSpPr>
+          <p:nvPr>
+            <p:ph type="sldNum" sz="quarter" idx="4294967295"/>
+          </p:nvPr>
+        </p:nvSpPr>
+        <p:spPr>
+          <a:xfrm>
+            <a:off x="11094415" y="6400800"/>
+            <a:ext cx="548640" cy="274320"/>
+          </a:xfrm>
+          <a:prstGeom prst="rect">
+            <a:avLst/>
+          </a:prstGeom>
+          <a:extLst>
+            <a:ext uri="{C572A759-6A51-4108-AA02-DFA0A04FC94B}">
+              <ma14:wrappingTextBoxFlag xmlns:ma14="http://schemas.microsoft.com/office/mac/drawingml/2011/main" val="0"/>
+            </a:ext>
+          </a:extLst>
+        </p:spPr>
+        <p:txBody>
+          <a:bodyPr/>
+          <a:lstStyle>
+            <a:lvl1pPr>
+              <a:defRPr sz="1000">
+                <a:solidFill>
+                  <a:srgbClr val="5E6B66"/>
+                </a:solidFill>
+              </a:defRPr>
+            </a:lvl1pPr>
+          </a:lstStyle>
+          <a:p>
+            <a:pPr algn="r"/>
+            <a:fld id="{F7021451-1387-4CA6-816F-3879F97B5CBC}" type="slidenum">
+              <a:rPr b="0" lang="en-US"/>
+              <a:t>39</a:t>
+            </a:fld>
+            <a:endParaRPr lang="en-US"/>
           </a:p>
         </p:txBody>
       </p:sp>
@@ -27940,7 +32847,7 @@
                   <a:schemeClr val="tx2"/>
                 </a:solidFill>
               </a:rPr>
-              <a:t>Perguntas no resposta</a:t>
+              <a:t>Diskusaun grupu no perguntas</a:t>
             </a:r>
             <a:endParaRPr lang="en-US" sz="1700" dirty="0"/>
           </a:p>
@@ -27976,7 +32883,7 @@
                   <a:schemeClr val="tx1"/>
                 </a:solidFill>
               </a:rPr>
-              <a:t>To'o 12:00</a:t>
+              <a:t>Grupu 5 · aprezenta · to'o 12:00</a:t>
             </a:r>
             <a:endParaRPr lang="en-US" sz="1500" dirty="0"/>
           </a:p>
@@ -28024,6 +32931,1615 @@
               <a:t>4</a:t>
             </a:fld>
             <a:endParaRPr lang="en-US"/>
+          </a:p>
+        </p:txBody>
+      </p:sp>
+    </p:spTree>
+  </p:cSld>
+  <p:clrMapOvr>
+    <a:masterClrMapping/>
+  </p:clrMapOvr>
+</p:sld>
+</file>
+
+<file path=ppt/slides/slide40.xml><?xml version="1.0" encoding="utf-8"?>
+<p:sld xmlns:a="http://schemas.openxmlformats.org/drawingml/2006/main" xmlns:r="http://schemas.openxmlformats.org/officeDocument/2006/relationships" xmlns:p="http://schemas.openxmlformats.org/presentationml/2006/main">
+  <p:cSld name="Slide 40">
+    <p:spTree>
+      <p:nvGrpSpPr>
+        <p:cNvPr id="1" name=""/>
+        <p:cNvGrpSpPr/>
+        <p:nvPr/>
+      </p:nvGrpSpPr>
+      <p:grpSpPr>
+        <a:xfrm>
+          <a:off x="0" y="0"/>
+          <a:ext cx="0" cy="0"/>
+          <a:chOff x="0" y="0"/>
+          <a:chExt cx="0" cy="0"/>
+        </a:xfrm>
+      </p:grpSpPr>
+      <p:sp>
+        <p:nvSpPr>
+          <p:cNvPr id="2" name="Text 0"/>
+          <p:cNvSpPr/>
+          <p:nvPr>
+            <p:ph idx="100" type="title" hasCustomPrompt="1"/>
+          </p:nvPr>
+        </p:nvSpPr>
+        <p:spPr>
+          <a:xfrm>
+            <a:off x="548640" y="320040"/>
+            <a:ext cx="11094415" cy="777240"/>
+          </a:xfrm>
+          <a:prstGeom prst="rect">
+            <a:avLst/>
+          </a:prstGeom>
+          <a:noFill/>
+          <a:ln/>
+        </p:spPr>
+        <p:txBody>
+          <a:bodyPr wrap="square" lIns="0" tIns="0" rIns="0" bIns="0" rtlCol="0" anchor="ctr"/>
+          <a:lstStyle/>
+          <a:p>
+            <a:pPr algn="l" indent="0" marL="0">
+              <a:buNone/>
+            </a:pPr>
+            <a:r>
+              <a:rPr lang="en-US" sz="3000" b="1" dirty="0">
+                <a:solidFill>
+                  <a:schemeClr val="tx2"/>
+                </a:solidFill>
+              </a:rPr>
+              <a:t>Perguntas ne'ebé ema husu beibeik</a:t>
+            </a:r>
+            <a:endParaRPr lang="en-US" sz="3000" dirty="0"/>
+          </a:p>
+        </p:txBody>
+      </p:sp>
+      <p:sp>
+        <p:nvSpPr>
+          <p:cNvPr id="3" name="tempu"/>
+          <p:cNvSpPr/>
+          <p:nvPr/>
+        </p:nvSpPr>
+        <p:spPr>
+          <a:xfrm>
+            <a:off x="10271455" y="457200"/>
+            <a:ext cx="1371600" cy="384048"/>
+          </a:xfrm>
+          <a:prstGeom prst="roundRect">
+            <a:avLst>
+              <a:gd name="adj" fmla="val 50000"/>
+            </a:avLst>
+          </a:prstGeom>
+          <a:solidFill>
+            <a:schemeClr val="bg2"/>
+          </a:solidFill>
+          <a:ln w="12700">
+            <a:solidFill>
+              <a:schemeClr val="bg2"/>
+            </a:solidFill>
+            <a:prstDash val="solid"/>
+          </a:ln>
+        </p:spPr>
+      </p:sp>
+      <p:sp>
+        <p:nvSpPr>
+          <p:cNvPr id="4" name="Text 2"/>
+          <p:cNvSpPr txBox="1"/>
+          <p:nvPr/>
+        </p:nvSpPr>
+        <p:spPr>
+          <a:xfrm>
+            <a:off x="10271455" y="457200"/>
+            <a:ext cx="1371600" cy="384048"/>
+          </a:xfrm>
+          <a:prstGeom prst="rect">
+            <a:avLst/>
+          </a:prstGeom>
+          <a:noFill/>
+          <a:ln/>
+        </p:spPr>
+        <p:txBody>
+          <a:bodyPr wrap="square" lIns="0" tIns="0" rIns="0" bIns="0" rtlCol="0" anchor="ctr"/>
+          <a:lstStyle/>
+          <a:p>
+            <a:pPr algn="ctr" indent="0" marL="0">
+              <a:buNone/>
+            </a:pPr>
+            <a:r>
+              <a:rPr lang="en-US" sz="1200" b="1" dirty="0">
+                <a:solidFill>
+                  <a:schemeClr val="accent1"/>
+                </a:solidFill>
+              </a:rPr>
+              <a:t>11:55</a:t>
+            </a:r>
+            <a:endParaRPr lang="en-US" sz="1200" dirty="0"/>
+          </a:p>
+        </p:txBody>
+      </p:sp>
+      <p:sp>
+        <p:nvSpPr>
+          <p:cNvPr id="5" name="q-0"/>
+          <p:cNvSpPr/>
+          <p:nvPr/>
+        </p:nvSpPr>
+        <p:spPr>
+          <a:xfrm>
+            <a:off x="548640" y="1417320"/>
+            <a:ext cx="5410048" cy="1417320"/>
+          </a:xfrm>
+          <a:prstGeom prst="roundRect">
+            <a:avLst>
+              <a:gd name="adj" fmla="val 7742"/>
+            </a:avLst>
+          </a:prstGeom>
+          <a:solidFill>
+            <a:schemeClr val="bg2"/>
+          </a:solidFill>
+          <a:ln w="12700">
+            <a:solidFill>
+              <a:schemeClr val="bg2"/>
+            </a:solidFill>
+            <a:prstDash val="solid"/>
+          </a:ln>
+        </p:spPr>
+      </p:sp>
+      <p:sp>
+        <p:nvSpPr>
+          <p:cNvPr id="6" name="q-n-0"/>
+          <p:cNvSpPr/>
+          <p:nvPr/>
+        </p:nvSpPr>
+        <p:spPr>
+          <a:xfrm>
+            <a:off x="777240" y="1801368"/>
+            <a:ext cx="640080" cy="640080"/>
+          </a:xfrm>
+          <a:prstGeom prst="ellipse">
+            <a:avLst/>
+          </a:prstGeom>
+          <a:solidFill>
+            <a:schemeClr val="accent1"/>
+          </a:solidFill>
+          <a:ln w="12700">
+            <a:solidFill>
+              <a:schemeClr val="accent1"/>
+            </a:solidFill>
+            <a:prstDash val="solid"/>
+          </a:ln>
+        </p:spPr>
+      </p:sp>
+      <p:sp>
+        <p:nvSpPr>
+          <p:cNvPr id="7" name="q-n-0-n"/>
+          <p:cNvSpPr txBox="1"/>
+          <p:nvPr/>
+        </p:nvSpPr>
+        <p:spPr>
+          <a:xfrm>
+            <a:off x="777240" y="1801368"/>
+            <a:ext cx="640080" cy="640080"/>
+          </a:xfrm>
+          <a:prstGeom prst="rect">
+            <a:avLst/>
+          </a:prstGeom>
+          <a:noFill/>
+          <a:ln/>
+        </p:spPr>
+        <p:txBody>
+          <a:bodyPr wrap="square" lIns="0" tIns="0" rIns="0" bIns="0" rtlCol="0" anchor="ctr"/>
+          <a:lstStyle/>
+          <a:p>
+            <a:pPr algn="ctr" indent="0" marL="0">
+              <a:buNone/>
+            </a:pPr>
+            <a:r>
+              <a:rPr lang="en-US" sz="1700" b="1" dirty="0">
+                <a:solidFill>
+                  <a:schemeClr val="bg1"/>
+                </a:solidFill>
+              </a:rPr>
+              <a:t>?</a:t>
+            </a:r>
+            <a:endParaRPr lang="en-US" sz="1700" dirty="0"/>
+          </a:p>
+        </p:txBody>
+      </p:sp>
+      <p:sp>
+        <p:nvSpPr>
+          <p:cNvPr id="8" name="Text 6"/>
+          <p:cNvSpPr txBox="1"/>
+          <p:nvPr/>
+        </p:nvSpPr>
+        <p:spPr>
+          <a:xfrm>
+            <a:off x="1600200" y="1554480"/>
+            <a:ext cx="4175608" cy="457200"/>
+          </a:xfrm>
+          <a:prstGeom prst="rect">
+            <a:avLst/>
+          </a:prstGeom>
+          <a:noFill/>
+          <a:ln/>
+        </p:spPr>
+        <p:txBody>
+          <a:bodyPr wrap="square" lIns="0" tIns="0" rIns="0" bIns="0" rtlCol="0" anchor="t"/>
+          <a:lstStyle/>
+          <a:p>
+            <a:pPr indent="0" marL="0">
+              <a:buNone/>
+            </a:pPr>
+            <a:r>
+              <a:rPr lang="en-US" sz="1600" b="1" dirty="0">
+                <a:solidFill>
+                  <a:schemeClr val="tx2"/>
+                </a:solidFill>
+              </a:rPr>
+              <a:t>Ha'u la'ós ema IT. Bele aprende?</a:t>
+            </a:r>
+            <a:endParaRPr lang="en-US" sz="1600" dirty="0"/>
+          </a:p>
+        </p:txBody>
+      </p:sp>
+      <p:sp>
+        <p:nvSpPr>
+          <p:cNvPr id="9" name="Text 7"/>
+          <p:cNvSpPr txBox="1"/>
+          <p:nvPr/>
+        </p:nvSpPr>
+        <p:spPr>
+          <a:xfrm>
+            <a:off x="1600200" y="2011680"/>
+            <a:ext cx="4175608" cy="731520"/>
+          </a:xfrm>
+          <a:prstGeom prst="rect">
+            <a:avLst/>
+          </a:prstGeom>
+          <a:noFill/>
+          <a:ln/>
+        </p:spPr>
+        <p:txBody>
+          <a:bodyPr wrap="square" lIns="0" tIns="0" rIns="0" bIns="0" rtlCol="0" anchor="t"/>
+          <a:lstStyle/>
+          <a:p>
+            <a:pPr indent="0" marL="0">
+              <a:buNone/>
+            </a:pPr>
+            <a:r>
+              <a:rPr lang="en-US" sz="1400" dirty="0">
+                <a:solidFill>
+                  <a:schemeClr val="tx1"/>
+                </a:solidFill>
+              </a:rPr>
+              <a:t>Sin. Python lian dahuluk ba ema hahú; presiza minutu 15 loron-loron.</a:t>
+            </a:r>
+            <a:endParaRPr lang="en-US" sz="1400" dirty="0"/>
+          </a:p>
+        </p:txBody>
+      </p:sp>
+      <p:sp>
+        <p:nvSpPr>
+          <p:cNvPr id="10" name="q-1"/>
+          <p:cNvSpPr/>
+          <p:nvPr/>
+        </p:nvSpPr>
+        <p:spPr>
+          <a:xfrm>
+            <a:off x="6233008" y="1417320"/>
+            <a:ext cx="5410048" cy="1417320"/>
+          </a:xfrm>
+          <a:prstGeom prst="roundRect">
+            <a:avLst>
+              <a:gd name="adj" fmla="val 7742"/>
+            </a:avLst>
+          </a:prstGeom>
+          <a:solidFill>
+            <a:schemeClr val="bg2"/>
+          </a:solidFill>
+          <a:ln w="12700">
+            <a:solidFill>
+              <a:schemeClr val="bg2"/>
+            </a:solidFill>
+            <a:prstDash val="solid"/>
+          </a:ln>
+        </p:spPr>
+      </p:sp>
+      <p:sp>
+        <p:nvSpPr>
+          <p:cNvPr id="11" name="q-n-1"/>
+          <p:cNvSpPr/>
+          <p:nvPr/>
+        </p:nvSpPr>
+        <p:spPr>
+          <a:xfrm>
+            <a:off x="6461608" y="1801368"/>
+            <a:ext cx="640080" cy="640080"/>
+          </a:xfrm>
+          <a:prstGeom prst="ellipse">
+            <a:avLst/>
+          </a:prstGeom>
+          <a:solidFill>
+            <a:schemeClr val="accent5"/>
+          </a:solidFill>
+          <a:ln w="12700">
+            <a:solidFill>
+              <a:schemeClr val="accent5"/>
+            </a:solidFill>
+            <a:prstDash val="solid"/>
+          </a:ln>
+        </p:spPr>
+      </p:sp>
+      <p:sp>
+        <p:nvSpPr>
+          <p:cNvPr id="12" name="q-n-1-n"/>
+          <p:cNvSpPr txBox="1"/>
+          <p:nvPr/>
+        </p:nvSpPr>
+        <p:spPr>
+          <a:xfrm>
+            <a:off x="6461608" y="1801368"/>
+            <a:ext cx="640080" cy="640080"/>
+          </a:xfrm>
+          <a:prstGeom prst="rect">
+            <a:avLst/>
+          </a:prstGeom>
+          <a:noFill/>
+          <a:ln/>
+        </p:spPr>
+        <p:txBody>
+          <a:bodyPr wrap="square" lIns="0" tIns="0" rIns="0" bIns="0" rtlCol="0" anchor="ctr"/>
+          <a:lstStyle/>
+          <a:p>
+            <a:pPr algn="ctr" indent="0" marL="0">
+              <a:buNone/>
+            </a:pPr>
+            <a:r>
+              <a:rPr lang="en-US" sz="1700" b="1" dirty="0">
+                <a:solidFill>
+                  <a:schemeClr val="bg1"/>
+                </a:solidFill>
+              </a:rPr>
+              <a:t>?</a:t>
+            </a:r>
+            <a:endParaRPr lang="en-US" sz="1700" dirty="0"/>
+          </a:p>
+        </p:txBody>
+      </p:sp>
+      <p:sp>
+        <p:nvSpPr>
+          <p:cNvPr id="13" name="Text 11"/>
+          <p:cNvSpPr txBox="1"/>
+          <p:nvPr/>
+        </p:nvSpPr>
+        <p:spPr>
+          <a:xfrm>
+            <a:off x="7284568" y="1554480"/>
+            <a:ext cx="4175608" cy="457200"/>
+          </a:xfrm>
+          <a:prstGeom prst="rect">
+            <a:avLst/>
+          </a:prstGeom>
+          <a:noFill/>
+          <a:ln/>
+        </p:spPr>
+        <p:txBody>
+          <a:bodyPr wrap="square" lIns="0" tIns="0" rIns="0" bIns="0" rtlCol="0" anchor="t"/>
+          <a:lstStyle/>
+          <a:p>
+            <a:pPr indent="0" marL="0">
+              <a:buNone/>
+            </a:pPr>
+            <a:r>
+              <a:rPr lang="en-US" sz="1600" b="1" dirty="0">
+                <a:solidFill>
+                  <a:schemeClr val="tx2"/>
+                </a:solidFill>
+              </a:rPr>
+              <a:t>Ha'u presiza matenek matemátika?</a:t>
+            </a:r>
+            <a:endParaRPr lang="en-US" sz="1600" dirty="0"/>
+          </a:p>
+        </p:txBody>
+      </p:sp>
+      <p:sp>
+        <p:nvSpPr>
+          <p:cNvPr id="14" name="Text 12"/>
+          <p:cNvSpPr txBox="1"/>
+          <p:nvPr/>
+        </p:nvSpPr>
+        <p:spPr>
+          <a:xfrm>
+            <a:off x="7284568" y="2011680"/>
+            <a:ext cx="4175608" cy="731520"/>
+          </a:xfrm>
+          <a:prstGeom prst="rect">
+            <a:avLst/>
+          </a:prstGeom>
+          <a:noFill/>
+          <a:ln/>
+        </p:spPr>
+        <p:txBody>
+          <a:bodyPr wrap="square" lIns="0" tIns="0" rIns="0" bIns="0" rtlCol="0" anchor="t"/>
+          <a:lstStyle/>
+          <a:p>
+            <a:pPr indent="0" marL="0">
+              <a:buNone/>
+            </a:pPr>
+            <a:r>
+              <a:rPr lang="en-US" sz="1400" dirty="0">
+                <a:solidFill>
+                  <a:schemeClr val="tx1"/>
+                </a:solidFill>
+              </a:rPr>
+              <a:t>Lae. Ba dadus kazu presiza lójika simples: soma, konta, kompara.</a:t>
+            </a:r>
+            <a:endParaRPr lang="en-US" sz="1400" dirty="0"/>
+          </a:p>
+        </p:txBody>
+      </p:sp>
+      <p:sp>
+        <p:nvSpPr>
+          <p:cNvPr id="15" name="q-2"/>
+          <p:cNvSpPr/>
+          <p:nvPr/>
+        </p:nvSpPr>
+        <p:spPr>
+          <a:xfrm>
+            <a:off x="548640" y="2990088"/>
+            <a:ext cx="5410048" cy="1417320"/>
+          </a:xfrm>
+          <a:prstGeom prst="roundRect">
+            <a:avLst>
+              <a:gd name="adj" fmla="val 7742"/>
+            </a:avLst>
+          </a:prstGeom>
+          <a:solidFill>
+            <a:schemeClr val="bg2"/>
+          </a:solidFill>
+          <a:ln w="12700">
+            <a:solidFill>
+              <a:schemeClr val="bg2"/>
+            </a:solidFill>
+            <a:prstDash val="solid"/>
+          </a:ln>
+        </p:spPr>
+      </p:sp>
+      <p:sp>
+        <p:nvSpPr>
+          <p:cNvPr id="16" name="q-n-2"/>
+          <p:cNvSpPr/>
+          <p:nvPr/>
+        </p:nvSpPr>
+        <p:spPr>
+          <a:xfrm>
+            <a:off x="777240" y="3374136"/>
+            <a:ext cx="640080" cy="640080"/>
+          </a:xfrm>
+          <a:prstGeom prst="ellipse">
+            <a:avLst/>
+          </a:prstGeom>
+          <a:solidFill>
+            <a:schemeClr val="accent3"/>
+          </a:solidFill>
+          <a:ln w="12700">
+            <a:solidFill>
+              <a:schemeClr val="accent3"/>
+            </a:solidFill>
+            <a:prstDash val="solid"/>
+          </a:ln>
+        </p:spPr>
+      </p:sp>
+      <p:sp>
+        <p:nvSpPr>
+          <p:cNvPr id="17" name="q-n-2-n"/>
+          <p:cNvSpPr txBox="1"/>
+          <p:nvPr/>
+        </p:nvSpPr>
+        <p:spPr>
+          <a:xfrm>
+            <a:off x="777240" y="3374136"/>
+            <a:ext cx="640080" cy="640080"/>
+          </a:xfrm>
+          <a:prstGeom prst="rect">
+            <a:avLst/>
+          </a:prstGeom>
+          <a:noFill/>
+          <a:ln/>
+        </p:spPr>
+        <p:txBody>
+          <a:bodyPr wrap="square" lIns="0" tIns="0" rIns="0" bIns="0" rtlCol="0" anchor="ctr"/>
+          <a:lstStyle/>
+          <a:p>
+            <a:pPr algn="ctr" indent="0" marL="0">
+              <a:buNone/>
+            </a:pPr>
+            <a:r>
+              <a:rPr lang="en-US" sz="1700" b="1" dirty="0">
+                <a:solidFill>
+                  <a:schemeClr val="bg1"/>
+                </a:solidFill>
+              </a:rPr>
+              <a:t>?</a:t>
+            </a:r>
+            <a:endParaRPr lang="en-US" sz="1700" dirty="0"/>
+          </a:p>
+        </p:txBody>
+      </p:sp>
+      <p:sp>
+        <p:nvSpPr>
+          <p:cNvPr id="18" name="Text 16"/>
+          <p:cNvSpPr txBox="1"/>
+          <p:nvPr/>
+        </p:nvSpPr>
+        <p:spPr>
+          <a:xfrm>
+            <a:off x="1600200" y="3127248"/>
+            <a:ext cx="4175608" cy="457200"/>
+          </a:xfrm>
+          <a:prstGeom prst="rect">
+            <a:avLst/>
+          </a:prstGeom>
+          <a:noFill/>
+          <a:ln/>
+        </p:spPr>
+        <p:txBody>
+          <a:bodyPr wrap="square" lIns="0" tIns="0" rIns="0" bIns="0" rtlCol="0" anchor="t"/>
+          <a:lstStyle/>
+          <a:p>
+            <a:pPr indent="0" marL="0">
+              <a:buNone/>
+            </a:pPr>
+            <a:r>
+              <a:rPr lang="en-US" sz="1600" b="1" dirty="0">
+                <a:solidFill>
+                  <a:schemeClr val="tx2"/>
+                </a:solidFill>
+              </a:rPr>
+              <a:t>Python troka Excel?</a:t>
+            </a:r>
+            <a:endParaRPr lang="en-US" sz="1600" dirty="0"/>
+          </a:p>
+        </p:txBody>
+      </p:sp>
+      <p:sp>
+        <p:nvSpPr>
+          <p:cNvPr id="19" name="Text 17"/>
+          <p:cNvSpPr txBox="1"/>
+          <p:nvPr/>
+        </p:nvSpPr>
+        <p:spPr>
+          <a:xfrm>
+            <a:off x="1600200" y="3584448"/>
+            <a:ext cx="4175608" cy="731520"/>
+          </a:xfrm>
+          <a:prstGeom prst="rect">
+            <a:avLst/>
+          </a:prstGeom>
+          <a:noFill/>
+          <a:ln/>
+        </p:spPr>
+        <p:txBody>
+          <a:bodyPr wrap="square" lIns="0" tIns="0" rIns="0" bIns="0" rtlCol="0" anchor="t"/>
+          <a:lstStyle/>
+          <a:p>
+            <a:pPr indent="0" marL="0">
+              <a:buNone/>
+            </a:pPr>
+            <a:r>
+              <a:rPr lang="en-US" sz="1400" dirty="0">
+                <a:solidFill>
+                  <a:schemeClr val="tx1"/>
+                </a:solidFill>
+              </a:rPr>
+              <a:t>Lae. Excel nafatin di'ak ba tabela ki'ik; Python ajuda dadus barak no servisu repete.</a:t>
+            </a:r>
+            <a:endParaRPr lang="en-US" sz="1400" dirty="0"/>
+          </a:p>
+        </p:txBody>
+      </p:sp>
+      <p:sp>
+        <p:nvSpPr>
+          <p:cNvPr id="20" name="q-3"/>
+          <p:cNvSpPr/>
+          <p:nvPr/>
+        </p:nvSpPr>
+        <p:spPr>
+          <a:xfrm>
+            <a:off x="6233008" y="2990088"/>
+            <a:ext cx="5410048" cy="1417320"/>
+          </a:xfrm>
+          <a:prstGeom prst="roundRect">
+            <a:avLst>
+              <a:gd name="adj" fmla="val 7742"/>
+            </a:avLst>
+          </a:prstGeom>
+          <a:solidFill>
+            <a:schemeClr val="bg2"/>
+          </a:solidFill>
+          <a:ln w="12700">
+            <a:solidFill>
+              <a:schemeClr val="bg2"/>
+            </a:solidFill>
+            <a:prstDash val="solid"/>
+          </a:ln>
+        </p:spPr>
+      </p:sp>
+      <p:sp>
+        <p:nvSpPr>
+          <p:cNvPr id="21" name="q-n-3"/>
+          <p:cNvSpPr/>
+          <p:nvPr/>
+        </p:nvSpPr>
+        <p:spPr>
+          <a:xfrm>
+            <a:off x="6461608" y="3374136"/>
+            <a:ext cx="640080" cy="640080"/>
+          </a:xfrm>
+          <a:prstGeom prst="ellipse">
+            <a:avLst/>
+          </a:prstGeom>
+          <a:solidFill>
+            <a:schemeClr val="accent1"/>
+          </a:solidFill>
+          <a:ln w="12700">
+            <a:solidFill>
+              <a:schemeClr val="accent1"/>
+            </a:solidFill>
+            <a:prstDash val="solid"/>
+          </a:ln>
+        </p:spPr>
+      </p:sp>
+      <p:sp>
+        <p:nvSpPr>
+          <p:cNvPr id="22" name="q-n-3-n"/>
+          <p:cNvSpPr txBox="1"/>
+          <p:nvPr/>
+        </p:nvSpPr>
+        <p:spPr>
+          <a:xfrm>
+            <a:off x="6461608" y="3374136"/>
+            <a:ext cx="640080" cy="640080"/>
+          </a:xfrm>
+          <a:prstGeom prst="rect">
+            <a:avLst/>
+          </a:prstGeom>
+          <a:noFill/>
+          <a:ln/>
+        </p:spPr>
+        <p:txBody>
+          <a:bodyPr wrap="square" lIns="0" tIns="0" rIns="0" bIns="0" rtlCol="0" anchor="ctr"/>
+          <a:lstStyle/>
+          <a:p>
+            <a:pPr algn="ctr" indent="0" marL="0">
+              <a:buNone/>
+            </a:pPr>
+            <a:r>
+              <a:rPr lang="en-US" sz="1700" b="1" dirty="0">
+                <a:solidFill>
+                  <a:schemeClr val="bg1"/>
+                </a:solidFill>
+              </a:rPr>
+              <a:t>?</a:t>
+            </a:r>
+            <a:endParaRPr lang="en-US" sz="1700" dirty="0"/>
+          </a:p>
+        </p:txBody>
+      </p:sp>
+      <p:sp>
+        <p:nvSpPr>
+          <p:cNvPr id="23" name="Text 21"/>
+          <p:cNvSpPr txBox="1"/>
+          <p:nvPr/>
+        </p:nvSpPr>
+        <p:spPr>
+          <a:xfrm>
+            <a:off x="7284568" y="3127248"/>
+            <a:ext cx="4175608" cy="457200"/>
+          </a:xfrm>
+          <a:prstGeom prst="rect">
+            <a:avLst/>
+          </a:prstGeom>
+          <a:noFill/>
+          <a:ln/>
+        </p:spPr>
+        <p:txBody>
+          <a:bodyPr wrap="square" lIns="0" tIns="0" rIns="0" bIns="0" rtlCol="0" anchor="t"/>
+          <a:lstStyle/>
+          <a:p>
+            <a:pPr indent="0" marL="0">
+              <a:buNone/>
+            </a:pPr>
+            <a:r>
+              <a:rPr lang="en-US" sz="1600" b="1" dirty="0">
+                <a:solidFill>
+                  <a:schemeClr val="tx2"/>
+                </a:solidFill>
+              </a:rPr>
+              <a:t>AI sei troka ita-nia servisu?</a:t>
+            </a:r>
+            <a:endParaRPr lang="en-US" sz="1600" dirty="0"/>
+          </a:p>
+        </p:txBody>
+      </p:sp>
+      <p:sp>
+        <p:nvSpPr>
+          <p:cNvPr id="24" name="Text 22"/>
+          <p:cNvSpPr txBox="1"/>
+          <p:nvPr/>
+        </p:nvSpPr>
+        <p:spPr>
+          <a:xfrm>
+            <a:off x="7284568" y="3584448"/>
+            <a:ext cx="4175608" cy="731520"/>
+          </a:xfrm>
+          <a:prstGeom prst="rect">
+            <a:avLst/>
+          </a:prstGeom>
+          <a:noFill/>
+          <a:ln/>
+        </p:spPr>
+        <p:txBody>
+          <a:bodyPr wrap="square" lIns="0" tIns="0" rIns="0" bIns="0" rtlCol="0" anchor="t"/>
+          <a:lstStyle/>
+          <a:p>
+            <a:pPr indent="0" marL="0">
+              <a:buNone/>
+            </a:pPr>
+            <a:r>
+              <a:rPr lang="en-US" sz="1400" dirty="0">
+                <a:solidFill>
+                  <a:schemeClr val="tx1"/>
+                </a:solidFill>
+              </a:rPr>
+              <a:t>Lae. AI ajuda servisu lalais; staf mak hatene komunidade no foti desizaun.</a:t>
+            </a:r>
+            <a:endParaRPr lang="en-US" sz="1400" dirty="0"/>
+          </a:p>
+        </p:txBody>
+      </p:sp>
+      <p:sp>
+        <p:nvSpPr>
+          <p:cNvPr id="25" name="q-4"/>
+          <p:cNvSpPr/>
+          <p:nvPr/>
+        </p:nvSpPr>
+        <p:spPr>
+          <a:xfrm>
+            <a:off x="548640" y="4562856"/>
+            <a:ext cx="5410048" cy="1417320"/>
+          </a:xfrm>
+          <a:prstGeom prst="roundRect">
+            <a:avLst>
+              <a:gd name="adj" fmla="val 7742"/>
+            </a:avLst>
+          </a:prstGeom>
+          <a:solidFill>
+            <a:schemeClr val="bg2"/>
+          </a:solidFill>
+          <a:ln w="12700">
+            <a:solidFill>
+              <a:schemeClr val="bg2"/>
+            </a:solidFill>
+            <a:prstDash val="solid"/>
+          </a:ln>
+        </p:spPr>
+      </p:sp>
+      <p:sp>
+        <p:nvSpPr>
+          <p:cNvPr id="26" name="q-n-4"/>
+          <p:cNvSpPr/>
+          <p:nvPr/>
+        </p:nvSpPr>
+        <p:spPr>
+          <a:xfrm>
+            <a:off x="777240" y="4946904"/>
+            <a:ext cx="640080" cy="640080"/>
+          </a:xfrm>
+          <a:prstGeom prst="ellipse">
+            <a:avLst/>
+          </a:prstGeom>
+          <a:solidFill>
+            <a:schemeClr val="accent5"/>
+          </a:solidFill>
+          <a:ln w="12700">
+            <a:solidFill>
+              <a:schemeClr val="accent5"/>
+            </a:solidFill>
+            <a:prstDash val="solid"/>
+          </a:ln>
+        </p:spPr>
+      </p:sp>
+      <p:sp>
+        <p:nvSpPr>
+          <p:cNvPr id="27" name="q-n-4-n"/>
+          <p:cNvSpPr txBox="1"/>
+          <p:nvPr/>
+        </p:nvSpPr>
+        <p:spPr>
+          <a:xfrm>
+            <a:off x="777240" y="4946904"/>
+            <a:ext cx="640080" cy="640080"/>
+          </a:xfrm>
+          <a:prstGeom prst="rect">
+            <a:avLst/>
+          </a:prstGeom>
+          <a:noFill/>
+          <a:ln/>
+        </p:spPr>
+        <p:txBody>
+          <a:bodyPr wrap="square" lIns="0" tIns="0" rIns="0" bIns="0" rtlCol="0" anchor="ctr"/>
+          <a:lstStyle/>
+          <a:p>
+            <a:pPr algn="ctr" indent="0" marL="0">
+              <a:buNone/>
+            </a:pPr>
+            <a:r>
+              <a:rPr lang="en-US" sz="1700" b="1" dirty="0">
+                <a:solidFill>
+                  <a:schemeClr val="bg1"/>
+                </a:solidFill>
+              </a:rPr>
+              <a:t>?</a:t>
+            </a:r>
+            <a:endParaRPr lang="en-US" sz="1700" dirty="0"/>
+          </a:p>
+        </p:txBody>
+      </p:sp>
+      <p:sp>
+        <p:nvSpPr>
+          <p:cNvPr id="28" name="Text 26"/>
+          <p:cNvSpPr txBox="1"/>
+          <p:nvPr/>
+        </p:nvSpPr>
+        <p:spPr>
+          <a:xfrm>
+            <a:off x="1600200" y="4700016"/>
+            <a:ext cx="4175608" cy="457200"/>
+          </a:xfrm>
+          <a:prstGeom prst="rect">
+            <a:avLst/>
+          </a:prstGeom>
+          <a:noFill/>
+          <a:ln/>
+        </p:spPr>
+        <p:txBody>
+          <a:bodyPr wrap="square" lIns="0" tIns="0" rIns="0" bIns="0" rtlCol="0" anchor="t"/>
+          <a:lstStyle/>
+          <a:p>
+            <a:pPr indent="0" marL="0">
+              <a:buNone/>
+            </a:pPr>
+            <a:r>
+              <a:rPr lang="en-US" sz="1600" b="1" dirty="0">
+                <a:solidFill>
+                  <a:schemeClr val="tx2"/>
+                </a:solidFill>
+              </a:rPr>
+              <a:t>Dadus kazu eviksaun seguru?</a:t>
+            </a:r>
+            <a:endParaRPr lang="en-US" sz="1600" dirty="0"/>
+          </a:p>
+        </p:txBody>
+      </p:sp>
+      <p:sp>
+        <p:nvSpPr>
+          <p:cNvPr id="29" name="Text 27"/>
+          <p:cNvSpPr txBox="1"/>
+          <p:nvPr/>
+        </p:nvSpPr>
+        <p:spPr>
+          <a:xfrm>
+            <a:off x="1600200" y="5157216"/>
+            <a:ext cx="4175608" cy="731520"/>
+          </a:xfrm>
+          <a:prstGeom prst="rect">
+            <a:avLst/>
+          </a:prstGeom>
+          <a:noFill/>
+          <a:ln/>
+        </p:spPr>
+        <p:txBody>
+          <a:bodyPr wrap="square" lIns="0" tIns="0" rIns="0" bIns="0" rtlCol="0" anchor="t"/>
+          <a:lstStyle/>
+          <a:p>
+            <a:pPr indent="0" marL="0">
+              <a:buNone/>
+            </a:pPr>
+            <a:r>
+              <a:rPr lang="en-US" sz="1400" dirty="0">
+                <a:solidFill>
+                  <a:schemeClr val="tx1"/>
+                </a:solidFill>
+              </a:rPr>
+              <a:t>Sin: asesu tuir papél, password, PIN, enkriptasaun iha HP no log asesu.</a:t>
+            </a:r>
+            <a:endParaRPr lang="en-US" sz="1400" dirty="0"/>
+          </a:p>
+        </p:txBody>
+      </p:sp>
+      <p:sp>
+        <p:nvSpPr>
+          <p:cNvPr id="30" name="q-5"/>
+          <p:cNvSpPr/>
+          <p:nvPr/>
+        </p:nvSpPr>
+        <p:spPr>
+          <a:xfrm>
+            <a:off x="6233008" y="4562856"/>
+            <a:ext cx="5410048" cy="1417320"/>
+          </a:xfrm>
+          <a:prstGeom prst="roundRect">
+            <a:avLst>
+              <a:gd name="adj" fmla="val 7742"/>
+            </a:avLst>
+          </a:prstGeom>
+          <a:solidFill>
+            <a:schemeClr val="bg2"/>
+          </a:solidFill>
+          <a:ln w="12700">
+            <a:solidFill>
+              <a:schemeClr val="bg2"/>
+            </a:solidFill>
+            <a:prstDash val="solid"/>
+          </a:ln>
+        </p:spPr>
+      </p:sp>
+      <p:sp>
+        <p:nvSpPr>
+          <p:cNvPr id="31" name="q-n-5"/>
+          <p:cNvSpPr/>
+          <p:nvPr/>
+        </p:nvSpPr>
+        <p:spPr>
+          <a:xfrm>
+            <a:off x="6461608" y="4946904"/>
+            <a:ext cx="640080" cy="640080"/>
+          </a:xfrm>
+          <a:prstGeom prst="ellipse">
+            <a:avLst/>
+          </a:prstGeom>
+          <a:solidFill>
+            <a:schemeClr val="accent3"/>
+          </a:solidFill>
+          <a:ln w="12700">
+            <a:solidFill>
+              <a:schemeClr val="accent3"/>
+            </a:solidFill>
+            <a:prstDash val="solid"/>
+          </a:ln>
+        </p:spPr>
+      </p:sp>
+      <p:sp>
+        <p:nvSpPr>
+          <p:cNvPr id="32" name="q-n-5-n"/>
+          <p:cNvSpPr txBox="1"/>
+          <p:nvPr/>
+        </p:nvSpPr>
+        <p:spPr>
+          <a:xfrm>
+            <a:off x="6461608" y="4946904"/>
+            <a:ext cx="640080" cy="640080"/>
+          </a:xfrm>
+          <a:prstGeom prst="rect">
+            <a:avLst/>
+          </a:prstGeom>
+          <a:noFill/>
+          <a:ln/>
+        </p:spPr>
+        <p:txBody>
+          <a:bodyPr wrap="square" lIns="0" tIns="0" rIns="0" bIns="0" rtlCol="0" anchor="ctr"/>
+          <a:lstStyle/>
+          <a:p>
+            <a:pPr algn="ctr" indent="0" marL="0">
+              <a:buNone/>
+            </a:pPr>
+            <a:r>
+              <a:rPr lang="en-US" sz="1700" b="1" dirty="0">
+                <a:solidFill>
+                  <a:schemeClr val="bg1"/>
+                </a:solidFill>
+              </a:rPr>
+              <a:t>?</a:t>
+            </a:r>
+            <a:endParaRPr lang="en-US" sz="1700" dirty="0"/>
+          </a:p>
+        </p:txBody>
+      </p:sp>
+      <p:sp>
+        <p:nvSpPr>
+          <p:cNvPr id="33" name="Text 31"/>
+          <p:cNvSpPr txBox="1"/>
+          <p:nvPr/>
+        </p:nvSpPr>
+        <p:spPr>
+          <a:xfrm>
+            <a:off x="7284568" y="4700016"/>
+            <a:ext cx="4175608" cy="457200"/>
+          </a:xfrm>
+          <a:prstGeom prst="rect">
+            <a:avLst/>
+          </a:prstGeom>
+          <a:noFill/>
+          <a:ln/>
+        </p:spPr>
+        <p:txBody>
+          <a:bodyPr wrap="square" lIns="0" tIns="0" rIns="0" bIns="0" rtlCol="0" anchor="t"/>
+          <a:lstStyle/>
+          <a:p>
+            <a:pPr indent="0" marL="0">
+              <a:buNone/>
+            </a:pPr>
+            <a:r>
+              <a:rPr lang="en-US" sz="1600" b="1" dirty="0">
+                <a:solidFill>
+                  <a:schemeClr val="tx2"/>
+                </a:solidFill>
+              </a:rPr>
+              <a:t>Ha'u bele aprende iha ne'ebé?</a:t>
+            </a:r>
+            <a:endParaRPr lang="en-US" sz="1600" dirty="0"/>
+          </a:p>
+        </p:txBody>
+      </p:sp>
+      <p:sp>
+        <p:nvSpPr>
+          <p:cNvPr id="34" name="Text 32"/>
+          <p:cNvSpPr txBox="1"/>
+          <p:nvPr/>
+        </p:nvSpPr>
+        <p:spPr>
+          <a:xfrm>
+            <a:off x="7284568" y="5157216"/>
+            <a:ext cx="4175608" cy="731520"/>
+          </a:xfrm>
+          <a:prstGeom prst="rect">
+            <a:avLst/>
+          </a:prstGeom>
+          <a:noFill/>
+          <a:ln/>
+        </p:spPr>
+        <p:txBody>
+          <a:bodyPr wrap="square" lIns="0" tIns="0" rIns="0" bIns="0" rtlCol="0" anchor="t"/>
+          <a:lstStyle/>
+          <a:p>
+            <a:pPr indent="0" marL="0">
+              <a:buNone/>
+            </a:pPr>
+            <a:r>
+              <a:rPr lang="en-US" sz="1400" dirty="0">
+                <a:solidFill>
+                  <a:schemeClr val="tx1"/>
+                </a:solidFill>
+              </a:rPr>
+              <a:t>w3schools.com/python, Google Colab, no modulu Python RbR (Word/PDF).</a:t>
+            </a:r>
+            <a:endParaRPr lang="en-US" sz="1400" dirty="0"/>
+          </a:p>
+        </p:txBody>
+      </p:sp>
+      <p:sp>
+        <p:nvSpPr>
+          <p:cNvPr id="25" name="Slide Number Placeholder 0"/>
+          <p:cNvSpPr>
+            <a:spLocks noGrp="1"/>
+          </p:cNvSpPr>
+          <p:nvPr>
+            <p:ph type="sldNum" sz="quarter" idx="4294967295"/>
+          </p:nvPr>
+        </p:nvSpPr>
+        <p:spPr>
+          <a:xfrm>
+            <a:off x="11094415" y="6400800"/>
+            <a:ext cx="548640" cy="274320"/>
+          </a:xfrm>
+          <a:prstGeom prst="rect">
+            <a:avLst/>
+          </a:prstGeom>
+          <a:extLst>
+            <a:ext uri="{C572A759-6A51-4108-AA02-DFA0A04FC94B}">
+              <ma14:wrappingTextBoxFlag xmlns:ma14="http://schemas.microsoft.com/office/mac/drawingml/2011/main" val="0"/>
+            </a:ext>
+          </a:extLst>
+        </p:spPr>
+        <p:txBody>
+          <a:bodyPr/>
+          <a:lstStyle>
+            <a:lvl1pPr>
+              <a:defRPr sz="1000">
+                <a:solidFill>
+                  <a:srgbClr val="5E6B66"/>
+                </a:solidFill>
+              </a:defRPr>
+            </a:lvl1pPr>
+          </a:lstStyle>
+          <a:p>
+            <a:pPr algn="r"/>
+            <a:fld id="{F7021451-1387-4CA6-816F-3879F97B5CBC}" type="slidenum">
+              <a:rPr b="0" lang="en-US"/>
+              <a:t>40</a:t>
+            </a:fld>
+            <a:endParaRPr lang="en-US"/>
+          </a:p>
+        </p:txBody>
+      </p:sp>
+    </p:spTree>
+  </p:cSld>
+  <p:clrMapOvr>
+    <a:masterClrMapping/>
+  </p:clrMapOvr>
+</p:sld>
+</file>
+
+<file path=ppt/slides/slide41.xml><?xml version="1.0" encoding="utf-8"?>
+<p:sld xmlns:a="http://schemas.openxmlformats.org/drawingml/2006/main" xmlns:r="http://schemas.openxmlformats.org/officeDocument/2006/relationships" xmlns:p="http://schemas.openxmlformats.org/presentationml/2006/main">
+  <p:cSld name="Slide 41">
+    <p:spTree>
+      <p:nvGrpSpPr>
+        <p:cNvPr id="1" name=""/>
+        <p:cNvGrpSpPr/>
+        <p:nvPr/>
+      </p:nvGrpSpPr>
+      <p:grpSpPr>
+        <a:xfrm>
+          <a:off x="0" y="0"/>
+          <a:ext cx="0" cy="0"/>
+          <a:chOff x="0" y="0"/>
+          <a:chExt cx="0" cy="0"/>
+        </a:xfrm>
+      </p:grpSpPr>
+      <p:sp>
+        <p:nvSpPr>
+          <p:cNvPr id="2" name="Text 0"/>
+          <p:cNvSpPr/>
+          <p:nvPr>
+            <p:ph idx="100" type="title" hasCustomPrompt="1"/>
+          </p:nvPr>
+        </p:nvSpPr>
+        <p:spPr>
+          <a:xfrm>
+            <a:off x="548640" y="2011680"/>
+            <a:ext cx="7680960" cy="1371600"/>
+          </a:xfrm>
+          <a:prstGeom prst="rect">
+            <a:avLst/>
+          </a:prstGeom>
+          <a:noFill/>
+          <a:ln/>
+        </p:spPr>
+        <p:txBody>
+          <a:bodyPr wrap="square" lIns="0" tIns="0" rIns="0" bIns="0" rtlCol="0" anchor="b"/>
+          <a:lstStyle/>
+          <a:p>
+            <a:pPr algn="l" indent="0" marL="0">
+              <a:buNone/>
+            </a:pPr>
+            <a:r>
+              <a:rPr lang="en-US" sz="5000" b="1" dirty="0">
+                <a:solidFill>
+                  <a:schemeClr val="bg1"/>
+                </a:solidFill>
+              </a:rPr>
+              <a:t>Perguntas?</a:t>
+            </a:r>
+            <a:endParaRPr lang="en-US" sz="5000" dirty="0"/>
+          </a:p>
+        </p:txBody>
+      </p:sp>
+      <p:sp>
+        <p:nvSpPr>
+          <p:cNvPr id="3" name="Text 0"/>
+          <p:cNvSpPr/>
+          <p:nvPr>
+            <p:ph idx="101" type="body" hasCustomPrompt="1"/>
+          </p:nvPr>
+        </p:nvSpPr>
+        <p:spPr>
+          <a:xfrm>
+            <a:off x="548640" y="3520440"/>
+            <a:ext cx="7680960" cy="1645920"/>
+          </a:xfrm>
+          <a:prstGeom prst="rect">
+            <a:avLst/>
+          </a:prstGeom>
+          <a:noFill/>
+          <a:ln/>
+        </p:spPr>
+        <p:txBody>
+          <a:bodyPr wrap="square" lIns="0" tIns="0" rIns="0" bIns="0" rtlCol="0" anchor="t"/>
+          <a:lstStyle/>
+          <a:p>
+            <a:pPr indent="0" marL="0">
+              <a:buNone/>
+            </a:pPr>
+            <a:r>
+              <a:rPr lang="en-US" sz="2000" dirty="0">
+                <a:solidFill>
+                  <a:schemeClr val="bg2"/>
+                </a:solidFill>
+              </a:rPr>
+              <a:t>Obrigadu barak ba partisipasaun!</a:t>
+            </a:r>
+            <a:endParaRPr lang="en-US" sz="2000" dirty="0"/>
+          </a:p>
+          <a:p>
+            <a:pPr indent="0" marL="0">
+              <a:buNone/>
+            </a:pPr>
+            <a:r>
+              <a:rPr lang="en-US" sz="2000" b="1" dirty="0">
+                <a:solidFill>
+                  <a:schemeClr val="accent2"/>
+                </a:solidFill>
+              </a:rPr>
+              <a:t>Python: lian ne'ebé harii SIBAR-RbR</a:t>
+            </a:r>
+            <a:endParaRPr lang="en-US" sz="2000" dirty="0"/>
+          </a:p>
+        </p:txBody>
+      </p:sp>
+      <p:sp>
+        <p:nvSpPr>
+          <p:cNvPr id="4" name="rec-0-sirkulu"/>
+          <p:cNvSpPr/>
+          <p:nvPr/>
+        </p:nvSpPr>
+        <p:spPr>
+          <a:xfrm>
+            <a:off x="7955280" y="1371600"/>
+            <a:ext cx="868680" cy="868680"/>
+          </a:xfrm>
+          <a:prstGeom prst="ellipse">
+            <a:avLst/>
+          </a:prstGeom>
+          <a:solidFill>
+            <a:schemeClr val="accent1"/>
+          </a:solidFill>
+          <a:ln w="12700">
+            <a:solidFill>
+              <a:schemeClr val="accent1"/>
+            </a:solidFill>
+            <a:prstDash val="solid"/>
+          </a:ln>
+        </p:spPr>
+      </p:sp>
+      <p:pic>
+        <p:nvPicPr>
+          <p:cNvPr id="5" name="rec-0-ikone" descr="preencoded.png">    </p:cNvPr>
+          <p:cNvPicPr>
+            <a:picLocks noChangeAspect="1"/>
+          </p:cNvPicPr>
+          <p:nvPr/>
+        </p:nvPicPr>
+        <p:blipFill>
+          <a:blip r:embed="rId1"/>
+          <a:stretch>
+            <a:fillRect/>
+          </a:stretch>
+        </p:blipFill>
+        <p:spPr>
+          <a:xfrm>
+            <a:off x="8163763" y="1580083"/>
+            <a:ext cx="451714" cy="451714"/>
+          </a:xfrm>
+          <a:prstGeom prst="rect">
+            <a:avLst/>
+          </a:prstGeom>
+        </p:spPr>
+      </p:pic>
+      <p:sp>
+        <p:nvSpPr>
+          <p:cNvPr id="6" name="Text 3"/>
+          <p:cNvSpPr txBox="1"/>
+          <p:nvPr/>
+        </p:nvSpPr>
+        <p:spPr>
+          <a:xfrm>
+            <a:off x="8961120" y="1444752"/>
+            <a:ext cx="3017520" cy="365760"/>
+          </a:xfrm>
+          <a:prstGeom prst="rect">
+            <a:avLst/>
+          </a:prstGeom>
+          <a:noFill/>
+          <a:ln/>
+        </p:spPr>
+        <p:txBody>
+          <a:bodyPr wrap="square" lIns="0" tIns="0" rIns="0" bIns="0" rtlCol="0" anchor="t"/>
+          <a:lstStyle/>
+          <a:p>
+            <a:pPr indent="0" marL="0">
+              <a:buNone/>
+            </a:pPr>
+            <a:r>
+              <a:rPr lang="en-US" sz="1400" b="1" dirty="0">
+                <a:solidFill>
+                  <a:schemeClr val="bg1"/>
+                </a:solidFill>
+              </a:rPr>
+              <a:t>w3schools.com/python</a:t>
+            </a:r>
+            <a:endParaRPr lang="en-US" sz="1400" dirty="0"/>
+          </a:p>
+        </p:txBody>
+      </p:sp>
+      <p:sp>
+        <p:nvSpPr>
+          <p:cNvPr id="7" name="Text 4"/>
+          <p:cNvSpPr txBox="1"/>
+          <p:nvPr/>
+        </p:nvSpPr>
+        <p:spPr>
+          <a:xfrm>
+            <a:off x="8961120" y="1847088"/>
+            <a:ext cx="3017520" cy="365760"/>
+          </a:xfrm>
+          <a:prstGeom prst="rect">
+            <a:avLst/>
+          </a:prstGeom>
+          <a:noFill/>
+          <a:ln/>
+        </p:spPr>
+        <p:txBody>
+          <a:bodyPr wrap="square" lIns="0" tIns="0" rIns="0" bIns="0" rtlCol="0" anchor="t"/>
+          <a:lstStyle/>
+          <a:p>
+            <a:pPr indent="0" marL="0">
+              <a:buNone/>
+            </a:pPr>
+            <a:r>
+              <a:rPr lang="en-US" sz="1300" dirty="0">
+                <a:solidFill>
+                  <a:schemeClr val="bg2"/>
+                </a:solidFill>
+              </a:rPr>
+              <a:t>Aprende baze, gratuitu</a:t>
+            </a:r>
+            <a:endParaRPr lang="en-US" sz="1300" dirty="0"/>
+          </a:p>
+        </p:txBody>
+      </p:sp>
+      <p:sp>
+        <p:nvSpPr>
+          <p:cNvPr id="8" name="rec-1-sirkulu"/>
+          <p:cNvSpPr/>
+          <p:nvPr/>
+        </p:nvSpPr>
+        <p:spPr>
+          <a:xfrm>
+            <a:off x="7955280" y="2834640"/>
+            <a:ext cx="868680" cy="868680"/>
+          </a:xfrm>
+          <a:prstGeom prst="ellipse">
+            <a:avLst/>
+          </a:prstGeom>
+          <a:solidFill>
+            <a:schemeClr val="accent3"/>
+          </a:solidFill>
+          <a:ln w="12700">
+            <a:solidFill>
+              <a:schemeClr val="accent3"/>
+            </a:solidFill>
+            <a:prstDash val="solid"/>
+          </a:ln>
+        </p:spPr>
+      </p:sp>
+      <p:pic>
+        <p:nvPicPr>
+          <p:cNvPr id="9" name="rec-1-ikone" descr="preencoded.png">    </p:cNvPr>
+          <p:cNvPicPr>
+            <a:picLocks noChangeAspect="1"/>
+          </p:cNvPicPr>
+          <p:nvPr/>
+        </p:nvPicPr>
+        <p:blipFill>
+          <a:blip r:embed="rId2"/>
+          <a:stretch>
+            <a:fillRect/>
+          </a:stretch>
+        </p:blipFill>
+        <p:spPr>
+          <a:xfrm>
+            <a:off x="8163763" y="3043123"/>
+            <a:ext cx="451714" cy="451714"/>
+          </a:xfrm>
+          <a:prstGeom prst="rect">
+            <a:avLst/>
+          </a:prstGeom>
+        </p:spPr>
+      </p:pic>
+      <p:sp>
+        <p:nvSpPr>
+          <p:cNvPr id="10" name="Text 6"/>
+          <p:cNvSpPr txBox="1"/>
+          <p:nvPr/>
+        </p:nvSpPr>
+        <p:spPr>
+          <a:xfrm>
+            <a:off x="8961120" y="2907792"/>
+            <a:ext cx="3017520" cy="365760"/>
+          </a:xfrm>
+          <a:prstGeom prst="rect">
+            <a:avLst/>
+          </a:prstGeom>
+          <a:noFill/>
+          <a:ln/>
+        </p:spPr>
+        <p:txBody>
+          <a:bodyPr wrap="square" lIns="0" tIns="0" rIns="0" bIns="0" rtlCol="0" anchor="t"/>
+          <a:lstStyle/>
+          <a:p>
+            <a:pPr indent="0" marL="0">
+              <a:buNone/>
+            </a:pPr>
+            <a:r>
+              <a:rPr lang="en-US" sz="1400" b="1" dirty="0">
+                <a:solidFill>
+                  <a:schemeClr val="bg1"/>
+                </a:solidFill>
+              </a:rPr>
+              <a:t>colab.research.google.com</a:t>
+            </a:r>
+            <a:endParaRPr lang="en-US" sz="1400" dirty="0"/>
+          </a:p>
+        </p:txBody>
+      </p:sp>
+      <p:sp>
+        <p:nvSpPr>
+          <p:cNvPr id="11" name="Text 7"/>
+          <p:cNvSpPr txBox="1"/>
+          <p:nvPr/>
+        </p:nvSpPr>
+        <p:spPr>
+          <a:xfrm>
+            <a:off x="8961120" y="3310128"/>
+            <a:ext cx="3017520" cy="365760"/>
+          </a:xfrm>
+          <a:prstGeom prst="rect">
+            <a:avLst/>
+          </a:prstGeom>
+          <a:noFill/>
+          <a:ln/>
+        </p:spPr>
+        <p:txBody>
+          <a:bodyPr wrap="square" lIns="0" tIns="0" rIns="0" bIns="0" rtlCol="0" anchor="t"/>
+          <a:lstStyle/>
+          <a:p>
+            <a:pPr indent="0" marL="0">
+              <a:buNone/>
+            </a:pPr>
+            <a:r>
+              <a:rPr lang="en-US" sz="1300" dirty="0">
+                <a:solidFill>
+                  <a:schemeClr val="bg2"/>
+                </a:solidFill>
+              </a:rPr>
+              <a:t>Koko Python iha browser</a:t>
+            </a:r>
+            <a:endParaRPr lang="en-US" sz="1300" dirty="0"/>
+          </a:p>
+        </p:txBody>
+      </p:sp>
+      <p:sp>
+        <p:nvSpPr>
+          <p:cNvPr id="12" name="rec-2-sirkulu"/>
+          <p:cNvSpPr/>
+          <p:nvPr/>
+        </p:nvSpPr>
+        <p:spPr>
+          <a:xfrm>
+            <a:off x="7955280" y="4297680"/>
+            <a:ext cx="868680" cy="868680"/>
+          </a:xfrm>
+          <a:prstGeom prst="ellipse">
+            <a:avLst/>
+          </a:prstGeom>
+          <a:solidFill>
+            <a:schemeClr val="accent5"/>
+          </a:solidFill>
+          <a:ln w="12700">
+            <a:solidFill>
+              <a:schemeClr val="accent5"/>
+            </a:solidFill>
+            <a:prstDash val="solid"/>
+          </a:ln>
+        </p:spPr>
+      </p:sp>
+      <p:pic>
+        <p:nvPicPr>
+          <p:cNvPr id="13" name="rec-2-ikone" descr="preencoded.png">    </p:cNvPr>
+          <p:cNvPicPr>
+            <a:picLocks noChangeAspect="1"/>
+          </p:cNvPicPr>
+          <p:nvPr/>
+        </p:nvPicPr>
+        <p:blipFill>
+          <a:blip r:embed="rId3"/>
+          <a:stretch>
+            <a:fillRect/>
+          </a:stretch>
+        </p:blipFill>
+        <p:spPr>
+          <a:xfrm>
+            <a:off x="8163763" y="4506163"/>
+            <a:ext cx="451714" cy="451714"/>
+          </a:xfrm>
+          <a:prstGeom prst="rect">
+            <a:avLst/>
+          </a:prstGeom>
+        </p:spPr>
+      </p:pic>
+      <p:sp>
+        <p:nvSpPr>
+          <p:cNvPr id="14" name="Text 9"/>
+          <p:cNvSpPr txBox="1"/>
+          <p:nvPr/>
+        </p:nvSpPr>
+        <p:spPr>
+          <a:xfrm>
+            <a:off x="8961120" y="4370832"/>
+            <a:ext cx="3017520" cy="365760"/>
+          </a:xfrm>
+          <a:prstGeom prst="rect">
+            <a:avLst/>
+          </a:prstGeom>
+          <a:noFill/>
+          <a:ln/>
+        </p:spPr>
+        <p:txBody>
+          <a:bodyPr wrap="square" lIns="0" tIns="0" rIns="0" bIns="0" rtlCol="0" anchor="t"/>
+          <a:lstStyle/>
+          <a:p>
+            <a:pPr indent="0" marL="0">
+              <a:buNone/>
+            </a:pPr>
+            <a:r>
+              <a:rPr lang="en-US" sz="1400" b="1" dirty="0">
+                <a:solidFill>
+                  <a:schemeClr val="bg1"/>
+                </a:solidFill>
+              </a:rPr>
+              <a:t>Modulu Python RbR</a:t>
+            </a:r>
+            <a:endParaRPr lang="en-US" sz="1400" dirty="0"/>
+          </a:p>
+        </p:txBody>
+      </p:sp>
+      <p:sp>
+        <p:nvSpPr>
+          <p:cNvPr id="15" name="Text 10"/>
+          <p:cNvSpPr txBox="1"/>
+          <p:nvPr/>
+        </p:nvSpPr>
+        <p:spPr>
+          <a:xfrm>
+            <a:off x="8961120" y="4773168"/>
+            <a:ext cx="3017520" cy="365760"/>
+          </a:xfrm>
+          <a:prstGeom prst="rect">
+            <a:avLst/>
+          </a:prstGeom>
+          <a:noFill/>
+          <a:ln/>
+        </p:spPr>
+        <p:txBody>
+          <a:bodyPr wrap="square" lIns="0" tIns="0" rIns="0" bIns="0" rtlCol="0" anchor="t"/>
+          <a:lstStyle/>
+          <a:p>
+            <a:pPr indent="0" marL="0">
+              <a:buNone/>
+            </a:pPr>
+            <a:r>
+              <a:rPr lang="en-US" sz="1300" dirty="0">
+                <a:solidFill>
+                  <a:schemeClr val="bg2"/>
+                </a:solidFill>
+              </a:rPr>
+              <a:t>Word / PDF ba partisipante</a:t>
+            </a:r>
+            <a:endParaRPr lang="en-US" sz="1300" dirty="0"/>
           </a:p>
         </p:txBody>
       </p:sp>

--- a/docs/formasaun/RbR_Sesaun_Python_SIBAR-RbR.pptx
+++ b/docs/formasaun/RbR_Sesaun_Python_SIBAR-RbR.pptx
@@ -147,7 +147,7 @@
   <p:extLst>
     <p:ext uri="{521415D9-36F7-43E2-AB2F-B90AF26B5E84}">
       <p14:sectionLst xmlns:p14="http://schemas.microsoft.com/office/powerpoint/2010/main">
-        <p14:section name="Introdusaun" id="{6fc481f0-b05a-5677-be1e-60426ed65bc5}">
+        <p14:section name="Introdusaun" id="{3e8eb270-9132-f480-33f1-7c7afdd16e55}">
           <p14:sldIdLst>
             <p14:sldId id="256"/>
             <p14:sldId id="257"/>
@@ -155,7 +155,7 @@
             <p14:sldId id="259"/>
           </p14:sldIdLst>
         </p14:section>
-        <p14:section name="Saida mak Python" id="{f52e3740-2865-605e-4e09-27d0ffc36e66}">
+        <p14:section name="Saida mak Python" id="{8436abca-001f-8079-55e8-d115a03f675a}">
           <p14:sldIdLst>
             <p14:sldId id="260"/>
             <p14:sldId id="261"/>
@@ -164,7 +164,7 @@
             <p14:sldId id="264"/>
           </p14:sldIdLst>
         </p14:section>
-        <p14:section name="Istória Python" id="{f1576378-9f93-24f3-d9d2-5ded00981394}">
+        <p14:section name="Istória Python" id="{53b6186e-6d92-a846-d102-770a36d4bf88}">
           <p14:sldIdLst>
             <p14:sldId id="265"/>
             <p14:sldId id="266"/>
@@ -174,7 +174,7 @@
             <p14:sldId id="270"/>
           </p14:sldIdLst>
         </p14:section>
-        <p14:section name="Tanba sá Python" id="{1e662323-a5ed-ecba-2bc0-294a92c07bd4}">
+        <p14:section name="Tanba sá Python" id="{2b9ba412-eac5-eb7d-b083-ea949ab0e1d4}">
           <p14:sldIdLst>
             <p14:sldId id="271"/>
             <p14:sldId id="272"/>
@@ -182,7 +182,7 @@
             <p14:sldId id="274"/>
           </p14:sldIdLst>
         </p14:section>
-        <p14:section name="Python iha RbR" id="{686f8348-5feb-fdc3-c09d-dc0ab434d0fe}">
+        <p14:section name="Python iha RbR" id="{32783997-5963-dbce-b0d6-cb6c034f73bd}">
           <p14:sldIdLst>
             <p14:sldId id="275"/>
             <p14:sldId id="276"/>
@@ -190,7 +190,7 @@
             <p14:sldId id="278"/>
           </p14:sldIdLst>
         </p14:section>
-        <p14:section name="Kódigu no Live" id="{c3314644-c13e-bf46-15b9-8617c90c9bb0}">
+        <p14:section name="Kódigu no Live" id="{36e1b6df-dbe7-c2c2-8287-ed14e47bf7c2}">
           <p14:sldIdLst>
             <p14:sldId id="279"/>
             <p14:sldId id="280"/>
@@ -199,14 +199,14 @@
             <p14:sldId id="283"/>
           </p14:sldIdLst>
         </p14:section>
-        <p14:section name="Futuru" id="{5c38bcd2-dc2d-d08d-b745-715a13360c21}">
+        <p14:section name="Futuru" id="{ae88e044-e840-1413-f1c7-c8b5a5f9f706}">
           <p14:sldIdLst>
             <p14:sldId id="284"/>
             <p14:sldId id="285"/>
             <p14:sldId id="286"/>
           </p14:sldIdLst>
         </p14:section>
-        <p14:section name="Perguntas" id="{a363fa8d-fa90-16aa-2e30-8a75d8ab8bdd}">
+        <p14:section name="Perguntas" id="{adbef65a-d4b1-0770-712a-1a34cbfd60a6}">
           <p14:sldIdLst>
             <p14:sldId id="287"/>
             <p14:sldId id="288"/>
@@ -2920,7 +2920,7 @@
           <a:p>
             <a:r>
               <a:rPr lang="en-US" dirty="0"/>
-              <a:t>[11:43 – 1 min] Fahe partisipante ba grupu 5 (kontagem 1–5 ka tuir mesa). Kada grupu hili porta-voz. Grupu ida-idak simu kartaun pergunta (imprime husi Kartaun_Grupu PDF). Diskute minutu 5, depois kada grupu aprezenta minutu 1. Hatete: la iha resposta sala, ita hakarak rona imi-nia hanoin.</a:t>
+              <a:t>[11:43 – 1 min] Fahe partisipante ba grupu 5: kahur organizasaun (KSI, FONGTIL, RbR no seluk) iha kada grupu, kontagem 1–5. Kada grupu hili porta-voz. Grupu ida-idak simu kartaun pergunta (imprime husi Kartaun_Grupu PDF). Diskute minutu 5, depois kada grupu aprezenta minutu 1. Hatete: la iha resposta sala, ita hakarak rona imi-nia hanoin.</a:t>
             </a:r>
             <a:endParaRPr lang="en-US" dirty="0"/>
           </a:p>
@@ -3097,7 +3097,7 @@
             <a:r>
               <a:rPr lang="en-US" dirty="0"/>
               <a:t>[11:49 – 1 min] Porta-voz Grupu 1 aprezenta. Hafoin, agradese no aumenta ideia ida se presiza.
-Resposta ezemplu: (1) 'Python mak lian atu fó ordem ba komputadór, hanesan ita fó instrusaun ba ema.' (2) Se eviksaun akontese ona (Sin), komputadór hatudu 'Kazu urjente!'. Se Lae, la hatudu buat ida. (3) Ezemplu: konta kazu kada fulan ba relatóriu, kombina Excel husi munisípiu, buka kazu duplikadu, kalkula uma-kain afetadu.</a:t>
+Resposta ezemplu: (1) 'Python mak lian atu fó ordem ba komputadór, hanesan ita fó instrusaun ba ema.' (2) Se partisipante liu 30, komputadór hakerek 'Sala la to'o!'; se 30 ka menus, la hatudu buat ida. (3) Ezemplu: kombina lista partisipante husi Excel barak, konta benefisiáriu tuir munisípiu no seksu, halo relatóriu fulan ba doadór, haruka email lembrete automátiku, hamoos naran duplikadu.</a:t>
             </a:r>
             <a:endParaRPr lang="en-US" dirty="0"/>
           </a:p>
@@ -3186,7 +3186,7 @@
             <a:r>
               <a:rPr lang="en-US" dirty="0"/>
               <a:t>[11:50 – 1 min] Porta-voz Grupu 2 aprezenta. Hafoin, agradese no aumenta ideia ida se presiza.
-Resposta ezemplu: (1) Husi programa komédia BBC 'Monty Python's Flying Circus', la'ós husi samea. (2) Buat boot bele hahú ki'ik; ideia ida + persisténsia; ema ida bele muda mundu. (3) La selu lisensa (osan ba programa), la depende ba kompañia ida, ema barak bele ajuda, seguru tanba komunidade haree no hadi'a.</a:t>
+Resposta ezemplu: (1) Husi programa komédia BBC 'Monty Python's Flying Circus', la'ós husi samea. Naran badak no fásil hanoin. (2) Ezemplu: formuláriu online simples ba rekolla dadus, baze dadus membru, grupu aprende tekonolojia; buat boot hahú ki'ik ho persisténsia. (3) La selu lisensa; osan bele uza ba programa komunidade; la depende ba kompañia ida; komunidade mundu ajuda; staf bele aprende gratuitu online.</a:t>
             </a:r>
             <a:endParaRPr lang="en-US" dirty="0"/>
           </a:p>
@@ -3275,7 +3275,7 @@
             <a:r>
               <a:rPr lang="en-US" dirty="0"/>
               <a:t>[11:51 – 1 min] Porta-voz Grupu 3 aprezenta. Hafoin, agradese no aumenta ideia ida se presiza.
-Resposta ezemplu: (1) Dokumentu lakon, versaun Excel barak, susar buka kazu, relatóriu manuál naruk. (2) Di'ak: buka lalais, mapa, app offline, relatóriu automátiku. Susar: aprende sistema foun, sinál internet. (3) Númeru sala (kazu barak liu loloos), governu ka doadór la fiar dadus, rekursu sala fatin. Tan ne'e SIBAR-RbR agora iha ID HP automátiku no avizu 'posivel duplikadu'.</a:t>
+Resposta ezemplu: (1) Dadus iha komputadór ema ida, versaun barak, susar buka, lakon bainhira staf sai. (2) Lista partisipante formasaun, avaliasaun, dadus benefisiáriu: rekolla maibé la analiza. (3) Benefísiu: evita servisu dala rua, haree kuadru nasionál, advokasia hamutuk forte. Risku: privasidade ema, dadus sensível sai, la iha akordu; presiza regra no konsentimentu.</a:t>
             </a:r>
             <a:endParaRPr lang="en-US" dirty="0"/>
           </a:p>
@@ -3364,7 +3364,7 @@
             <a:r>
               <a:rPr lang="en-US" dirty="0"/>
               <a:t>[11:52 – 1 min] Porta-voz Grupu 4 aprezenta. Hafoin, agradese no aumenta ideia ida se presiza.
-Resposta ezemplu: (1) Kazu eviksaun la iha konsultasaun molok; uma-kain afetadu; kazu urjente: hatudu impaktu loos. (2) Ezemplu: 'Munisípiu ida-ne'ebé kazu eviksaun sa'e liu iha tinan ida-ne'e?', 'Kazu hira mak entidade governu foti rai?'. (3) Evidénsia ba diálogu ho governu, relatóriu ba parlamentu no doadór, prioridade apoiu legál ba kazu urjente.</a:t>
+Resposta ezemplu: (1) Benefisiáriu tuir seksu/idade/munisípiu, atividade hira, osan uza; halo lalais ho Excel di'ak ka Python automátiku. (2) Mapa problema tuir munisípiu, gráfiku tendénsia tinan ba tinan, komparasaun feto/mane. (3) Hili prioridade fatin ne'ebé presiza liu, fó evidénsia ba diálogu ho governu, fila fali rezultadu ba komunidade.</a:t>
             </a:r>
             <a:endParaRPr lang="en-US" dirty="0"/>
           </a:p>
@@ -3453,7 +3453,7 @@
             <a:r>
               <a:rPr lang="en-US" dirty="0"/>
               <a:t>[11:53 – 1 min] Porta-voz Grupu 5 aprezenta. Hafoin, agradese no aumenta ideia ida se presiza.
-Resposta ezemplu: (1) Hakerek relatóriu fulan, tradús dokumentu, responde pergunta komunidade kona-ba direitu rai, buka kazu hanesan. (2) Ko'alia ho komunidade, komprende kultura no konflitu, foti desizaun, verifika loos ka lae, akompaña iha terrenu. (3) Dadus iha servidór rasik RbR; la fahe naran ema la ho konsentimentu; ema sempre verifika rezultadu AI; asesu tuir papél.</a:t>
+Resposta ezemplu: (1) Hakerek rascunho relatóriu no proposta, tradús Tetun/Portugés/Inglés, rezume dokumentu naruk, ajuda hakerek fórmula Excel ka kódigu Python. (2) Ko'alia ho komunidade, komprende kultura no kontestu, foti desizaun, verifika loos ka lae, responsabilidade étika. (3) Keta tau naran/dadus pesoál iha AI públiku; ema sempre verifika rezultadu; konsentimentu; organizasaun iha polítika uza AI.</a:t>
             </a:r>
             <a:endParaRPr lang="en-US" dirty="0"/>
           </a:p>
@@ -26698,7 +26698,7 @@
                 <a:ea typeface="Cambria" pitchFamily="34" charset="-122"/>
                 <a:cs typeface="Cambria" pitchFamily="34" charset="-120"/>
               </a:rPr>
-              <a:t>Ema hotu ko'alia. La iha resposta sala. Uza ezemplu husi imi-nia servisu iha Rede ba Rai.</a:t>
+              <a:t>Ema hotu ko'alia. La iha resposta sala. Uza ezemplu husi imi-nia servisu iha imi-nia organizasaun.</a:t>
             </a:r>
             <a:endParaRPr lang="en-US" sz="2000" dirty="0"/>
           </a:p>
@@ -27475,7 +27475,7 @@
                   <a:schemeClr val="tx2"/>
                 </a:solidFill>
               </a:rPr>
-              <a:t>Dadus RbR: uluk no agora</a:t>
+              <a:t>Dadus iha organizasaun</a:t>
             </a:r>
             <a:endParaRPr lang="en-US" sz="1600" dirty="0"/>
           </a:p>
@@ -27511,7 +27511,7 @@
                   <a:schemeClr val="tx1"/>
                 </a:solidFill>
               </a:rPr>
-              <a:t>Iha tempu surat, Word no Excel: problema saida mak imi hasoru?</a:t>
+              <a:t>Imi-nia organizasaun rai dadus oinsá agora (papél, Excel, Google Sheets)? Problema boot liu saida?</a:t>
             </a:r>
             <a:endParaRPr lang="en-US" sz="1300" dirty="0"/>
           </a:p>
@@ -27725,7 +27725,7 @@
                   <a:schemeClr val="tx1"/>
                 </a:solidFill>
               </a:rPr>
-              <a:t>Númeru ida-ne'ebé iha Live Dashboard mak importante liu ba advokasia? Tanba sá?</a:t>
+              <a:t>Númeru saida mak doadór ka governu husu beibeik ba imi? Oinsá halo lalais?</a:t>
             </a:r>
             <a:endParaRPr lang="en-US" sz="1300" dirty="0"/>
           </a:p>
@@ -27939,7 +27939,7 @@
                   <a:schemeClr val="tx1"/>
                 </a:solidFill>
               </a:rPr>
-              <a:t>Se RbR iha ajente AI, servisu ida-ne'ebé imi hakarak AI ajuda?</a:t>
+              <a:t>AI (ChatGPT, Claude, Gemini) bele ajuda imi-nia servisu iha saida?</a:t>
             </a:r>
             <a:endParaRPr lang="en-US" sz="1300" dirty="0"/>
           </a:p>
@@ -28575,7 +28575,7 @@
                 <a:ea typeface="Courier New" pitchFamily="34" charset="-122"/>
                 <a:cs typeface="Courier New" pitchFamily="34" charset="-120"/>
               </a:rPr>
-              <a:t>if eviksaun == "Sin":</a:t>
+              <a:t>if partisipante &gt; 30:</a:t>
             </a:r>
             <a:endParaRPr lang="en-US" sz="1400" dirty="0"/>
           </a:p>
@@ -28592,7 +28592,7 @@
                 <a:ea typeface="Courier New" pitchFamily="34" charset="-122"/>
                 <a:cs typeface="Courier New" pitchFamily="34" charset="-120"/>
               </a:rPr>
-              <a:t>    print("Kazu urjente!")</a:t>
+              <a:t>    print("Sala la to'o!")</a:t>
             </a:r>
             <a:endParaRPr lang="en-US" sz="1400" dirty="0"/>
           </a:p>
@@ -28716,7 +28716,7 @@
                   <a:schemeClr val="tx2"/>
                 </a:solidFill>
               </a:rPr>
-              <a:t>Servisu ida iha RbR ne'ebé imi halo fali beibeik ho liman. Python bele ajuda oinsá?</a:t>
+              <a:t>Servisu ida iha imi-nia organizasaun ne'ebé halo fali beibeik ho liman. Python bele ajuda oinsá?</a:t>
             </a:r>
             <a:endParaRPr lang="en-US" sz="1800" dirty="0"/>
           </a:p>
@@ -29286,7 +29286,7 @@
                   <a:schemeClr val="tx2"/>
                 </a:solidFill>
               </a:rPr>
-              <a:t>Guido hahú Python iha feriadu Natál hanesan projetu ki'ik. Lisaun saida ba ita?</a:t>
+              <a:t>Guido hahú Python hanesan projetu ki'ik iha feriadu. Ideia ki'ik saida iha imi-nia organizasaun bele sai boot?</a:t>
             </a:r>
             <a:endParaRPr lang="en-US" sz="1800" dirty="0"/>
           </a:p>
@@ -29410,7 +29410,7 @@
                   <a:schemeClr val="tx2"/>
                 </a:solidFill>
               </a:rPr>
-              <a:t>Python gratuitu no komunidade mundu mak kuida. Tanba sá ida-ne'e importante ba RbR?</a:t>
+              <a:t>Python gratuitu (open source). Vantajen saida ba ONG ho orsamentu ki'ik?</a:t>
             </a:r>
             <a:endParaRPr lang="en-US" sz="1800" dirty="0"/>
           </a:p>
@@ -29518,7 +29518,7 @@
                   <a:schemeClr val="tx2"/>
                 </a:solidFill>
               </a:rPr>
-              <a:t>Grupu 3: Dadus RbR: uluk no agora</a:t>
+              <a:t>Grupu 3: Dadus iha organizasaun</a:t>
             </a:r>
             <a:endParaRPr lang="en-US" sz="3000" dirty="0"/>
           </a:p>
@@ -29732,7 +29732,7 @@
                   <a:schemeClr val="bg1"/>
                 </a:solidFill>
               </a:rPr>
-              <a:t>Dadus RbR: uluk no agora</a:t>
+              <a:t>Dadus iha organizasaun</a:t>
             </a:r>
             <a:endParaRPr lang="en-US" sz="1600" dirty="0"/>
           </a:p>
@@ -29856,7 +29856,7 @@
                   <a:schemeClr val="tx2"/>
                 </a:solidFill>
               </a:rPr>
-              <a:t>Iha tempu surat, Word no Excel: problema saida mak imi hasoru?</a:t>
+              <a:t>Imi-nia organizasaun rai dadus oinsá agora (papél, Excel, Google Sheets)? Problema boot liu saida?</a:t>
             </a:r>
             <a:endParaRPr lang="en-US" sz="1800" dirty="0"/>
           </a:p>
@@ -29980,7 +29980,7 @@
                   <a:schemeClr val="tx2"/>
                 </a:solidFill>
               </a:rPr>
-              <a:t>Saida mak muda iha imi-nia servisu ho SIBAR-RbR? Buat ida di'ak no buat ida susar.</a:t>
+              <a:t>Dadus saida mak imi rekolla, maibé la uza di'ak?</a:t>
             </a:r>
             <a:endParaRPr lang="en-US" sz="1800" dirty="0"/>
           </a:p>
@@ -30104,7 +30104,7 @@
                   <a:schemeClr val="tx2"/>
                 </a:solidFill>
               </a:rPr>
-              <a:t>Se kazu eviksaun ida rejista dala rua, saida mak bele akontese ba relatóriu no advokasia?</a:t>
+              <a:t>Se organizasaun barak (KSI, FONGTIL, RbR...) fahe dadus, benefísiu no risku saida?</a:t>
             </a:r>
             <a:endParaRPr lang="en-US" sz="1800" dirty="0"/>
           </a:p>
@@ -30550,7 +30550,7 @@
                   <a:schemeClr val="tx2"/>
                 </a:solidFill>
               </a:rPr>
-              <a:t>Númeru ida-ne'ebé iha Live Dashboard mak importante liu ba advokasia? Tanba sá?</a:t>
+              <a:t>Númeru saida mak doadór ka governu husu beibeik ba imi? Oinsá halo lalais?</a:t>
             </a:r>
             <a:endParaRPr lang="en-US" sz="1800" dirty="0"/>
           </a:p>
@@ -30674,7 +30674,7 @@
                   <a:schemeClr val="tx2"/>
                 </a:solidFill>
               </a:rPr>
-              <a:t>Se imi bele husu Python atu konta buat ida, saida mak imi hakarak hatene?</a:t>
+              <a:t>Gráfiku ka mapa ida ne'ebé sei ajuda imi-nia advokasia?</a:t>
             </a:r>
             <a:endParaRPr lang="en-US" sz="1800" dirty="0"/>
           </a:p>
@@ -30798,7 +30798,7 @@
                   <a:schemeClr val="tx2"/>
                 </a:solidFill>
               </a:rPr>
-              <a:t>Oinsá dadus kazu eviksaun bele ajuda komunidade afetadu duni?</a:t>
+              <a:t>Oinsá dadus bele ajuda komunidade duni, la'ós de'it ba relatóriu?</a:t>
             </a:r>
             <a:endParaRPr lang="en-US" sz="1800" dirty="0"/>
           </a:p>
@@ -31244,7 +31244,7 @@
                   <a:schemeClr val="tx2"/>
                 </a:solidFill>
               </a:rPr>
-              <a:t>Se RbR iha ajente AI, servisu ida-ne'ebé imi hakarak AI ajuda?</a:t>
+              <a:t>AI (ChatGPT, Claude, Gemini) bele ajuda imi-nia servisu iha saida?</a:t>
             </a:r>
             <a:endParaRPr lang="en-US" sz="1800" dirty="0"/>
           </a:p>
@@ -31492,7 +31492,7 @@
                   <a:schemeClr val="tx2"/>
                 </a:solidFill>
               </a:rPr>
-              <a:t>Dadus komunidade sensível: regra saida mak tenke iha bainhira uza AI?</a:t>
+              <a:t>Regra saida mak organizasaun tenke iha bainhira uza AI ho dadus komunidade?</a:t>
             </a:r>
             <a:endParaRPr lang="en-US" sz="1800" dirty="0"/>
           </a:p>
